--- a/Clase 3/PPT/Clase03_Ridge_Lasso_SVR.pptx
+++ b/Clase 3/PPT/Clase03_Ridge_Lasso_SVR.pptx
@@ -4,6 +4,9 @@
   <p:sldMasterIdLst>
     <p:sldMasterId id="2147483648" r:id="rId1"/>
   </p:sldMasterIdLst>
+  <p:notesMasterIdLst>
+    <p:notesMasterId r:id="rId19"/>
+  </p:notesMasterIdLst>
   <p:sldIdLst>
     <p:sldId id="256" r:id="rId2"/>
     <p:sldId id="257" r:id="rId3"/>
@@ -23,9 +26,6 @@
     <p:sldId id="271" r:id="rId17"/>
     <p:sldId id="272" r:id="rId18"/>
   </p:sldIdLst>
-  <p:notesMasterIdLst>
-    <p:notesMasterId r:id="rId19"/>
-  </p:notesMasterIdLst>
   <p:sldSz cx="12192000" cy="6858000"/>
   <p:notesSz cx="6858000" cy="12192000"/>
   <p:defaultTextStyle>
@@ -120,18 +120,26 @@
       </a:defRPr>
     </a:lvl9pPr>
   </p:defaultTextStyle>
+  <p:extLst>
+    <p:ext uri="{EFAFB233-063F-42B5-8137-9DF3F51BA10A}">
+      <p15:sldGuideLst xmlns:p15="http://schemas.microsoft.com/office/powerpoint/2012/main"/>
+    </p:ext>
+  </p:extLst>
 </p:presentation>
 </file>
 
 <file path=ppt/charts/chart1.xml><?xml version="1.0" encoding="utf-8"?>
-<c:chartSpace xmlns:c="http://schemas.openxmlformats.org/drawingml/2006/chart" xmlns:a="http://schemas.openxmlformats.org/drawingml/2006/main" xmlns:r="http://schemas.openxmlformats.org/officeDocument/2006/relationships">
+<c:chartSpace xmlns:c="http://schemas.openxmlformats.org/drawingml/2006/chart" xmlns:a="http://schemas.openxmlformats.org/drawingml/2006/main" xmlns:r="http://schemas.openxmlformats.org/officeDocument/2006/relationships" xmlns:c16r2="http://schemas.microsoft.com/office/drawing/2015/06/chart">
   <c:date1904 val="0"/>
+  <c:lang val="en-US"/>
   <c:roundedCorners val="1"/>
+  <c:style val="2"/>
   <c:chart>
     <c:autoTitleDeleted val="1"/>
     <c:plotArea>
       <c:layout/>
       <c:lineChart>
+        <c:grouping val="standard"/>
         <c:varyColors val="0"/>
         <c:ser>
           <c:idx val="0"/>
@@ -148,9 +156,6 @@
             </c:strRef>
           </c:tx>
           <c:spPr>
-            <a:solidFill>
-              <a:srgbClr val="E6115E"/>
-            </a:solidFill>
             <a:ln w="28575" cap="flat">
               <a:solidFill>
                 <a:srgbClr val="E6115E"/>
@@ -160,132 +165,37 @@
             </a:ln>
             <a:effectLst/>
           </c:spPr>
-          <c:invertIfNegative val="0"/>
-          <c:dLbls>
-            <c:numFmt formatCode="#,##0" sourceLinked="0"/>
-            <c:txPr>
-              <a:bodyPr/>
-              <a:lstStyle/>
-              <a:p>
-                <a:pPr>
-                  <a:defRPr b="0" i="0" strike="noStrike" sz="1200" u="none">
-                    <a:solidFill>
-                      <a:srgbClr val="000000"/>
-                    </a:solidFill>
-                    <a:latin typeface="Arial"/>
-                  </a:defRPr>
-                </a:pPr>
-              </a:p>
-            </c:txPr>
-            <c:showLegendKey val="0"/>
-            <c:showVal val="0"/>
-            <c:showCatName val="0"/>
-            <c:showSerName val="0"/>
-            <c:showPercent val="0"/>
-            <c:showBubbleSize val="0"/>
-            <c:showLeaderLines val="0"/>
-          </c:dLbls>
           <c:marker>
             <c:symbol val="none"/>
-            <c:size val="6"/>
-            <c:spPr>
-              <a:solidFill>
-                <a:srgbClr val="E6115E"/>
-              </a:solidFill>
-              <a:ln w="9525" cap="flat">
-                <a:solidFill>
-                  <a:srgbClr val="E6115E"/>
-                </a:solidFill>
-                <a:prstDash val="solid"/>
-                <a:round/>
-              </a:ln>
-              <a:effectLst/>
-            </c:spPr>
           </c:marker>
           <c:cat>
-            <c:multiLvlStrRef>
+            <c:strRef>
               <c:f>Sheet1!$A$2:$A$26</c:f>
-              <c:multiLvlStrCache>
+              <c:strCache>
                 <c:ptCount val="25"/>
-                <c:lvl>
-                  <c:pt idx="0">
-                    <c:v>0.1</c:v>
-                  </c:pt>
-                  <c:pt idx="1">
-                    <c:v/>
-                  </c:pt>
-                  <c:pt idx="2">
-                    <c:v/>
-                  </c:pt>
-                  <c:pt idx="3">
-                    <c:v/>
-                  </c:pt>
-                  <c:pt idx="4">
-                    <c:v>1</c:v>
-                  </c:pt>
-                  <c:pt idx="5">
-                    <c:v/>
-                  </c:pt>
-                  <c:pt idx="6">
-                    <c:v/>
-                  </c:pt>
-                  <c:pt idx="7">
-                    <c:v/>
-                  </c:pt>
-                  <c:pt idx="8">
-                    <c:v>10</c:v>
-                  </c:pt>
-                  <c:pt idx="9">
-                    <c:v/>
-                  </c:pt>
-                  <c:pt idx="10">
-                    <c:v/>
-                  </c:pt>
-                  <c:pt idx="11">
-                    <c:v/>
-                  </c:pt>
-                  <c:pt idx="12">
-                    <c:v>100</c:v>
-                  </c:pt>
-                  <c:pt idx="13">
-                    <c:v/>
-                  </c:pt>
-                  <c:pt idx="14">
-                    <c:v/>
-                  </c:pt>
-                  <c:pt idx="15">
-                    <c:v/>
-                  </c:pt>
-                  <c:pt idx="16">
-                    <c:v>1 000</c:v>
-                  </c:pt>
-                  <c:pt idx="17">
-                    <c:v/>
-                  </c:pt>
-                  <c:pt idx="18">
-                    <c:v/>
-                  </c:pt>
-                  <c:pt idx="19">
-                    <c:v/>
-                  </c:pt>
-                  <c:pt idx="20">
-                    <c:v>10 000</c:v>
-                  </c:pt>
-                  <c:pt idx="21">
-                    <c:v/>
-                  </c:pt>
-                  <c:pt idx="22">
-                    <c:v/>
-                  </c:pt>
-                  <c:pt idx="23">
-                    <c:v/>
-                  </c:pt>
-                  <c:pt idx="24">
-                    <c:v>100 000</c:v>
-                  </c:pt>
-                </c:lvl>
-              </c:multiLvlStrCache>
-            </c:multiLvlStrRef>
+                <c:pt idx="0">
+                  <c:v>0.1</c:v>
+                </c:pt>
+                <c:pt idx="4">
+                  <c:v>1</c:v>
+                </c:pt>
+                <c:pt idx="8">
+                  <c:v>10</c:v>
+                </c:pt>
+                <c:pt idx="12">
+                  <c:v>100</c:v>
+                </c:pt>
+                <c:pt idx="16">
+                  <c:v>1 000</c:v>
+                </c:pt>
+                <c:pt idx="20">
+                  <c:v>10 000</c:v>
+                </c:pt>
+                <c:pt idx="24">
+                  <c:v>100 000</c:v>
+                </c:pt>
+              </c:strCache>
+            </c:strRef>
           </c:cat>
           <c:val>
             <c:numRef>
@@ -372,6 +282,11 @@
             </c:numRef>
           </c:val>
           <c:smooth val="0"/>
+          <c:extLst>
+            <c:ext xmlns:c16="http://schemas.microsoft.com/office/drawing/2014/chart" uri="{C3380CC4-5D6E-409C-BE32-E72D297353CC}">
+              <c16:uniqueId val="{00000000-80DD-FA48-A95C-680F8BE58BC8}"/>
+            </c:ext>
+          </c:extLst>
         </c:ser>
         <c:ser>
           <c:idx val="1"/>
@@ -388,9 +303,6 @@
             </c:strRef>
           </c:tx>
           <c:spPr>
-            <a:solidFill>
-              <a:srgbClr val="1A56E8"/>
-            </a:solidFill>
             <a:ln w="28575" cap="flat">
               <a:solidFill>
                 <a:srgbClr val="1A56E8"/>
@@ -400,132 +312,37 @@
             </a:ln>
             <a:effectLst/>
           </c:spPr>
-          <c:invertIfNegative val="0"/>
-          <c:dLbls>
-            <c:numFmt formatCode="#,##0" sourceLinked="0"/>
-            <c:txPr>
-              <a:bodyPr/>
-              <a:lstStyle/>
-              <a:p>
-                <a:pPr>
-                  <a:defRPr b="0" i="0" strike="noStrike" sz="1200" u="none">
-                    <a:solidFill>
-                      <a:srgbClr val="000000"/>
-                    </a:solidFill>
-                    <a:latin typeface="Arial"/>
-                  </a:defRPr>
-                </a:pPr>
-              </a:p>
-            </c:txPr>
-            <c:showLegendKey val="0"/>
-            <c:showVal val="0"/>
-            <c:showCatName val="0"/>
-            <c:showSerName val="0"/>
-            <c:showPercent val="0"/>
-            <c:showBubbleSize val="0"/>
-            <c:showLeaderLines val="0"/>
-          </c:dLbls>
           <c:marker>
             <c:symbol val="none"/>
-            <c:size val="6"/>
-            <c:spPr>
-              <a:solidFill>
-                <a:srgbClr val="1A56E8"/>
-              </a:solidFill>
-              <a:ln w="9525" cap="flat">
-                <a:solidFill>
-                  <a:srgbClr val="1A56E8"/>
-                </a:solidFill>
-                <a:prstDash val="solid"/>
-                <a:round/>
-              </a:ln>
-              <a:effectLst/>
-            </c:spPr>
           </c:marker>
           <c:cat>
-            <c:multiLvlStrRef>
+            <c:strRef>
               <c:f>Sheet1!$A$2:$A$26</c:f>
-              <c:multiLvlStrCache>
+              <c:strCache>
                 <c:ptCount val="25"/>
-                <c:lvl>
-                  <c:pt idx="0">
-                    <c:v>0.1</c:v>
-                  </c:pt>
-                  <c:pt idx="1">
-                    <c:v/>
-                  </c:pt>
-                  <c:pt idx="2">
-                    <c:v/>
-                  </c:pt>
-                  <c:pt idx="3">
-                    <c:v/>
-                  </c:pt>
-                  <c:pt idx="4">
-                    <c:v>1</c:v>
-                  </c:pt>
-                  <c:pt idx="5">
-                    <c:v/>
-                  </c:pt>
-                  <c:pt idx="6">
-                    <c:v/>
-                  </c:pt>
-                  <c:pt idx="7">
-                    <c:v/>
-                  </c:pt>
-                  <c:pt idx="8">
-                    <c:v>10</c:v>
-                  </c:pt>
-                  <c:pt idx="9">
-                    <c:v/>
-                  </c:pt>
-                  <c:pt idx="10">
-                    <c:v/>
-                  </c:pt>
-                  <c:pt idx="11">
-                    <c:v/>
-                  </c:pt>
-                  <c:pt idx="12">
-                    <c:v>100</c:v>
-                  </c:pt>
-                  <c:pt idx="13">
-                    <c:v/>
-                  </c:pt>
-                  <c:pt idx="14">
-                    <c:v/>
-                  </c:pt>
-                  <c:pt idx="15">
-                    <c:v/>
-                  </c:pt>
-                  <c:pt idx="16">
-                    <c:v>1 000</c:v>
-                  </c:pt>
-                  <c:pt idx="17">
-                    <c:v/>
-                  </c:pt>
-                  <c:pt idx="18">
-                    <c:v/>
-                  </c:pt>
-                  <c:pt idx="19">
-                    <c:v/>
-                  </c:pt>
-                  <c:pt idx="20">
-                    <c:v>10 000</c:v>
-                  </c:pt>
-                  <c:pt idx="21">
-                    <c:v/>
-                  </c:pt>
-                  <c:pt idx="22">
-                    <c:v/>
-                  </c:pt>
-                  <c:pt idx="23">
-                    <c:v/>
-                  </c:pt>
-                  <c:pt idx="24">
-                    <c:v>100 000</c:v>
-                  </c:pt>
-                </c:lvl>
-              </c:multiLvlStrCache>
-            </c:multiLvlStrRef>
+                <c:pt idx="0">
+                  <c:v>0.1</c:v>
+                </c:pt>
+                <c:pt idx="4">
+                  <c:v>1</c:v>
+                </c:pt>
+                <c:pt idx="8">
+                  <c:v>10</c:v>
+                </c:pt>
+                <c:pt idx="12">
+                  <c:v>100</c:v>
+                </c:pt>
+                <c:pt idx="16">
+                  <c:v>1 000</c:v>
+                </c:pt>
+                <c:pt idx="20">
+                  <c:v>10 000</c:v>
+                </c:pt>
+                <c:pt idx="24">
+                  <c:v>100 000</c:v>
+                </c:pt>
+              </c:strCache>
+            </c:strRef>
           </c:cat>
           <c:val>
             <c:numRef>
@@ -612,6 +429,11 @@
             </c:numRef>
           </c:val>
           <c:smooth val="0"/>
+          <c:extLst>
+            <c:ext xmlns:c16="http://schemas.microsoft.com/office/drawing/2014/chart" uri="{C3380CC4-5D6E-409C-BE32-E72D297353CC}">
+              <c16:uniqueId val="{00000001-80DD-FA48-A95C-680F8BE58BC8}"/>
+            </c:ext>
+          </c:extLst>
         </c:ser>
         <c:ser>
           <c:idx val="2"/>
@@ -628,9 +450,6 @@
             </c:strRef>
           </c:tx>
           <c:spPr>
-            <a:solidFill>
-              <a:srgbClr val="12B886"/>
-            </a:solidFill>
             <a:ln w="28575" cap="flat">
               <a:solidFill>
                 <a:srgbClr val="12B886"/>
@@ -640,132 +459,37 @@
             </a:ln>
             <a:effectLst/>
           </c:spPr>
-          <c:invertIfNegative val="0"/>
-          <c:dLbls>
-            <c:numFmt formatCode="#,##0" sourceLinked="0"/>
-            <c:txPr>
-              <a:bodyPr/>
-              <a:lstStyle/>
-              <a:p>
-                <a:pPr>
-                  <a:defRPr b="0" i="0" strike="noStrike" sz="1200" u="none">
-                    <a:solidFill>
-                      <a:srgbClr val="000000"/>
-                    </a:solidFill>
-                    <a:latin typeface="Arial"/>
-                  </a:defRPr>
-                </a:pPr>
-              </a:p>
-            </c:txPr>
-            <c:showLegendKey val="0"/>
-            <c:showVal val="0"/>
-            <c:showCatName val="0"/>
-            <c:showSerName val="0"/>
-            <c:showPercent val="0"/>
-            <c:showBubbleSize val="0"/>
-            <c:showLeaderLines val="0"/>
-          </c:dLbls>
           <c:marker>
             <c:symbol val="none"/>
-            <c:size val="6"/>
-            <c:spPr>
-              <a:solidFill>
-                <a:srgbClr val="12B886"/>
-              </a:solidFill>
-              <a:ln w="9525" cap="flat">
-                <a:solidFill>
-                  <a:srgbClr val="12B886"/>
-                </a:solidFill>
-                <a:prstDash val="solid"/>
-                <a:round/>
-              </a:ln>
-              <a:effectLst/>
-            </c:spPr>
           </c:marker>
           <c:cat>
-            <c:multiLvlStrRef>
+            <c:strRef>
               <c:f>Sheet1!$A$2:$A$26</c:f>
-              <c:multiLvlStrCache>
+              <c:strCache>
                 <c:ptCount val="25"/>
-                <c:lvl>
-                  <c:pt idx="0">
-                    <c:v>0.1</c:v>
-                  </c:pt>
-                  <c:pt idx="1">
-                    <c:v/>
-                  </c:pt>
-                  <c:pt idx="2">
-                    <c:v/>
-                  </c:pt>
-                  <c:pt idx="3">
-                    <c:v/>
-                  </c:pt>
-                  <c:pt idx="4">
-                    <c:v>1</c:v>
-                  </c:pt>
-                  <c:pt idx="5">
-                    <c:v/>
-                  </c:pt>
-                  <c:pt idx="6">
-                    <c:v/>
-                  </c:pt>
-                  <c:pt idx="7">
-                    <c:v/>
-                  </c:pt>
-                  <c:pt idx="8">
-                    <c:v>10</c:v>
-                  </c:pt>
-                  <c:pt idx="9">
-                    <c:v/>
-                  </c:pt>
-                  <c:pt idx="10">
-                    <c:v/>
-                  </c:pt>
-                  <c:pt idx="11">
-                    <c:v/>
-                  </c:pt>
-                  <c:pt idx="12">
-                    <c:v>100</c:v>
-                  </c:pt>
-                  <c:pt idx="13">
-                    <c:v/>
-                  </c:pt>
-                  <c:pt idx="14">
-                    <c:v/>
-                  </c:pt>
-                  <c:pt idx="15">
-                    <c:v/>
-                  </c:pt>
-                  <c:pt idx="16">
-                    <c:v>1 000</c:v>
-                  </c:pt>
-                  <c:pt idx="17">
-                    <c:v/>
-                  </c:pt>
-                  <c:pt idx="18">
-                    <c:v/>
-                  </c:pt>
-                  <c:pt idx="19">
-                    <c:v/>
-                  </c:pt>
-                  <c:pt idx="20">
-                    <c:v>10 000</c:v>
-                  </c:pt>
-                  <c:pt idx="21">
-                    <c:v/>
-                  </c:pt>
-                  <c:pt idx="22">
-                    <c:v/>
-                  </c:pt>
-                  <c:pt idx="23">
-                    <c:v/>
-                  </c:pt>
-                  <c:pt idx="24">
-                    <c:v>100 000</c:v>
-                  </c:pt>
-                </c:lvl>
-              </c:multiLvlStrCache>
-            </c:multiLvlStrRef>
+                <c:pt idx="0">
+                  <c:v>0.1</c:v>
+                </c:pt>
+                <c:pt idx="4">
+                  <c:v>1</c:v>
+                </c:pt>
+                <c:pt idx="8">
+                  <c:v>10</c:v>
+                </c:pt>
+                <c:pt idx="12">
+                  <c:v>100</c:v>
+                </c:pt>
+                <c:pt idx="16">
+                  <c:v>1 000</c:v>
+                </c:pt>
+                <c:pt idx="20">
+                  <c:v>10 000</c:v>
+                </c:pt>
+                <c:pt idx="24">
+                  <c:v>100 000</c:v>
+                </c:pt>
+              </c:strCache>
+            </c:strRef>
           </c:cat>
           <c:val>
             <c:numRef>
@@ -852,6 +576,11 @@
             </c:numRef>
           </c:val>
           <c:smooth val="0"/>
+          <c:extLst>
+            <c:ext xmlns:c16="http://schemas.microsoft.com/office/drawing/2014/chart" uri="{C3380CC4-5D6E-409C-BE32-E72D297353CC}">
+              <c16:uniqueId val="{00000002-80DD-FA48-A95C-680F8BE58BC8}"/>
+            </c:ext>
+          </c:extLst>
         </c:ser>
         <c:ser>
           <c:idx val="3"/>
@@ -868,9 +597,6 @@
             </c:strRef>
           </c:tx>
           <c:spPr>
-            <a:solidFill>
-              <a:srgbClr val="0A2559"/>
-            </a:solidFill>
             <a:ln w="28575" cap="flat">
               <a:solidFill>
                 <a:srgbClr val="0A2559"/>
@@ -880,132 +606,37 @@
             </a:ln>
             <a:effectLst/>
           </c:spPr>
-          <c:invertIfNegative val="0"/>
-          <c:dLbls>
-            <c:numFmt formatCode="#,##0" sourceLinked="0"/>
-            <c:txPr>
-              <a:bodyPr/>
-              <a:lstStyle/>
-              <a:p>
-                <a:pPr>
-                  <a:defRPr b="0" i="0" strike="noStrike" sz="1200" u="none">
-                    <a:solidFill>
-                      <a:srgbClr val="000000"/>
-                    </a:solidFill>
-                    <a:latin typeface="Arial"/>
-                  </a:defRPr>
-                </a:pPr>
-              </a:p>
-            </c:txPr>
-            <c:showLegendKey val="0"/>
-            <c:showVal val="0"/>
-            <c:showCatName val="0"/>
-            <c:showSerName val="0"/>
-            <c:showPercent val="0"/>
-            <c:showBubbleSize val="0"/>
-            <c:showLeaderLines val="0"/>
-          </c:dLbls>
           <c:marker>
             <c:symbol val="none"/>
-            <c:size val="6"/>
-            <c:spPr>
-              <a:solidFill>
-                <a:srgbClr val="0A2559"/>
-              </a:solidFill>
-              <a:ln w="9525" cap="flat">
-                <a:solidFill>
-                  <a:srgbClr val="0A2559"/>
-                </a:solidFill>
-                <a:prstDash val="solid"/>
-                <a:round/>
-              </a:ln>
-              <a:effectLst/>
-            </c:spPr>
           </c:marker>
           <c:cat>
-            <c:multiLvlStrRef>
+            <c:strRef>
               <c:f>Sheet1!$A$2:$A$26</c:f>
-              <c:multiLvlStrCache>
+              <c:strCache>
                 <c:ptCount val="25"/>
-                <c:lvl>
-                  <c:pt idx="0">
-                    <c:v>0.1</c:v>
-                  </c:pt>
-                  <c:pt idx="1">
-                    <c:v/>
-                  </c:pt>
-                  <c:pt idx="2">
-                    <c:v/>
-                  </c:pt>
-                  <c:pt idx="3">
-                    <c:v/>
-                  </c:pt>
-                  <c:pt idx="4">
-                    <c:v>1</c:v>
-                  </c:pt>
-                  <c:pt idx="5">
-                    <c:v/>
-                  </c:pt>
-                  <c:pt idx="6">
-                    <c:v/>
-                  </c:pt>
-                  <c:pt idx="7">
-                    <c:v/>
-                  </c:pt>
-                  <c:pt idx="8">
-                    <c:v>10</c:v>
-                  </c:pt>
-                  <c:pt idx="9">
-                    <c:v/>
-                  </c:pt>
-                  <c:pt idx="10">
-                    <c:v/>
-                  </c:pt>
-                  <c:pt idx="11">
-                    <c:v/>
-                  </c:pt>
-                  <c:pt idx="12">
-                    <c:v>100</c:v>
-                  </c:pt>
-                  <c:pt idx="13">
-                    <c:v/>
-                  </c:pt>
-                  <c:pt idx="14">
-                    <c:v/>
-                  </c:pt>
-                  <c:pt idx="15">
-                    <c:v/>
-                  </c:pt>
-                  <c:pt idx="16">
-                    <c:v>1 000</c:v>
-                  </c:pt>
-                  <c:pt idx="17">
-                    <c:v/>
-                  </c:pt>
-                  <c:pt idx="18">
-                    <c:v/>
-                  </c:pt>
-                  <c:pt idx="19">
-                    <c:v/>
-                  </c:pt>
-                  <c:pt idx="20">
-                    <c:v>10 000</c:v>
-                  </c:pt>
-                  <c:pt idx="21">
-                    <c:v/>
-                  </c:pt>
-                  <c:pt idx="22">
-                    <c:v/>
-                  </c:pt>
-                  <c:pt idx="23">
-                    <c:v/>
-                  </c:pt>
-                  <c:pt idx="24">
-                    <c:v>100 000</c:v>
-                  </c:pt>
-                </c:lvl>
-              </c:multiLvlStrCache>
-            </c:multiLvlStrRef>
+                <c:pt idx="0">
+                  <c:v>0.1</c:v>
+                </c:pt>
+                <c:pt idx="4">
+                  <c:v>1</c:v>
+                </c:pt>
+                <c:pt idx="8">
+                  <c:v>10</c:v>
+                </c:pt>
+                <c:pt idx="12">
+                  <c:v>100</c:v>
+                </c:pt>
+                <c:pt idx="16">
+                  <c:v>1 000</c:v>
+                </c:pt>
+                <c:pt idx="20">
+                  <c:v>10 000</c:v>
+                </c:pt>
+                <c:pt idx="24">
+                  <c:v>100 000</c:v>
+                </c:pt>
+              </c:strCache>
+            </c:strRef>
           </c:cat>
           <c:val>
             <c:numRef>
@@ -1092,35 +723,23 @@
             </c:numRef>
           </c:val>
           <c:smooth val="0"/>
+          <c:extLst>
+            <c:ext xmlns:c16="http://schemas.microsoft.com/office/drawing/2014/chart" uri="{C3380CC4-5D6E-409C-BE32-E72D297353CC}">
+              <c16:uniqueId val="{00000003-80DD-FA48-A95C-680F8BE58BC8}"/>
+            </c:ext>
+          </c:extLst>
         </c:ser>
         <c:dLbls>
-          <c:numFmt formatCode="#,##0" sourceLinked="0"/>
-          <c:txPr>
-            <a:bodyPr/>
-            <a:lstStyle/>
-            <a:p>
-              <a:pPr>
-                <a:defRPr b="0" i="0" strike="noStrike" sz="1200" u="none">
-                  <a:solidFill>
-                    <a:srgbClr val="000000"/>
-                  </a:solidFill>
-                  <a:latin typeface="Arial"/>
-                </a:defRPr>
-              </a:pPr>
-            </a:p>
-          </c:txPr>
           <c:showLegendKey val="0"/>
           <c:showVal val="0"/>
           <c:showCatName val="0"/>
           <c:showSerName val="0"/>
           <c:showPercent val="0"/>
           <c:showBubbleSize val="0"/>
-          <c:showLeaderLines val="0"/>
         </c:dLbls>
-        <c:marker val="1"/>
+        <c:smooth val="0"/>
         <c:axId val="2094734554"/>
         <c:axId val="2094734552"/>
-        <c:axId val="2094734556"/>
       </c:lineChart>
       <c:catAx>
         <c:axId val="2094734554"/>
@@ -1144,18 +763,26 @@
                   </a:defRPr>
                 </a:pPr>
                 <a:r>
-                  <a:rPr sz="1050" b="0" i="0" u="none" strike="noStrike">
+                  <a:rPr lang="el-GR" sz="1050" b="0" i="0" u="none" strike="noStrike">
                     <a:solidFill>
                       <a:srgbClr val="5B6B87"/>
                     </a:solidFill>
                     <a:latin typeface="Arial"/>
                   </a:rPr>
-                  <a:t>α →  más freno</a:t>
+                  <a:t>α →  </a:t>
+                </a:r>
+                <a:r>
+                  <a:rPr lang="en-US" sz="1050" b="0" i="0" u="none" strike="noStrike">
+                    <a:solidFill>
+                      <a:srgbClr val="5B6B87"/>
+                    </a:solidFill>
+                    <a:latin typeface="Arial"/>
+                  </a:rPr>
+                  <a:t>más freno</a:t>
                 </a:r>
               </a:p>
             </c:rich>
           </c:tx>
-          <c:layout/>
           <c:overlay val="0"/>
         </c:title>
         <c:numFmt formatCode="General" sourceLinked="1"/>
@@ -1190,8 +817,9 @@
         <c:crosses val="autoZero"/>
         <c:auto val="1"/>
         <c:lblAlgn val="ctr"/>
+        <c:lblOffset val="100"/>
+        <c:tickLblSkip val="4"/>
         <c:noMultiLvlLbl val="1"/>
-        <c:tickLblSkip val="4"/>
       </c:catAx>
       <c:valAx>
         <c:axId val="2094734552"/>
@@ -1270,6 +898,7 @@
     </c:legend>
     <c:plotVisOnly val="1"/>
     <c:dispBlanksAs val="span"/>
+    <c:showDLblsOverMax val="1"/>
   </c:chart>
   <c:spPr>
     <a:noFill/>
@@ -1285,14 +914,17 @@
 </file>
 
 <file path=ppt/charts/chart2.xml><?xml version="1.0" encoding="utf-8"?>
-<c:chartSpace xmlns:c="http://schemas.openxmlformats.org/drawingml/2006/chart" xmlns:a="http://schemas.openxmlformats.org/drawingml/2006/main" xmlns:r="http://schemas.openxmlformats.org/officeDocument/2006/relationships">
+<c:chartSpace xmlns:c="http://schemas.openxmlformats.org/drawingml/2006/chart" xmlns:a="http://schemas.openxmlformats.org/drawingml/2006/main" xmlns:r="http://schemas.openxmlformats.org/officeDocument/2006/relationships" xmlns:c16r2="http://schemas.microsoft.com/office/drawing/2015/06/chart">
   <c:date1904 val="0"/>
+  <c:lang val="en-US"/>
   <c:roundedCorners val="1"/>
+  <c:style val="2"/>
   <c:chart>
     <c:autoTitleDeleted val="1"/>
     <c:plotArea>
       <c:layout/>
       <c:lineChart>
+        <c:grouping val="standard"/>
         <c:varyColors val="0"/>
         <c:ser>
           <c:idx val="0"/>
@@ -1309,9 +941,6 @@
             </c:strRef>
           </c:tx>
           <c:spPr>
-            <a:solidFill>
-              <a:srgbClr val="E6115E"/>
-            </a:solidFill>
             <a:ln w="28575" cap="flat">
               <a:solidFill>
                 <a:srgbClr val="E6115E"/>
@@ -1321,132 +950,37 @@
             </a:ln>
             <a:effectLst/>
           </c:spPr>
-          <c:invertIfNegative val="0"/>
-          <c:dLbls>
-            <c:numFmt formatCode="#,##0" sourceLinked="0"/>
-            <c:txPr>
-              <a:bodyPr/>
-              <a:lstStyle/>
-              <a:p>
-                <a:pPr>
-                  <a:defRPr b="0" i="0" strike="noStrike" sz="1200" u="none">
-                    <a:solidFill>
-                      <a:srgbClr val="000000"/>
-                    </a:solidFill>
-                    <a:latin typeface="Arial"/>
-                  </a:defRPr>
-                </a:pPr>
-              </a:p>
-            </c:txPr>
-            <c:showLegendKey val="0"/>
-            <c:showVal val="0"/>
-            <c:showCatName val="0"/>
-            <c:showSerName val="0"/>
-            <c:showPercent val="0"/>
-            <c:showBubbleSize val="0"/>
-            <c:showLeaderLines val="0"/>
-          </c:dLbls>
           <c:marker>
             <c:symbol val="none"/>
-            <c:size val="6"/>
-            <c:spPr>
-              <a:solidFill>
-                <a:srgbClr val="E6115E"/>
-              </a:solidFill>
-              <a:ln w="9525" cap="flat">
-                <a:solidFill>
-                  <a:srgbClr val="E6115E"/>
-                </a:solidFill>
-                <a:prstDash val="solid"/>
-                <a:round/>
-              </a:ln>
-              <a:effectLst/>
-            </c:spPr>
           </c:marker>
           <c:cat>
-            <c:multiLvlStrRef>
+            <c:strRef>
               <c:f>Sheet1!$A$2:$A$26</c:f>
-              <c:multiLvlStrCache>
+              <c:strCache>
                 <c:ptCount val="25"/>
-                <c:lvl>
-                  <c:pt idx="0">
-                    <c:v>10</c:v>
-                  </c:pt>
-                  <c:pt idx="1">
-                    <c:v/>
-                  </c:pt>
-                  <c:pt idx="2">
-                    <c:v/>
-                  </c:pt>
-                  <c:pt idx="3">
-                    <c:v/>
-                  </c:pt>
-                  <c:pt idx="4">
-                    <c:v>43</c:v>
-                  </c:pt>
-                  <c:pt idx="5">
-                    <c:v/>
-                  </c:pt>
-                  <c:pt idx="6">
-                    <c:v/>
-                  </c:pt>
-                  <c:pt idx="7">
-                    <c:v/>
-                  </c:pt>
-                  <c:pt idx="8">
-                    <c:v>185</c:v>
-                  </c:pt>
-                  <c:pt idx="9">
-                    <c:v/>
-                  </c:pt>
-                  <c:pt idx="10">
-                    <c:v/>
-                  </c:pt>
-                  <c:pt idx="11">
-                    <c:v/>
-                  </c:pt>
-                  <c:pt idx="12">
-                    <c:v>794</c:v>
-                  </c:pt>
-                  <c:pt idx="13">
-                    <c:v/>
-                  </c:pt>
-                  <c:pt idx="14">
-                    <c:v/>
-                  </c:pt>
-                  <c:pt idx="15">
-                    <c:v/>
-                  </c:pt>
-                  <c:pt idx="16">
-                    <c:v>3 415</c:v>
-                  </c:pt>
-                  <c:pt idx="17">
-                    <c:v/>
-                  </c:pt>
-                  <c:pt idx="18">
-                    <c:v/>
-                  </c:pt>
-                  <c:pt idx="19">
-                    <c:v/>
-                  </c:pt>
-                  <c:pt idx="20">
-                    <c:v>14 678</c:v>
-                  </c:pt>
-                  <c:pt idx="21">
-                    <c:v/>
-                  </c:pt>
-                  <c:pt idx="22">
-                    <c:v/>
-                  </c:pt>
-                  <c:pt idx="23">
-                    <c:v/>
-                  </c:pt>
-                  <c:pt idx="24">
-                    <c:v>63 096</c:v>
-                  </c:pt>
-                </c:lvl>
-              </c:multiLvlStrCache>
-            </c:multiLvlStrRef>
+                <c:pt idx="0">
+                  <c:v>10</c:v>
+                </c:pt>
+                <c:pt idx="4">
+                  <c:v>43</c:v>
+                </c:pt>
+                <c:pt idx="8">
+                  <c:v>185</c:v>
+                </c:pt>
+                <c:pt idx="12">
+                  <c:v>794</c:v>
+                </c:pt>
+                <c:pt idx="16">
+                  <c:v>3 415</c:v>
+                </c:pt>
+                <c:pt idx="20">
+                  <c:v>14 678</c:v>
+                </c:pt>
+                <c:pt idx="24">
+                  <c:v>63 096</c:v>
+                </c:pt>
+              </c:strCache>
+            </c:strRef>
           </c:cat>
           <c:val>
             <c:numRef>
@@ -1533,6 +1067,11 @@
             </c:numRef>
           </c:val>
           <c:smooth val="0"/>
+          <c:extLst>
+            <c:ext xmlns:c16="http://schemas.microsoft.com/office/drawing/2014/chart" uri="{C3380CC4-5D6E-409C-BE32-E72D297353CC}">
+              <c16:uniqueId val="{00000000-407C-F943-B281-1B1DBBE9944B}"/>
+            </c:ext>
+          </c:extLst>
         </c:ser>
         <c:ser>
           <c:idx val="1"/>
@@ -1549,9 +1088,6 @@
             </c:strRef>
           </c:tx>
           <c:spPr>
-            <a:solidFill>
-              <a:srgbClr val="1A56E8"/>
-            </a:solidFill>
             <a:ln w="28575" cap="flat">
               <a:solidFill>
                 <a:srgbClr val="1A56E8"/>
@@ -1561,132 +1097,37 @@
             </a:ln>
             <a:effectLst/>
           </c:spPr>
-          <c:invertIfNegative val="0"/>
-          <c:dLbls>
-            <c:numFmt formatCode="#,##0" sourceLinked="0"/>
-            <c:txPr>
-              <a:bodyPr/>
-              <a:lstStyle/>
-              <a:p>
-                <a:pPr>
-                  <a:defRPr b="0" i="0" strike="noStrike" sz="1200" u="none">
-                    <a:solidFill>
-                      <a:srgbClr val="000000"/>
-                    </a:solidFill>
-                    <a:latin typeface="Arial"/>
-                  </a:defRPr>
-                </a:pPr>
-              </a:p>
-            </c:txPr>
-            <c:showLegendKey val="0"/>
-            <c:showVal val="0"/>
-            <c:showCatName val="0"/>
-            <c:showSerName val="0"/>
-            <c:showPercent val="0"/>
-            <c:showBubbleSize val="0"/>
-            <c:showLeaderLines val="0"/>
-          </c:dLbls>
           <c:marker>
             <c:symbol val="none"/>
-            <c:size val="6"/>
-            <c:spPr>
-              <a:solidFill>
-                <a:srgbClr val="1A56E8"/>
-              </a:solidFill>
-              <a:ln w="9525" cap="flat">
-                <a:solidFill>
-                  <a:srgbClr val="1A56E8"/>
-                </a:solidFill>
-                <a:prstDash val="solid"/>
-                <a:round/>
-              </a:ln>
-              <a:effectLst/>
-            </c:spPr>
           </c:marker>
           <c:cat>
-            <c:multiLvlStrRef>
+            <c:strRef>
               <c:f>Sheet1!$A$2:$A$26</c:f>
-              <c:multiLvlStrCache>
+              <c:strCache>
                 <c:ptCount val="25"/>
-                <c:lvl>
-                  <c:pt idx="0">
-                    <c:v>10</c:v>
-                  </c:pt>
-                  <c:pt idx="1">
-                    <c:v/>
-                  </c:pt>
-                  <c:pt idx="2">
-                    <c:v/>
-                  </c:pt>
-                  <c:pt idx="3">
-                    <c:v/>
-                  </c:pt>
-                  <c:pt idx="4">
-                    <c:v>43</c:v>
-                  </c:pt>
-                  <c:pt idx="5">
-                    <c:v/>
-                  </c:pt>
-                  <c:pt idx="6">
-                    <c:v/>
-                  </c:pt>
-                  <c:pt idx="7">
-                    <c:v/>
-                  </c:pt>
-                  <c:pt idx="8">
-                    <c:v>185</c:v>
-                  </c:pt>
-                  <c:pt idx="9">
-                    <c:v/>
-                  </c:pt>
-                  <c:pt idx="10">
-                    <c:v/>
-                  </c:pt>
-                  <c:pt idx="11">
-                    <c:v/>
-                  </c:pt>
-                  <c:pt idx="12">
-                    <c:v>794</c:v>
-                  </c:pt>
-                  <c:pt idx="13">
-                    <c:v/>
-                  </c:pt>
-                  <c:pt idx="14">
-                    <c:v/>
-                  </c:pt>
-                  <c:pt idx="15">
-                    <c:v/>
-                  </c:pt>
-                  <c:pt idx="16">
-                    <c:v>3 415</c:v>
-                  </c:pt>
-                  <c:pt idx="17">
-                    <c:v/>
-                  </c:pt>
-                  <c:pt idx="18">
-                    <c:v/>
-                  </c:pt>
-                  <c:pt idx="19">
-                    <c:v/>
-                  </c:pt>
-                  <c:pt idx="20">
-                    <c:v>14 678</c:v>
-                  </c:pt>
-                  <c:pt idx="21">
-                    <c:v/>
-                  </c:pt>
-                  <c:pt idx="22">
-                    <c:v/>
-                  </c:pt>
-                  <c:pt idx="23">
-                    <c:v/>
-                  </c:pt>
-                  <c:pt idx="24">
-                    <c:v>63 096</c:v>
-                  </c:pt>
-                </c:lvl>
-              </c:multiLvlStrCache>
-            </c:multiLvlStrRef>
+                <c:pt idx="0">
+                  <c:v>10</c:v>
+                </c:pt>
+                <c:pt idx="4">
+                  <c:v>43</c:v>
+                </c:pt>
+                <c:pt idx="8">
+                  <c:v>185</c:v>
+                </c:pt>
+                <c:pt idx="12">
+                  <c:v>794</c:v>
+                </c:pt>
+                <c:pt idx="16">
+                  <c:v>3 415</c:v>
+                </c:pt>
+                <c:pt idx="20">
+                  <c:v>14 678</c:v>
+                </c:pt>
+                <c:pt idx="24">
+                  <c:v>63 096</c:v>
+                </c:pt>
+              </c:strCache>
+            </c:strRef>
           </c:cat>
           <c:val>
             <c:numRef>
@@ -1773,6 +1214,11 @@
             </c:numRef>
           </c:val>
           <c:smooth val="0"/>
+          <c:extLst>
+            <c:ext xmlns:c16="http://schemas.microsoft.com/office/drawing/2014/chart" uri="{C3380CC4-5D6E-409C-BE32-E72D297353CC}">
+              <c16:uniqueId val="{00000001-407C-F943-B281-1B1DBBE9944B}"/>
+            </c:ext>
+          </c:extLst>
         </c:ser>
         <c:ser>
           <c:idx val="2"/>
@@ -1789,9 +1235,6 @@
             </c:strRef>
           </c:tx>
           <c:spPr>
-            <a:solidFill>
-              <a:srgbClr val="12B886"/>
-            </a:solidFill>
             <a:ln w="28575" cap="flat">
               <a:solidFill>
                 <a:srgbClr val="12B886"/>
@@ -1801,132 +1244,37 @@
             </a:ln>
             <a:effectLst/>
           </c:spPr>
-          <c:invertIfNegative val="0"/>
-          <c:dLbls>
-            <c:numFmt formatCode="#,##0" sourceLinked="0"/>
-            <c:txPr>
-              <a:bodyPr/>
-              <a:lstStyle/>
-              <a:p>
-                <a:pPr>
-                  <a:defRPr b="0" i="0" strike="noStrike" sz="1200" u="none">
-                    <a:solidFill>
-                      <a:srgbClr val="000000"/>
-                    </a:solidFill>
-                    <a:latin typeface="Arial"/>
-                  </a:defRPr>
-                </a:pPr>
-              </a:p>
-            </c:txPr>
-            <c:showLegendKey val="0"/>
-            <c:showVal val="0"/>
-            <c:showCatName val="0"/>
-            <c:showSerName val="0"/>
-            <c:showPercent val="0"/>
-            <c:showBubbleSize val="0"/>
-            <c:showLeaderLines val="0"/>
-          </c:dLbls>
           <c:marker>
             <c:symbol val="none"/>
-            <c:size val="6"/>
-            <c:spPr>
-              <a:solidFill>
-                <a:srgbClr val="12B886"/>
-              </a:solidFill>
-              <a:ln w="9525" cap="flat">
-                <a:solidFill>
-                  <a:srgbClr val="12B886"/>
-                </a:solidFill>
-                <a:prstDash val="solid"/>
-                <a:round/>
-              </a:ln>
-              <a:effectLst/>
-            </c:spPr>
           </c:marker>
           <c:cat>
-            <c:multiLvlStrRef>
+            <c:strRef>
               <c:f>Sheet1!$A$2:$A$26</c:f>
-              <c:multiLvlStrCache>
+              <c:strCache>
                 <c:ptCount val="25"/>
-                <c:lvl>
-                  <c:pt idx="0">
-                    <c:v>10</c:v>
-                  </c:pt>
-                  <c:pt idx="1">
-                    <c:v/>
-                  </c:pt>
-                  <c:pt idx="2">
-                    <c:v/>
-                  </c:pt>
-                  <c:pt idx="3">
-                    <c:v/>
-                  </c:pt>
-                  <c:pt idx="4">
-                    <c:v>43</c:v>
-                  </c:pt>
-                  <c:pt idx="5">
-                    <c:v/>
-                  </c:pt>
-                  <c:pt idx="6">
-                    <c:v/>
-                  </c:pt>
-                  <c:pt idx="7">
-                    <c:v/>
-                  </c:pt>
-                  <c:pt idx="8">
-                    <c:v>185</c:v>
-                  </c:pt>
-                  <c:pt idx="9">
-                    <c:v/>
-                  </c:pt>
-                  <c:pt idx="10">
-                    <c:v/>
-                  </c:pt>
-                  <c:pt idx="11">
-                    <c:v/>
-                  </c:pt>
-                  <c:pt idx="12">
-                    <c:v>794</c:v>
-                  </c:pt>
-                  <c:pt idx="13">
-                    <c:v/>
-                  </c:pt>
-                  <c:pt idx="14">
-                    <c:v/>
-                  </c:pt>
-                  <c:pt idx="15">
-                    <c:v/>
-                  </c:pt>
-                  <c:pt idx="16">
-                    <c:v>3 415</c:v>
-                  </c:pt>
-                  <c:pt idx="17">
-                    <c:v/>
-                  </c:pt>
-                  <c:pt idx="18">
-                    <c:v/>
-                  </c:pt>
-                  <c:pt idx="19">
-                    <c:v/>
-                  </c:pt>
-                  <c:pt idx="20">
-                    <c:v>14 678</c:v>
-                  </c:pt>
-                  <c:pt idx="21">
-                    <c:v/>
-                  </c:pt>
-                  <c:pt idx="22">
-                    <c:v/>
-                  </c:pt>
-                  <c:pt idx="23">
-                    <c:v/>
-                  </c:pt>
-                  <c:pt idx="24">
-                    <c:v>63 096</c:v>
-                  </c:pt>
-                </c:lvl>
-              </c:multiLvlStrCache>
-            </c:multiLvlStrRef>
+                <c:pt idx="0">
+                  <c:v>10</c:v>
+                </c:pt>
+                <c:pt idx="4">
+                  <c:v>43</c:v>
+                </c:pt>
+                <c:pt idx="8">
+                  <c:v>185</c:v>
+                </c:pt>
+                <c:pt idx="12">
+                  <c:v>794</c:v>
+                </c:pt>
+                <c:pt idx="16">
+                  <c:v>3 415</c:v>
+                </c:pt>
+                <c:pt idx="20">
+                  <c:v>14 678</c:v>
+                </c:pt>
+                <c:pt idx="24">
+                  <c:v>63 096</c:v>
+                </c:pt>
+              </c:strCache>
+            </c:strRef>
           </c:cat>
           <c:val>
             <c:numRef>
@@ -2013,6 +1361,11 @@
             </c:numRef>
           </c:val>
           <c:smooth val="0"/>
+          <c:extLst>
+            <c:ext xmlns:c16="http://schemas.microsoft.com/office/drawing/2014/chart" uri="{C3380CC4-5D6E-409C-BE32-E72D297353CC}">
+              <c16:uniqueId val="{00000002-407C-F943-B281-1B1DBBE9944B}"/>
+            </c:ext>
+          </c:extLst>
         </c:ser>
         <c:ser>
           <c:idx val="3"/>
@@ -2029,9 +1382,6 @@
             </c:strRef>
           </c:tx>
           <c:spPr>
-            <a:solidFill>
-              <a:srgbClr val="0A2559"/>
-            </a:solidFill>
             <a:ln w="28575" cap="flat">
               <a:solidFill>
                 <a:srgbClr val="0A2559"/>
@@ -2041,132 +1391,37 @@
             </a:ln>
             <a:effectLst/>
           </c:spPr>
-          <c:invertIfNegative val="0"/>
-          <c:dLbls>
-            <c:numFmt formatCode="#,##0" sourceLinked="0"/>
-            <c:txPr>
-              <a:bodyPr/>
-              <a:lstStyle/>
-              <a:p>
-                <a:pPr>
-                  <a:defRPr b="0" i="0" strike="noStrike" sz="1200" u="none">
-                    <a:solidFill>
-                      <a:srgbClr val="000000"/>
-                    </a:solidFill>
-                    <a:latin typeface="Arial"/>
-                  </a:defRPr>
-                </a:pPr>
-              </a:p>
-            </c:txPr>
-            <c:showLegendKey val="0"/>
-            <c:showVal val="0"/>
-            <c:showCatName val="0"/>
-            <c:showSerName val="0"/>
-            <c:showPercent val="0"/>
-            <c:showBubbleSize val="0"/>
-            <c:showLeaderLines val="0"/>
-          </c:dLbls>
           <c:marker>
             <c:symbol val="none"/>
-            <c:size val="6"/>
-            <c:spPr>
-              <a:solidFill>
-                <a:srgbClr val="0A2559"/>
-              </a:solidFill>
-              <a:ln w="9525" cap="flat">
-                <a:solidFill>
-                  <a:srgbClr val="0A2559"/>
-                </a:solidFill>
-                <a:prstDash val="solid"/>
-                <a:round/>
-              </a:ln>
-              <a:effectLst/>
-            </c:spPr>
           </c:marker>
           <c:cat>
-            <c:multiLvlStrRef>
+            <c:strRef>
               <c:f>Sheet1!$A$2:$A$26</c:f>
-              <c:multiLvlStrCache>
+              <c:strCache>
                 <c:ptCount val="25"/>
-                <c:lvl>
-                  <c:pt idx="0">
-                    <c:v>10</c:v>
-                  </c:pt>
-                  <c:pt idx="1">
-                    <c:v/>
-                  </c:pt>
-                  <c:pt idx="2">
-                    <c:v/>
-                  </c:pt>
-                  <c:pt idx="3">
-                    <c:v/>
-                  </c:pt>
-                  <c:pt idx="4">
-                    <c:v>43</c:v>
-                  </c:pt>
-                  <c:pt idx="5">
-                    <c:v/>
-                  </c:pt>
-                  <c:pt idx="6">
-                    <c:v/>
-                  </c:pt>
-                  <c:pt idx="7">
-                    <c:v/>
-                  </c:pt>
-                  <c:pt idx="8">
-                    <c:v>185</c:v>
-                  </c:pt>
-                  <c:pt idx="9">
-                    <c:v/>
-                  </c:pt>
-                  <c:pt idx="10">
-                    <c:v/>
-                  </c:pt>
-                  <c:pt idx="11">
-                    <c:v/>
-                  </c:pt>
-                  <c:pt idx="12">
-                    <c:v>794</c:v>
-                  </c:pt>
-                  <c:pt idx="13">
-                    <c:v/>
-                  </c:pt>
-                  <c:pt idx="14">
-                    <c:v/>
-                  </c:pt>
-                  <c:pt idx="15">
-                    <c:v/>
-                  </c:pt>
-                  <c:pt idx="16">
-                    <c:v>3 415</c:v>
-                  </c:pt>
-                  <c:pt idx="17">
-                    <c:v/>
-                  </c:pt>
-                  <c:pt idx="18">
-                    <c:v/>
-                  </c:pt>
-                  <c:pt idx="19">
-                    <c:v/>
-                  </c:pt>
-                  <c:pt idx="20">
-                    <c:v>14 678</c:v>
-                  </c:pt>
-                  <c:pt idx="21">
-                    <c:v/>
-                  </c:pt>
-                  <c:pt idx="22">
-                    <c:v/>
-                  </c:pt>
-                  <c:pt idx="23">
-                    <c:v/>
-                  </c:pt>
-                  <c:pt idx="24">
-                    <c:v>63 096</c:v>
-                  </c:pt>
-                </c:lvl>
-              </c:multiLvlStrCache>
-            </c:multiLvlStrRef>
+                <c:pt idx="0">
+                  <c:v>10</c:v>
+                </c:pt>
+                <c:pt idx="4">
+                  <c:v>43</c:v>
+                </c:pt>
+                <c:pt idx="8">
+                  <c:v>185</c:v>
+                </c:pt>
+                <c:pt idx="12">
+                  <c:v>794</c:v>
+                </c:pt>
+                <c:pt idx="16">
+                  <c:v>3 415</c:v>
+                </c:pt>
+                <c:pt idx="20">
+                  <c:v>14 678</c:v>
+                </c:pt>
+                <c:pt idx="24">
+                  <c:v>63 096</c:v>
+                </c:pt>
+              </c:strCache>
+            </c:strRef>
           </c:cat>
           <c:val>
             <c:numRef>
@@ -2253,35 +1508,23 @@
             </c:numRef>
           </c:val>
           <c:smooth val="0"/>
+          <c:extLst>
+            <c:ext xmlns:c16="http://schemas.microsoft.com/office/drawing/2014/chart" uri="{C3380CC4-5D6E-409C-BE32-E72D297353CC}">
+              <c16:uniqueId val="{00000003-407C-F943-B281-1B1DBBE9944B}"/>
+            </c:ext>
+          </c:extLst>
         </c:ser>
         <c:dLbls>
-          <c:numFmt formatCode="#,##0" sourceLinked="0"/>
-          <c:txPr>
-            <a:bodyPr/>
-            <a:lstStyle/>
-            <a:p>
-              <a:pPr>
-                <a:defRPr b="0" i="0" strike="noStrike" sz="1200" u="none">
-                  <a:solidFill>
-                    <a:srgbClr val="000000"/>
-                  </a:solidFill>
-                  <a:latin typeface="Arial"/>
-                </a:defRPr>
-              </a:pPr>
-            </a:p>
-          </c:txPr>
           <c:showLegendKey val="0"/>
           <c:showVal val="0"/>
           <c:showCatName val="0"/>
           <c:showSerName val="0"/>
           <c:showPercent val="0"/>
           <c:showBubbleSize val="0"/>
-          <c:showLeaderLines val="0"/>
         </c:dLbls>
-        <c:marker val="1"/>
+        <c:smooth val="0"/>
         <c:axId val="2094734554"/>
         <c:axId val="2094734552"/>
-        <c:axId val="2094734556"/>
       </c:lineChart>
       <c:catAx>
         <c:axId val="2094734554"/>
@@ -2305,18 +1548,26 @@
                   </a:defRPr>
                 </a:pPr>
                 <a:r>
-                  <a:rPr sz="1050" b="0" i="0" u="none" strike="noStrike">
+                  <a:rPr lang="el-GR" sz="1050" b="0" i="0" u="none" strike="noStrike">
                     <a:solidFill>
                       <a:srgbClr val="5B6B87"/>
                     </a:solidFill>
                     <a:latin typeface="Arial"/>
                   </a:rPr>
-                  <a:t>α →  más freno</a:t>
+                  <a:t>α →  </a:t>
+                </a:r>
+                <a:r>
+                  <a:rPr lang="en-US" sz="1050" b="0" i="0" u="none" strike="noStrike">
+                    <a:solidFill>
+                      <a:srgbClr val="5B6B87"/>
+                    </a:solidFill>
+                    <a:latin typeface="Arial"/>
+                  </a:rPr>
+                  <a:t>más freno</a:t>
                 </a:r>
               </a:p>
             </c:rich>
           </c:tx>
-          <c:layout/>
           <c:overlay val="0"/>
         </c:title>
         <c:numFmt formatCode="General" sourceLinked="1"/>
@@ -2351,8 +1602,9 @@
         <c:crosses val="autoZero"/>
         <c:auto val="1"/>
         <c:lblAlgn val="ctr"/>
+        <c:lblOffset val="100"/>
+        <c:tickLblSkip val="4"/>
         <c:noMultiLvlLbl val="1"/>
-        <c:tickLblSkip val="4"/>
       </c:catAx>
       <c:valAx>
         <c:axId val="2094734552"/>
@@ -2431,6 +1683,7 @@
     </c:legend>
     <c:plotVisOnly val="1"/>
     <c:dispBlanksAs val="span"/>
+    <c:showDLblsOverMax val="1"/>
   </c:chart>
   <c:spPr>
     <a:noFill/>
@@ -2446,14 +1699,17 @@
 </file>
 
 <file path=ppt/charts/chart3.xml><?xml version="1.0" encoding="utf-8"?>
-<c:chartSpace xmlns:c="http://schemas.openxmlformats.org/drawingml/2006/chart" xmlns:a="http://schemas.openxmlformats.org/drawingml/2006/main" xmlns:r="http://schemas.openxmlformats.org/officeDocument/2006/relationships">
+<c:chartSpace xmlns:c="http://schemas.openxmlformats.org/drawingml/2006/chart" xmlns:a="http://schemas.openxmlformats.org/drawingml/2006/main" xmlns:r="http://schemas.openxmlformats.org/officeDocument/2006/relationships" xmlns:c16r2="http://schemas.microsoft.com/office/drawing/2015/06/chart">
   <c:date1904 val="0"/>
+  <c:lang val="en-US"/>
   <c:roundedCorners val="1"/>
+  <c:style val="2"/>
   <c:chart>
     <c:autoTitleDeleted val="1"/>
     <c:plotArea>
       <c:layout/>
       <c:lineChart>
+        <c:grouping val="standard"/>
         <c:varyColors val="0"/>
         <c:ser>
           <c:idx val="0"/>
@@ -2470,9 +1726,6 @@
             </c:strRef>
           </c:tx>
           <c:spPr>
-            <a:solidFill>
-              <a:srgbClr val="8A97AD"/>
-            </a:solidFill>
             <a:ln w="34925" cap="flat">
               <a:solidFill>
                 <a:srgbClr val="8A97AD"/>
@@ -2482,132 +1735,37 @@
             </a:ln>
             <a:effectLst/>
           </c:spPr>
-          <c:invertIfNegative val="0"/>
-          <c:dLbls>
-            <c:numFmt formatCode="#,##0" sourceLinked="0"/>
-            <c:txPr>
-              <a:bodyPr/>
-              <a:lstStyle/>
-              <a:p>
-                <a:pPr>
-                  <a:defRPr b="0" i="0" strike="noStrike" sz="1200" u="none">
-                    <a:solidFill>
-                      <a:srgbClr val="000000"/>
-                    </a:solidFill>
-                    <a:latin typeface="Arial"/>
-                  </a:defRPr>
-                </a:pPr>
-              </a:p>
-            </c:txPr>
-            <c:showLegendKey val="0"/>
-            <c:showVal val="0"/>
-            <c:showCatName val="0"/>
-            <c:showSerName val="0"/>
-            <c:showPercent val="0"/>
-            <c:showBubbleSize val="0"/>
-            <c:showLeaderLines val="0"/>
-          </c:dLbls>
           <c:marker>
             <c:symbol val="none"/>
-            <c:size val="6"/>
-            <c:spPr>
-              <a:solidFill>
-                <a:srgbClr val="8A97AD"/>
-              </a:solidFill>
-              <a:ln w="9525" cap="flat">
-                <a:solidFill>
-                  <a:srgbClr val="8A97AD"/>
-                </a:solidFill>
-                <a:prstDash val="solid"/>
-                <a:round/>
-              </a:ln>
-              <a:effectLst/>
-            </c:spPr>
           </c:marker>
           <c:cat>
-            <c:multiLvlStrRef>
+            <c:strRef>
               <c:f>Sheet1!$A$2:$A$26</c:f>
-              <c:multiLvlStrCache>
+              <c:strCache>
                 <c:ptCount val="25"/>
-                <c:lvl>
-                  <c:pt idx="0">
-                    <c:v>-60</c:v>
-                  </c:pt>
-                  <c:pt idx="1">
-                    <c:v/>
-                  </c:pt>
-                  <c:pt idx="2">
-                    <c:v/>
-                  </c:pt>
-                  <c:pt idx="3">
-                    <c:v/>
-                  </c:pt>
-                  <c:pt idx="4">
-                    <c:v>-40</c:v>
-                  </c:pt>
-                  <c:pt idx="5">
-                    <c:v/>
-                  </c:pt>
-                  <c:pt idx="6">
-                    <c:v/>
-                  </c:pt>
-                  <c:pt idx="7">
-                    <c:v/>
-                  </c:pt>
-                  <c:pt idx="8">
-                    <c:v>-20</c:v>
-                  </c:pt>
-                  <c:pt idx="9">
-                    <c:v/>
-                  </c:pt>
-                  <c:pt idx="10">
-                    <c:v/>
-                  </c:pt>
-                  <c:pt idx="11">
-                    <c:v/>
-                  </c:pt>
-                  <c:pt idx="12">
-                    <c:v>0</c:v>
-                  </c:pt>
-                  <c:pt idx="13">
-                    <c:v/>
-                  </c:pt>
-                  <c:pt idx="14">
-                    <c:v/>
-                  </c:pt>
-                  <c:pt idx="15">
-                    <c:v/>
-                  </c:pt>
-                  <c:pt idx="16">
-                    <c:v>20</c:v>
-                  </c:pt>
-                  <c:pt idx="17">
-                    <c:v/>
-                  </c:pt>
-                  <c:pt idx="18">
-                    <c:v/>
-                  </c:pt>
-                  <c:pt idx="19">
-                    <c:v/>
-                  </c:pt>
-                  <c:pt idx="20">
-                    <c:v>40</c:v>
-                  </c:pt>
-                  <c:pt idx="21">
-                    <c:v/>
-                  </c:pt>
-                  <c:pt idx="22">
-                    <c:v/>
-                  </c:pt>
-                  <c:pt idx="23">
-                    <c:v/>
-                  </c:pt>
-                  <c:pt idx="24">
-                    <c:v>60</c:v>
-                  </c:pt>
-                </c:lvl>
-              </c:multiLvlStrCache>
-            </c:multiLvlStrRef>
+                <c:pt idx="0">
+                  <c:v>-60</c:v>
+                </c:pt>
+                <c:pt idx="4">
+                  <c:v>-40</c:v>
+                </c:pt>
+                <c:pt idx="8">
+                  <c:v>-20</c:v>
+                </c:pt>
+                <c:pt idx="12">
+                  <c:v>0</c:v>
+                </c:pt>
+                <c:pt idx="16">
+                  <c:v>20</c:v>
+                </c:pt>
+                <c:pt idx="20">
+                  <c:v>40</c:v>
+                </c:pt>
+                <c:pt idx="24">
+                  <c:v>60</c:v>
+                </c:pt>
+              </c:strCache>
+            </c:strRef>
           </c:cat>
           <c:val>
             <c:numRef>
@@ -2631,7 +1789,7 @@
                   <c:v>26.67</c:v>
                 </c:pt>
                 <c:pt idx="5">
-                  <c:v>20.42</c:v>
+                  <c:v>20.420000000000002</c:v>
                 </c:pt>
                 <c:pt idx="6">
                   <c:v>15</c:v>
@@ -2673,7 +1831,7 @@
                   <c:v>15</c:v>
                 </c:pt>
                 <c:pt idx="19">
-                  <c:v>20.42</c:v>
+                  <c:v>20.420000000000002</c:v>
                 </c:pt>
                 <c:pt idx="20">
                   <c:v>26.67</c:v>
@@ -2694,6 +1852,11 @@
             </c:numRef>
           </c:val>
           <c:smooth val="0"/>
+          <c:extLst>
+            <c:ext xmlns:c16="http://schemas.microsoft.com/office/drawing/2014/chart" uri="{C3380CC4-5D6E-409C-BE32-E72D297353CC}">
+              <c16:uniqueId val="{00000000-EE36-CD40-B550-3359F6274F2F}"/>
+            </c:ext>
+          </c:extLst>
         </c:ser>
         <c:ser>
           <c:idx val="1"/>
@@ -2710,9 +1873,6 @@
             </c:strRef>
           </c:tx>
           <c:spPr>
-            <a:solidFill>
-              <a:srgbClr val="E6115E"/>
-            </a:solidFill>
             <a:ln w="34925" cap="flat">
               <a:solidFill>
                 <a:srgbClr val="E6115E"/>
@@ -2722,132 +1882,37 @@
             </a:ln>
             <a:effectLst/>
           </c:spPr>
-          <c:invertIfNegative val="0"/>
-          <c:dLbls>
-            <c:numFmt formatCode="#,##0" sourceLinked="0"/>
-            <c:txPr>
-              <a:bodyPr/>
-              <a:lstStyle/>
-              <a:p>
-                <a:pPr>
-                  <a:defRPr b="0" i="0" strike="noStrike" sz="1200" u="none">
-                    <a:solidFill>
-                      <a:srgbClr val="000000"/>
-                    </a:solidFill>
-                    <a:latin typeface="Arial"/>
-                  </a:defRPr>
-                </a:pPr>
-              </a:p>
-            </c:txPr>
-            <c:showLegendKey val="0"/>
-            <c:showVal val="0"/>
-            <c:showCatName val="0"/>
-            <c:showSerName val="0"/>
-            <c:showPercent val="0"/>
-            <c:showBubbleSize val="0"/>
-            <c:showLeaderLines val="0"/>
-          </c:dLbls>
           <c:marker>
             <c:symbol val="none"/>
-            <c:size val="6"/>
-            <c:spPr>
-              <a:solidFill>
-                <a:srgbClr val="E6115E"/>
-              </a:solidFill>
-              <a:ln w="9525" cap="flat">
-                <a:solidFill>
-                  <a:srgbClr val="E6115E"/>
-                </a:solidFill>
-                <a:prstDash val="solid"/>
-                <a:round/>
-              </a:ln>
-              <a:effectLst/>
-            </c:spPr>
           </c:marker>
           <c:cat>
-            <c:multiLvlStrRef>
+            <c:strRef>
               <c:f>Sheet1!$A$2:$A$26</c:f>
-              <c:multiLvlStrCache>
+              <c:strCache>
                 <c:ptCount val="25"/>
-                <c:lvl>
-                  <c:pt idx="0">
-                    <c:v>-60</c:v>
-                  </c:pt>
-                  <c:pt idx="1">
-                    <c:v/>
-                  </c:pt>
-                  <c:pt idx="2">
-                    <c:v/>
-                  </c:pt>
-                  <c:pt idx="3">
-                    <c:v/>
-                  </c:pt>
-                  <c:pt idx="4">
-                    <c:v>-40</c:v>
-                  </c:pt>
-                  <c:pt idx="5">
-                    <c:v/>
-                  </c:pt>
-                  <c:pt idx="6">
-                    <c:v/>
-                  </c:pt>
-                  <c:pt idx="7">
-                    <c:v/>
-                  </c:pt>
-                  <c:pt idx="8">
-                    <c:v>-20</c:v>
-                  </c:pt>
-                  <c:pt idx="9">
-                    <c:v/>
-                  </c:pt>
-                  <c:pt idx="10">
-                    <c:v/>
-                  </c:pt>
-                  <c:pt idx="11">
-                    <c:v/>
-                  </c:pt>
-                  <c:pt idx="12">
-                    <c:v>0</c:v>
-                  </c:pt>
-                  <c:pt idx="13">
-                    <c:v/>
-                  </c:pt>
-                  <c:pt idx="14">
-                    <c:v/>
-                  </c:pt>
-                  <c:pt idx="15">
-                    <c:v/>
-                  </c:pt>
-                  <c:pt idx="16">
-                    <c:v>20</c:v>
-                  </c:pt>
-                  <c:pt idx="17">
-                    <c:v/>
-                  </c:pt>
-                  <c:pt idx="18">
-                    <c:v/>
-                  </c:pt>
-                  <c:pt idx="19">
-                    <c:v/>
-                  </c:pt>
-                  <c:pt idx="20">
-                    <c:v>40</c:v>
-                  </c:pt>
-                  <c:pt idx="21">
-                    <c:v/>
-                  </c:pt>
-                  <c:pt idx="22">
-                    <c:v/>
-                  </c:pt>
-                  <c:pt idx="23">
-                    <c:v/>
-                  </c:pt>
-                  <c:pt idx="24">
-                    <c:v>60</c:v>
-                  </c:pt>
-                </c:lvl>
-              </c:multiLvlStrCache>
-            </c:multiLvlStrRef>
+                <c:pt idx="0">
+                  <c:v>-60</c:v>
+                </c:pt>
+                <c:pt idx="4">
+                  <c:v>-40</c:v>
+                </c:pt>
+                <c:pt idx="8">
+                  <c:v>-20</c:v>
+                </c:pt>
+                <c:pt idx="12">
+                  <c:v>0</c:v>
+                </c:pt>
+                <c:pt idx="16">
+                  <c:v>20</c:v>
+                </c:pt>
+                <c:pt idx="20">
+                  <c:v>40</c:v>
+                </c:pt>
+                <c:pt idx="24">
+                  <c:v>60</c:v>
+                </c:pt>
+              </c:strCache>
+            </c:strRef>
           </c:cat>
           <c:val>
             <c:numRef>
@@ -2934,35 +1999,23 @@
             </c:numRef>
           </c:val>
           <c:smooth val="0"/>
+          <c:extLst>
+            <c:ext xmlns:c16="http://schemas.microsoft.com/office/drawing/2014/chart" uri="{C3380CC4-5D6E-409C-BE32-E72D297353CC}">
+              <c16:uniqueId val="{00000001-EE36-CD40-B550-3359F6274F2F}"/>
+            </c:ext>
+          </c:extLst>
         </c:ser>
         <c:dLbls>
-          <c:numFmt formatCode="#,##0" sourceLinked="0"/>
-          <c:txPr>
-            <a:bodyPr/>
-            <a:lstStyle/>
-            <a:p>
-              <a:pPr>
-                <a:defRPr b="0" i="0" strike="noStrike" sz="1200" u="none">
-                  <a:solidFill>
-                    <a:srgbClr val="000000"/>
-                  </a:solidFill>
-                  <a:latin typeface="Arial"/>
-                </a:defRPr>
-              </a:pPr>
-            </a:p>
-          </c:txPr>
           <c:showLegendKey val="0"/>
           <c:showVal val="0"/>
           <c:showCatName val="0"/>
           <c:showSerName val="0"/>
           <c:showPercent val="0"/>
           <c:showBubbleSize val="0"/>
-          <c:showLeaderLines val="0"/>
         </c:dLbls>
-        <c:marker val="1"/>
+        <c:smooth val="0"/>
         <c:axId val="2094734554"/>
         <c:axId val="2094734552"/>
-        <c:axId val="2094734556"/>
       </c:lineChart>
       <c:catAx>
         <c:axId val="2094734554"/>
@@ -2986,7 +2039,7 @@
                   </a:defRPr>
                 </a:pPr>
                 <a:r>
-                  <a:rPr sz="1050" b="0" i="0" u="none" strike="noStrike">
+                  <a:rPr lang="en-US" sz="1050" b="0" i="0" u="none" strike="noStrike">
                     <a:solidFill>
                       <a:srgbClr val="5B6B87"/>
                     </a:solidFill>
@@ -2997,7 +2050,6 @@
               </a:p>
             </c:rich>
           </c:tx>
-          <c:layout/>
           <c:overlay val="0"/>
         </c:title>
         <c:numFmt formatCode="General" sourceLinked="1"/>
@@ -3032,8 +2084,9 @@
         <c:crosses val="autoZero"/>
         <c:auto val="1"/>
         <c:lblAlgn val="ctr"/>
+        <c:lblOffset val="100"/>
+        <c:tickLblSkip val="4"/>
         <c:noMultiLvlLbl val="1"/>
-        <c:tickLblSkip val="4"/>
       </c:catAx>
       <c:valAx>
         <c:axId val="2094734552"/>
@@ -3068,7 +2121,7 @@
                   </a:defRPr>
                 </a:pPr>
                 <a:r>
-                  <a:rPr sz="1050" b="0" i="0" u="none" strike="noStrike">
+                  <a:rPr lang="en-US" sz="1050" b="0" i="0" u="none" strike="noStrike">
                     <a:solidFill>
                       <a:srgbClr val="5B6B87"/>
                     </a:solidFill>
@@ -3079,7 +2132,6 @@
               </a:p>
             </c:rich>
           </c:tx>
-          <c:layout/>
           <c:overlay val="0"/>
         </c:title>
         <c:numFmt formatCode="General" sourceLinked="0"/>
@@ -3141,6 +2193,7 @@
     </c:legend>
     <c:plotVisOnly val="1"/>
     <c:dispBlanksAs val="span"/>
+    <c:showDLblsOverMax val="1"/>
   </c:chart>
   <c:spPr>
     <a:noFill/>
@@ -3177,234 +2230,10 @@
           <a:chExt cx="0" cy="0"/>
         </a:xfrm>
       </p:grpSpPr>
-      <p:sp>
-        <p:nvSpPr>
-          <p:cNvPr id="2" name="Header Placeholder 1"/>
-          <p:cNvSpPr>
-            <a:spLocks noGrp="1"/>
-          </p:cNvSpPr>
-          <p:nvPr>
-            <p:ph type="hdr" sz="quarter"/>
-          </p:nvPr>
-        </p:nvSpPr>
-        <p:spPr>
-          <a:xfrm>
-            <a:off x="0" y="0"/>
-            <a:ext cx="2971800" cy="458788"/>
-          </a:xfrm>
-          <a:prstGeom prst="rect">
-            <a:avLst/>
-          </a:prstGeom>
-        </p:spPr>
-        <p:txBody>
-          <a:bodyPr vert="horz" lIns="91440" tIns="45720" rIns="91440" bIns="45720" rtlCol="0"/>
-          <a:lstStyle>
-            <a:lvl1pPr algn="l">
-              <a:defRPr sz="1200"/>
-            </a:lvl1pPr>
-          </a:lstStyle>
-          <a:p>
-            <a:endParaRPr lang="en-US"/>
-          </a:p>
-        </p:txBody>
-      </p:sp>
-      <p:sp>
-        <p:nvSpPr>
-          <p:cNvPr id="3" name="Date Placeholder 2"/>
-          <p:cNvSpPr>
-            <a:spLocks noGrp="1"/>
-          </p:cNvSpPr>
-          <p:nvPr>
-            <p:ph type="dt" idx="1"/>
-          </p:nvPr>
-        </p:nvSpPr>
-        <p:spPr>
-          <a:xfrm>
-            <a:off x="3884613" y="0"/>
-            <a:ext cx="2971800" cy="458788"/>
-          </a:xfrm>
-          <a:prstGeom prst="rect">
-            <a:avLst/>
-          </a:prstGeom>
-        </p:spPr>
-        <p:txBody>
-          <a:bodyPr vert="horz" lIns="91440" tIns="45720" rIns="91440" bIns="45720" rtlCol="0"/>
-          <a:lstStyle>
-            <a:lvl1pPr algn="r">
-              <a:defRPr sz="1200"/>
-            </a:lvl1pPr>
-          </a:lstStyle>
-          <a:p>
-            <a:fld id="{5282F153-3F37-0F45-9E97-73ACFA13230C}" type="datetimeFigureOut">
-              <a:rPr lang="en-US"/>
-              <a:t>7/23/19</a:t>
-            </a:fld>
-            <a:endParaRPr lang="en-US"/>
-          </a:p>
-        </p:txBody>
-      </p:sp>
-      <p:sp>
-        <p:nvSpPr>
-          <p:cNvPr id="4" name="Slide Image Placeholder 3"/>
-          <p:cNvSpPr>
-            <a:spLocks noGrp="1" noRot="1" noChangeAspect="1"/>
-          </p:cNvSpPr>
-          <p:nvPr>
-            <p:ph type="sldImg" idx="2"/>
-          </p:nvPr>
-        </p:nvSpPr>
-        <p:spPr>
-          <a:xfrm>
-            <a:off x="685800" y="1143000"/>
-            <a:ext cx="5486400" cy="3086100"/>
-          </a:xfrm>
-          <a:prstGeom prst="rect">
-            <a:avLst/>
-          </a:prstGeom>
-          <a:noFill/>
-          <a:ln w="12700">
-            <a:solidFill>
-              <a:prstClr val="black"/>
-            </a:solidFill>
-          </a:ln>
-        </p:spPr>
-        <p:txBody>
-          <a:bodyPr vert="horz" lIns="91440" tIns="45720" rIns="91440" bIns="45720" rtlCol="0" anchor="ctr"/>
-          <a:lstStyle/>
-          <a:p>
-            <a:endParaRPr lang="en-US"/>
-          </a:p>
-        </p:txBody>
-      </p:sp>
-      <p:sp>
-        <p:nvSpPr>
-          <p:cNvPr id="5" name="Notes Placeholder 4"/>
-          <p:cNvSpPr>
-            <a:spLocks noGrp="1"/>
-          </p:cNvSpPr>
-          <p:nvPr>
-            <p:ph type="body" sz="quarter" idx="3"/>
-          </p:nvPr>
-        </p:nvSpPr>
-        <p:spPr>
-          <a:xfrm>
-            <a:off x="685800" y="4400550"/>
-            <a:ext cx="5486400" cy="3600450"/>
-          </a:xfrm>
-          <a:prstGeom prst="rect">
-            <a:avLst/>
-          </a:prstGeom>
-        </p:spPr>
-        <p:txBody>
-          <a:bodyPr vert="horz" lIns="91440" tIns="45720" rIns="91440" bIns="45720" rtlCol="0"/>
-          <a:lstStyle/>
-          <a:p>
-            <a:pPr lvl="0"/>
-            <a:r>
-              <a:rPr lang="en-US"/>
-              <a:t>Click to edit Master text styles</a:t>
-            </a:r>
-          </a:p>
-          <a:p>
-            <a:pPr lvl="1"/>
-            <a:r>
-              <a:rPr lang="en-US"/>
-              <a:t>Second level</a:t>
-            </a:r>
-          </a:p>
-          <a:p>
-            <a:pPr lvl="2"/>
-            <a:r>
-              <a:rPr lang="en-US"/>
-              <a:t>Third level</a:t>
-            </a:r>
-          </a:p>
-          <a:p>
-            <a:pPr lvl="3"/>
-            <a:r>
-              <a:rPr lang="en-US"/>
-              <a:t>Fourth level</a:t>
-            </a:r>
-          </a:p>
-          <a:p>
-            <a:pPr lvl="4"/>
-            <a:r>
-              <a:rPr lang="en-US"/>
-              <a:t>Fifth level</a:t>
-            </a:r>
-          </a:p>
-        </p:txBody>
-      </p:sp>
-      <p:sp>
-        <p:nvSpPr>
-          <p:cNvPr id="6" name="Footer Placeholder 5"/>
-          <p:cNvSpPr>
-            <a:spLocks noGrp="1"/>
-          </p:cNvSpPr>
-          <p:nvPr>
-            <p:ph type="ftr" sz="quarter" idx="4"/>
-          </p:nvPr>
-        </p:nvSpPr>
-        <p:spPr>
-          <a:xfrm>
-            <a:off x="0" y="8685213"/>
-            <a:ext cx="2971800" cy="458787"/>
-          </a:xfrm>
-          <a:prstGeom prst="rect">
-            <a:avLst/>
-          </a:prstGeom>
-        </p:spPr>
-        <p:txBody>
-          <a:bodyPr vert="horz" lIns="91440" tIns="45720" rIns="91440" bIns="45720" rtlCol="0" anchor="b"/>
-          <a:lstStyle>
-            <a:lvl1pPr algn="l">
-              <a:defRPr sz="1200"/>
-            </a:lvl1pPr>
-          </a:lstStyle>
-          <a:p>
-            <a:endParaRPr lang="en-US"/>
-          </a:p>
-        </p:txBody>
-      </p:sp>
-      <p:sp>
-        <p:nvSpPr>
-          <p:cNvPr id="7" name="Slide Number Placeholder 6"/>
-          <p:cNvSpPr>
-            <a:spLocks noGrp="1"/>
-          </p:cNvSpPr>
-          <p:nvPr>
-            <p:ph type="sldNum" sz="quarter" idx="5"/>
-          </p:nvPr>
-        </p:nvSpPr>
-        <p:spPr>
-          <a:xfrm>
-            <a:off x="3884613" y="8685213"/>
-            <a:ext cx="2971800" cy="458787"/>
-          </a:xfrm>
-          <a:prstGeom prst="rect">
-            <a:avLst/>
-          </a:prstGeom>
-        </p:spPr>
-        <p:txBody>
-          <a:bodyPr vert="horz" lIns="91440" tIns="45720" rIns="91440" bIns="45720" rtlCol="0" anchor="b"/>
-          <a:lstStyle>
-            <a:lvl1pPr algn="r">
-              <a:defRPr sz="1200"/>
-            </a:lvl1pPr>
-          </a:lstStyle>
-          <a:p>
-            <a:fld id="{CE5E9CC1-C706-0F49-92D6-E571CC5EEA8F}" type="slidenum">
-              <a:rPr lang="en-US"/>
-              <a:t>‹#›</a:t>
-            </a:fld>
-            <a:endParaRPr lang="en-US"/>
-          </a:p>
-        </p:txBody>
-      </p:sp>
     </p:spTree>
     <p:extLst>
       <p:ext uri="{BB962C8B-B14F-4D97-AF65-F5344CB8AC3E}">
-        <p14:creationId xmlns:p14="http://schemas.microsoft.com/office/powerpoint/2010/main" val="1024086991"/>
+        <p14:creationId xmlns:p14="http://schemas.microsoft.com/office/powerpoint/2010/main" val="509942532"/>
       </p:ext>
     </p:extLst>
   </p:cSld>
@@ -3552,7 +2381,6 @@
               <a:rPr lang="en-US" dirty="0"/>
               <a:t>La imagen es el camino de Ridge con nuestros datos: cada línea es un coeficiente y, a medida que aumenta el freno hacia la derecha, todos se encogen. Es la idea de hoy en un dibujo.</a:t>
             </a:r>
-            <a:endParaRPr lang="en-US" dirty="0"/>
           </a:p>
         </p:txBody>
       </p:sp>
@@ -3640,7 +2468,6 @@
               <a:rPr lang="en-US" dirty="0"/>
               <a:t>Orden en que se apagan: total_rooms (α≈794), NEAR BAY (α≈794), latitude (α≈2 371), households (α≈3 415), ISLAND (α≈3 415), longitude (α≈7 079), population (α≈7 079), NEAR OCEAN (α≈7 079), total_bedrooms (α≈10 194), housing_median_age (α≈14 678), INLAND (α≈63 096). Muestra que total_rooms se apaga primero y luego hogares: del grupo de tamaño sobrevive total_bedrooms.</a:t>
             </a:r>
-            <a:endParaRPr lang="en-US" dirty="0"/>
           </a:p>
         </p:txBody>
       </p:sp>
@@ -3728,7 +2555,6 @@
               <a:rPr lang="en-US" dirty="0"/>
               <a:t>Es la parte honesta de la clase: muchos cursos muestran Ridge mejorando todo, y en la práctica, con datos tabulares grandes y pocas variables, casi no cambia nada. Saber cuándo NO hace falta es tan útil como saber cuándo sí.</a:t>
             </a:r>
-            <a:endParaRPr lang="en-US" dirty="0"/>
           </a:p>
         </p:txBody>
       </p:sp>
@@ -3816,7 +2642,6 @@
               <a:rPr lang="en-US" dirty="0"/>
               <a:t>Es el ejercicio 3.1 y 3.2. Las 90 variables salen de 12 originales, 12 al cuadrado y 66 productos cruzados. Con 500 filas son 5.5 filas por variable. El Lasso usa α = 1 000 fijo; el Ridge, el α elegido por validación cruzada en la slide siguiente.</a:t>
             </a:r>
-            <a:endParaRPr lang="en-US" dirty="0"/>
           </a:p>
         </p:txBody>
       </p:sp>
@@ -3904,7 +2729,6 @@
               <a:rPr lang="en-US" dirty="0"/>
               <a:t>La forma de U invertida es la de la Clase 1 con la profundidad del árbol: poco freno sobreajusta, mucho freno subajusta. Que la estimación de validación cruzada se parezca al resultado en prueba es justamente lo que queremos: un método para elegir que no nos engañe.</a:t>
             </a:r>
-            <a:endParaRPr lang="en-US" dirty="0"/>
           </a:p>
         </p:txBody>
       </p:sp>
@@ -3992,7 +2816,6 @@
               <a:rPr lang="en-US" dirty="0"/>
               <a:t>La tabla de abajo a la izquierda es el ejercicio 4.1. La curva gris está reescalada para que quepa en el mismo gráfico; lo que importa es la forma: la cuadrática crece cada vez más rápido, la ε-insensible es plana en el centro y luego crece en línea recta. Vectores de soporte: los distritos que quedan fuera del tubo o en su borde. Son los únicos que definen el modelo.</a:t>
             </a:r>
-            <a:endParaRPr lang="en-US" dirty="0"/>
           </a:p>
         </p:txBody>
       </p:sp>
@@ -4080,7 +2903,6 @@
               <a:rPr lang="en-US" dirty="0"/>
               <a:t>Grid en validación: más C mejora en este rango; más ε reduce los vectores de soporte (de ~4 400 con ε=5 a ~1 300 con ε=50). El notebook incluye un mapa de residuos: la regresión lineal deja manchas geográficas que el SVR RBF mezcla mucho más. El costo: SVR no tiene coeficientes que se puedan leer.</a:t>
             </a:r>
-            <a:endParaRPr lang="en-US" dirty="0"/>
           </a:p>
         </p:txBody>
       </p:sp>
@@ -4168,7 +2990,6 @@
               <a:rPr lang="en-US" dirty="0"/>
               <a:t>La demostración 4.4 (grid de C y ε) tarda unos 20 segundos: avisa para que nadie la interrumpa. Si el grupo va lento, las demostraciones 1.3 y 2.2 (caminos) se pueden solo ejecutar y mirar.</a:t>
             </a:r>
-            <a:endParaRPr lang="en-US" dirty="0"/>
           </a:p>
         </p:txBody>
       </p:sp>
@@ -4256,7 +3077,6 @@
               <a:rPr lang="en-US" dirty="0"/>
               <a:t>Pregunta de cierre: si tuvieras que llevar uno de estos modelos a un comité de riesgos, ¿cuál llevarías y por qué? La respuesta más defendible no es el de mayor R²: Lasso con 10 variables explica casi lo mismo y se puede justificar variable por variable.</a:t>
             </a:r>
-            <a:endParaRPr lang="en-US" dirty="0"/>
           </a:p>
         </p:txBody>
       </p:sp>
@@ -4344,7 +3164,6 @@
               <a:rPr lang="en-US" dirty="0"/>
               <a:t>Recuerda la tabla de inestabilidad de la Clase 2 y el gráfico de residuos con embudo. Los tres modelos de hoy responden cada uno a uno de esos problemas.</a:t>
             </a:r>
-            <a:endParaRPr lang="en-US" dirty="0"/>
           </a:p>
         </p:txBody>
       </p:sp>
@@ -4432,7 +3251,6 @@
               <a:rPr lang="en-US" dirty="0"/>
               <a:t>Si vas retrasado, el caso histórico (Hoerl, Kennard y Tibshirani) se puede contar en un minuto. El bloque 3 no se recorta.</a:t>
             </a:r>
-            <a:endParaRPr lang="en-US" dirty="0"/>
           </a:p>
         </p:txBody>
       </p:sp>
@@ -4520,7 +3338,6 @@
               <a:rPr lang="en-US" dirty="0"/>
               <a:t>Analogía útil: es como pedirle a un analista que explique el gasto con las variables que quiera, pero cobrándole por cada coeficiente grande que use. Si una variable no ayuda mucho, no vale la pena 'pagar' por un coeficiente grande.</a:t>
             </a:r>
-            <a:endParaRPr lang="en-US" dirty="0"/>
           </a:p>
         </p:txBody>
       </p:sp>
@@ -4608,7 +3425,6 @@
               <a:rPr lang="en-US" dirty="0"/>
               <a:t>Es el ejercicio 1.1. Remarca que el denominador crece con α: la pendiente se divide entre un número cada vez mayor. Con muchos datos, Σdx² es enorme y un α de 10 casi no lo cambia; por eso Ridge apenas se nota con el dataset completo.</a:t>
             </a:r>
-            <a:endParaRPr lang="en-US" dirty="0"/>
           </a:p>
         </p:txBody>
       </p:sp>
@@ -4696,7 +3512,6 @@
               <a:rPr lang="en-US" dirty="0"/>
               <a:t>La regla vale para Ridge, Lasso, Elastic Net, SVR y KNN (Clase 6): todo modelo que compare tamaños o distancias necesita variables en la misma escala. El pipeline es lo mismo que la regla de oro de la Clase 2 con la mediana: lo que se aprende, se aprende solo del entrenamiento.</a:t>
             </a:r>
-            <a:endParaRPr lang="en-US" dirty="0"/>
           </a:p>
         </p:txBody>
       </p:sp>
@@ -4784,7 +3599,6 @@
               <a:rPr lang="en-US" dirty="0"/>
               <a:t>Con regresión lineal el coeficiente de hogares va de -89 a +92; con Ridge, de 18 a 61. Es la demostración 1.4 del notebook. En el gráfico, latitud y longitud (en gris en el notebook) también se encogen pronto: son otro par correlacionado.</a:t>
             </a:r>
-            <a:endParaRPr lang="en-US" dirty="0"/>
           </a:p>
         </p:txBody>
       </p:sp>
@@ -4872,7 +3686,6 @@
               <a:rPr lang="en-US" dirty="0"/>
               <a:t>Caso corto. La frase clave es 'sesgo a propósito'. Para gente de riesgos es contraintuitivo: un estimador sesgado puede ser mejor que uno insesgado si es mucho más estable. Conecta con validación de modelos: un coeficiente que cambia de signo según la muestra no pasa una revisión.</a:t>
             </a:r>
-            <a:endParaRPr lang="en-US" dirty="0"/>
           </a:p>
         </p:txBody>
       </p:sp>
@@ -4960,7 +3773,6 @@
               <a:rPr lang="en-US" dirty="0"/>
               <a:t>Fíjate en cuál eliminó primero: total_rooms, una de las cuatro de tamaño. Entre variables muy correlacionadas Lasso tiende a quedarse con una y apagar las otras. NEAR BAY es la otra: no se distingue mucho de la referencia una vez que están latitud y longitud.</a:t>
             </a:r>
-            <a:endParaRPr lang="en-US" dirty="0"/>
           </a:p>
         </p:txBody>
       </p:sp>
@@ -5033,6 +3845,11 @@
 <file path=ppt/slideMasters/slideMaster1.xml><?xml version="1.0" encoding="utf-8"?>
 <p:sldMaster xmlns:a="http://schemas.openxmlformats.org/drawingml/2006/main" xmlns:r="http://schemas.openxmlformats.org/officeDocument/2006/relationships" xmlns:p="http://schemas.openxmlformats.org/presentationml/2006/main">
   <p:cSld>
+    <p:bg>
+      <p:bgRef idx="1001">
+        <a:schemeClr val="bg1"/>
+      </p:bgRef>
+    </p:bg>
     <p:spTree>
       <p:nvGrpSpPr>
         <p:cNvPr id="1" name=""/>
@@ -5315,6 +4132,7 @@
         <a:solidFill>
           <a:srgbClr val="0A2559"/>
         </a:solidFill>
+        <a:effectLst/>
       </p:bgPr>
     </p:bg>
     <p:spTree>
@@ -5379,11 +4197,11 @@
           <a:bodyPr wrap="square" lIns="0" tIns="0" rIns="0" bIns="0" rtlCol="0" anchor="ctr"/>
           <a:lstStyle/>
           <a:p>
-            <a:pPr algn="ctr" indent="0" marL="0">
+            <a:pPr marL="0" indent="0" algn="ctr">
               <a:buNone/>
             </a:pPr>
             <a:r>
-              <a:rPr lang="en-US" sz="1100" b="1" spc="150" kern="0" dirty="0">
+              <a:rPr lang="en-US" sz="1100" b="1" kern="0" spc="150" dirty="0">
                 <a:solidFill>
                   <a:srgbClr val="FFFFFF"/>
                 </a:solidFill>
@@ -5418,7 +4236,7 @@
           <a:bodyPr wrap="square" lIns="0" tIns="0" rIns="0" bIns="0" rtlCol="0" anchor="t"/>
           <a:lstStyle/>
           <a:p>
-            <a:pPr indent="0" marL="0">
+            <a:pPr marL="0" indent="0">
               <a:buNone/>
             </a:pPr>
             <a:r>
@@ -5435,7 +4253,7 @@
             <a:endParaRPr lang="en-US" sz="4000" dirty="0"/>
           </a:p>
           <a:p>
-            <a:pPr indent="0" marL="0">
+            <a:pPr marL="0" indent="0">
               <a:buNone/>
             </a:pPr>
             <a:r>
@@ -5474,7 +4292,7 @@
           <a:bodyPr wrap="square" lIns="0" tIns="0" rIns="0" bIns="0" rtlCol="0" anchor="t"/>
           <a:lstStyle/>
           <a:p>
-            <a:pPr indent="0" marL="0">
+            <a:pPr marL="0" indent="0">
               <a:buNone/>
             </a:pPr>
             <a:r>
@@ -5491,7 +4309,7 @@
             <a:endParaRPr lang="en-US" sz="1500" dirty="0"/>
           </a:p>
           <a:p>
-            <a:pPr indent="0" marL="0">
+            <a:pPr marL="0" indent="0">
               <a:buNone/>
             </a:pPr>
             <a:r>
@@ -5530,7 +4348,7 @@
           <a:bodyPr wrap="square" lIns="0" tIns="0" rIns="0" bIns="0" rtlCol="0" anchor="ctr"/>
           <a:lstStyle/>
           <a:p>
-            <a:pPr indent="0" marL="0">
+            <a:pPr marL="0" indent="0">
               <a:buNone/>
             </a:pPr>
             <a:r>
@@ -5569,7 +4387,7 @@
           <a:bodyPr wrap="square" lIns="0" tIns="0" rIns="0" bIns="0" rtlCol="0" anchor="ctr"/>
           <a:lstStyle/>
           <a:p>
-            <a:pPr indent="0" marL="0">
+            <a:pPr marL="0" indent="0">
               <a:buNone/>
             </a:pPr>
             <a:r>
@@ -5608,7 +4426,7 @@
           <a:bodyPr wrap="square" lIns="0" tIns="0" rIns="0" bIns="0" rtlCol="0" anchor="ctr"/>
           <a:lstStyle/>
           <a:p>
-            <a:pPr indent="0" marL="0">
+            <a:pPr marL="0" indent="0">
               <a:buNone/>
             </a:pPr>
             <a:r>
@@ -5647,7 +4465,7 @@
           <a:bodyPr wrap="square" lIns="0" tIns="0" rIns="0" bIns="0" rtlCol="0" anchor="ctr"/>
           <a:lstStyle/>
           <a:p>
-            <a:pPr indent="0" marL="0">
+            <a:pPr marL="0" indent="0">
               <a:buNone/>
             </a:pPr>
             <a:r>
@@ -5686,7 +4504,7 @@
           <a:bodyPr wrap="square" lIns="0" tIns="0" rIns="0" bIns="0" rtlCol="0" anchor="ctr"/>
           <a:lstStyle/>
           <a:p>
-            <a:pPr indent="0" marL="0">
+            <a:pPr marL="0" indent="0">
               <a:buNone/>
             </a:pPr>
             <a:r>
@@ -5725,7 +4543,7 @@
           <a:bodyPr wrap="square" lIns="0" tIns="0" rIns="0" bIns="0" rtlCol="0" anchor="ctr"/>
           <a:lstStyle/>
           <a:p>
-            <a:pPr indent="0" marL="0">
+            <a:pPr marL="0" indent="0">
               <a:buNone/>
             </a:pPr>
             <a:r>
@@ -5764,7 +4582,7 @@
           <a:bodyPr wrap="square" lIns="0" tIns="0" rIns="0" bIns="0" rtlCol="0" anchor="ctr"/>
           <a:lstStyle/>
           <a:p>
-            <a:pPr indent="0" marL="0">
+            <a:pPr marL="0" indent="0">
               <a:buNone/>
             </a:pPr>
             <a:r>
@@ -5778,9 +4596,6 @@
               </a:rPr>
               <a:t>Docente  </a:t>
             </a:r>
-            <a:pPr indent="0" marL="0">
-              <a:buNone/>
-            </a:pPr>
             <a:r>
               <a:rPr lang="en-US" sz="1400" b="1" dirty="0">
                 <a:solidFill>
@@ -5817,7 +4632,7 @@
           <a:bodyPr wrap="square" lIns="0" tIns="0" rIns="0" bIns="0" rtlCol="0" anchor="ctr"/>
           <a:lstStyle/>
           <a:p>
-            <a:pPr indent="0" marL="0">
+            <a:pPr marL="0" indent="0">
               <a:buNone/>
             </a:pPr>
             <a:r>
@@ -13379,7 +12194,7 @@
           <a:bodyPr wrap="square" lIns="0" tIns="0" rIns="0" bIns="0" rtlCol="0" anchor="ctr"/>
           <a:lstStyle/>
           <a:p>
-            <a:pPr algn="ctr" indent="0" marL="0">
+            <a:pPr marL="0" indent="0" algn="ctr">
               <a:buNone/>
             </a:pPr>
             <a:r>
@@ -13413,6 +12228,7 @@
         <a:solidFill>
           <a:srgbClr val="F5F7FB"/>
         </a:solidFill>
+        <a:effectLst/>
       </p:bgPr>
     </p:bg>
     <p:spTree>
@@ -13477,11 +12293,11 @@
           <a:bodyPr wrap="square" lIns="0" tIns="0" rIns="0" bIns="0" rtlCol="0" anchor="ctr"/>
           <a:lstStyle/>
           <a:p>
-            <a:pPr algn="ctr" indent="0" marL="0">
+            <a:pPr marL="0" indent="0" algn="ctr">
               <a:buNone/>
             </a:pPr>
             <a:r>
-              <a:rPr lang="en-US" sz="1100" b="1" spc="150" kern="0" dirty="0">
+              <a:rPr lang="en-US" sz="1100" b="1" kern="0" spc="150" dirty="0">
                 <a:solidFill>
                   <a:srgbClr val="FFFFFF"/>
                 </a:solidFill>
@@ -13516,7 +12332,7 @@
           <a:bodyPr wrap="square" lIns="0" tIns="0" rIns="0" bIns="0" rtlCol="0" anchor="ctr"/>
           <a:lstStyle/>
           <a:p>
-            <a:pPr indent="0" marL="0">
+            <a:pPr marL="0" indent="0">
               <a:buNone/>
             </a:pPr>
             <a:r>
@@ -13555,7 +12371,7 @@
           <a:bodyPr wrap="square" lIns="0" tIns="0" rIns="0" bIns="0" rtlCol="0" anchor="ctr"/>
           <a:lstStyle/>
           <a:p>
-            <a:pPr indent="0" marL="0">
+            <a:pPr marL="0" indent="0">
               <a:buNone/>
             </a:pPr>
             <a:r>
@@ -13575,7 +12391,7 @@
       </p:sp>
       <p:graphicFrame>
         <p:nvGraphicFramePr>
-          <p:cNvPr id="6" name="Chart 0" descr=""/>
+          <p:cNvPr id="6" name="Chart 0"/>
           <p:cNvGraphicFramePr/>
           <p:nvPr/>
         </p:nvGraphicFramePr>
@@ -13583,9 +12399,9 @@
           <a:off x="502920" y="2057400"/>
           <a:ext cx="5486400" cy="4160520"/>
         </p:xfrm>
-        <a:graphic xmlns:a="http://schemas.openxmlformats.org/drawingml/2006/main">
+        <a:graphic>
           <a:graphicData uri="http://schemas.openxmlformats.org/drawingml/2006/chart">
-            <c:chart xmlns:c="http://schemas.openxmlformats.org/drawingml/2006/chart" r:id="rId1"/>
+            <c:chart xmlns:c="http://schemas.openxmlformats.org/drawingml/2006/chart" xmlns:r="http://schemas.openxmlformats.org/officeDocument/2006/relationships" r:id="rId3"/>
           </a:graphicData>
         </a:graphic>
       </p:graphicFrame>
@@ -13605,17 +12421,41 @@
         </p:nvGraphicFramePr>
         <p:xfrm>
           <a:off x="6263640" y="2103120"/>
-          <a:ext cx="5422392" cy="914400"/>
+          <a:ext cx="5422392" cy="2834640"/>
         </p:xfrm>
         <a:graphic>
           <a:graphicData uri="http://schemas.openxmlformats.org/drawingml/2006/table">
             <a:tbl>
               <a:tblPr/>
               <a:tblGrid>
-                <a:gridCol w="1371600"/>
-                <a:gridCol w="1188720"/>
-                <a:gridCol w="1399032"/>
-                <a:gridCol w="1463040"/>
+                <a:gridCol w="1371600">
+                  <a:extLst>
+                    <a:ext uri="{9D8B030D-6E8A-4147-A177-3AD203B41FA5}">
+                      <a16:colId xmlns:a16="http://schemas.microsoft.com/office/drawing/2014/main" val="20000"/>
+                    </a:ext>
+                  </a:extLst>
+                </a:gridCol>
+                <a:gridCol w="1188720">
+                  <a:extLst>
+                    <a:ext uri="{9D8B030D-6E8A-4147-A177-3AD203B41FA5}">
+                      <a16:colId xmlns:a16="http://schemas.microsoft.com/office/drawing/2014/main" val="20001"/>
+                    </a:ext>
+                  </a:extLst>
+                </a:gridCol>
+                <a:gridCol w="1399032">
+                  <a:extLst>
+                    <a:ext uri="{9D8B030D-6E8A-4147-A177-3AD203B41FA5}">
+                      <a16:colId xmlns:a16="http://schemas.microsoft.com/office/drawing/2014/main" val="20002"/>
+                    </a:ext>
+                  </a:extLst>
+                </a:gridCol>
+                <a:gridCol w="1463040">
+                  <a:extLst>
+                    <a:ext uri="{9D8B030D-6E8A-4147-A177-3AD203B41FA5}">
+                      <a16:colId xmlns:a16="http://schemas.microsoft.com/office/drawing/2014/main" val="20003"/>
+                    </a:ext>
+                  </a:extLst>
+                </a:gridCol>
               </a:tblGrid>
               <a:tr h="566928">
                 <a:tc>
@@ -13623,7 +12463,7 @@
                     <a:bodyPr/>
                     <a:lstStyle/>
                     <a:p>
-                      <a:pPr indent="0" marL="0">
+                      <a:pPr marL="0" indent="0">
                         <a:buNone/>
                       </a:pPr>
                       <a:endParaRPr lang="en-US" sz="1150" dirty="0">
@@ -13680,7 +12520,7 @@
                     <a:bodyPr/>
                     <a:lstStyle/>
                     <a:p>
-                      <a:pPr algn="ctr" indent="0" marL="0">
+                      <a:pPr marL="0" indent="0" algn="ctr">
                         <a:buNone/>
                       </a:pPr>
                       <a:r>
@@ -13748,7 +12588,7 @@
                     <a:bodyPr/>
                     <a:lstStyle/>
                     <a:p>
-                      <a:pPr algn="ctr" indent="0" marL="0">
+                      <a:pPr marL="0" indent="0" algn="ctr">
                         <a:buNone/>
                       </a:pPr>
                       <a:r>
@@ -13816,7 +12656,7 @@
                     <a:bodyPr/>
                     <a:lstStyle/>
                     <a:p>
-                      <a:pPr algn="ctr" indent="0" marL="0">
+                      <a:pPr marL="0" indent="0" algn="ctr">
                         <a:buNone/>
                       </a:pPr>
                       <a:r>
@@ -13879,6 +12719,11 @@
                     </a:solidFill>
                   </a:tcPr>
                 </a:tc>
+                <a:extLst>
+                  <a:ext uri="{0D108BD9-81ED-4DB2-BD59-A6C34878D82A}">
+                    <a16:rowId xmlns:a16="http://schemas.microsoft.com/office/drawing/2014/main" val="10000"/>
+                  </a:ext>
+                </a:extLst>
               </a:tr>
               <a:tr h="566928">
                 <a:tc>
@@ -13886,7 +12731,7 @@
                     <a:bodyPr/>
                     <a:lstStyle/>
                     <a:p>
-                      <a:pPr indent="0" marL="0">
+                      <a:pPr marL="0" indent="0">
                         <a:buNone/>
                       </a:pPr>
                       <a:r>
@@ -13954,7 +12799,7 @@
                     <a:bodyPr/>
                     <a:lstStyle/>
                     <a:p>
-                      <a:pPr algn="ctr" indent="0" marL="0">
+                      <a:pPr marL="0" indent="0" algn="ctr">
                         <a:buNone/>
                       </a:pPr>
                       <a:r>
@@ -14022,7 +12867,7 @@
                     <a:bodyPr/>
                     <a:lstStyle/>
                     <a:p>
-                      <a:pPr algn="ctr" indent="0" marL="0">
+                      <a:pPr marL="0" indent="0" algn="ctr">
                         <a:buNone/>
                       </a:pPr>
                       <a:r>
@@ -14090,7 +12935,7 @@
                     <a:bodyPr/>
                     <a:lstStyle/>
                     <a:p>
-                      <a:pPr algn="ctr" indent="0" marL="0">
+                      <a:pPr marL="0" indent="0" algn="ctr">
                         <a:buNone/>
                       </a:pPr>
                       <a:r>
@@ -14153,6 +12998,11 @@
                     </a:solidFill>
                   </a:tcPr>
                 </a:tc>
+                <a:extLst>
+                  <a:ext uri="{0D108BD9-81ED-4DB2-BD59-A6C34878D82A}">
+                    <a16:rowId xmlns:a16="http://schemas.microsoft.com/office/drawing/2014/main" val="10001"/>
+                  </a:ext>
+                </a:extLst>
               </a:tr>
               <a:tr h="566928">
                 <a:tc>
@@ -14160,7 +13010,7 @@
                     <a:bodyPr/>
                     <a:lstStyle/>
                     <a:p>
-                      <a:pPr indent="0" marL="0">
+                      <a:pPr marL="0" indent="0">
                         <a:buNone/>
                       </a:pPr>
                       <a:r>
@@ -14228,7 +13078,7 @@
                     <a:bodyPr/>
                     <a:lstStyle/>
                     <a:p>
-                      <a:pPr algn="ctr" indent="0" marL="0">
+                      <a:pPr marL="0" indent="0" algn="ctr">
                         <a:buNone/>
                       </a:pPr>
                       <a:r>
@@ -14296,7 +13146,7 @@
                     <a:bodyPr/>
                     <a:lstStyle/>
                     <a:p>
-                      <a:pPr algn="ctr" indent="0" marL="0">
+                      <a:pPr marL="0" indent="0" algn="ctr">
                         <a:buNone/>
                       </a:pPr>
                       <a:r>
@@ -14364,7 +13214,7 @@
                     <a:bodyPr/>
                     <a:lstStyle/>
                     <a:p>
-                      <a:pPr algn="ctr" indent="0" marL="0">
+                      <a:pPr marL="0" indent="0" algn="ctr">
                         <a:buNone/>
                       </a:pPr>
                       <a:r>
@@ -14427,6 +13277,11 @@
                     </a:solidFill>
                   </a:tcPr>
                 </a:tc>
+                <a:extLst>
+                  <a:ext uri="{0D108BD9-81ED-4DB2-BD59-A6C34878D82A}">
+                    <a16:rowId xmlns:a16="http://schemas.microsoft.com/office/drawing/2014/main" val="10002"/>
+                  </a:ext>
+                </a:extLst>
               </a:tr>
               <a:tr h="566928">
                 <a:tc>
@@ -14434,7 +13289,7 @@
                     <a:bodyPr/>
                     <a:lstStyle/>
                     <a:p>
-                      <a:pPr indent="0" marL="0">
+                      <a:pPr marL="0" indent="0">
                         <a:buNone/>
                       </a:pPr>
                       <a:r>
@@ -14502,7 +13357,7 @@
                     <a:bodyPr/>
                     <a:lstStyle/>
                     <a:p>
-                      <a:pPr algn="ctr" indent="0" marL="0">
+                      <a:pPr marL="0" indent="0" algn="ctr">
                         <a:buNone/>
                       </a:pPr>
                       <a:r>
@@ -14570,7 +13425,7 @@
                     <a:bodyPr/>
                     <a:lstStyle/>
                     <a:p>
-                      <a:pPr algn="ctr" indent="0" marL="0">
+                      <a:pPr marL="0" indent="0" algn="ctr">
                         <a:buNone/>
                       </a:pPr>
                       <a:r>
@@ -14638,7 +13493,7 @@
                     <a:bodyPr/>
                     <a:lstStyle/>
                     <a:p>
-                      <a:pPr algn="ctr" indent="0" marL="0">
+                      <a:pPr marL="0" indent="0" algn="ctr">
                         <a:buNone/>
                       </a:pPr>
                       <a:r>
@@ -14701,6 +13556,11 @@
                     </a:solidFill>
                   </a:tcPr>
                 </a:tc>
+                <a:extLst>
+                  <a:ext uri="{0D108BD9-81ED-4DB2-BD59-A6C34878D82A}">
+                    <a16:rowId xmlns:a16="http://schemas.microsoft.com/office/drawing/2014/main" val="10003"/>
+                  </a:ext>
+                </a:extLst>
               </a:tr>
               <a:tr h="566928">
                 <a:tc>
@@ -14708,7 +13568,7 @@
                     <a:bodyPr/>
                     <a:lstStyle/>
                     <a:p>
-                      <a:pPr indent="0" marL="0">
+                      <a:pPr marL="0" indent="0">
                         <a:buNone/>
                       </a:pPr>
                       <a:r>
@@ -14776,7 +13636,7 @@
                     <a:bodyPr/>
                     <a:lstStyle/>
                     <a:p>
-                      <a:pPr algn="ctr" indent="0" marL="0">
+                      <a:pPr marL="0" indent="0" algn="ctr">
                         <a:buNone/>
                       </a:pPr>
                       <a:r>
@@ -14844,7 +13704,7 @@
                     <a:bodyPr/>
                     <a:lstStyle/>
                     <a:p>
-                      <a:pPr algn="ctr" indent="0" marL="0">
+                      <a:pPr marL="0" indent="0" algn="ctr">
                         <a:buNone/>
                       </a:pPr>
                       <a:r>
@@ -14912,7 +13772,7 @@
                     <a:bodyPr/>
                     <a:lstStyle/>
                     <a:p>
-                      <a:pPr algn="ctr" indent="0" marL="0">
+                      <a:pPr marL="0" indent="0" algn="ctr">
                         <a:buNone/>
                       </a:pPr>
                       <a:r>
@@ -14975,6 +13835,11 @@
                     </a:solidFill>
                   </a:tcPr>
                 </a:tc>
+                <a:extLst>
+                  <a:ext uri="{0D108BD9-81ED-4DB2-BD59-A6C34878D82A}">
+                    <a16:rowId xmlns:a16="http://schemas.microsoft.com/office/drawing/2014/main" val="10004"/>
+                  </a:ext>
+                </a:extLst>
               </a:tr>
             </a:tbl>
           </a:graphicData>
@@ -15028,7 +13893,7 @@
           <a:bodyPr wrap="square" lIns="0" tIns="0" rIns="0" bIns="0" rtlCol="0" anchor="ctr"/>
           <a:lstStyle/>
           <a:p>
-            <a:pPr indent="0" marL="0">
+            <a:pPr marL="0" indent="0">
               <a:spcAft>
                 <a:spcPts val="400"/>
               </a:spcAft>
@@ -15045,12 +13910,6 @@
               </a:rPr>
               <a:t>En scikit-learn: </a:t>
             </a:r>
-            <a:pPr indent="0" marL="0">
-              <a:spcAft>
-                <a:spcPts val="400"/>
-              </a:spcAft>
-              <a:buNone/>
-            </a:pPr>
             <a:r>
               <a:rPr lang="en-US" sz="1200" dirty="0">
                 <a:solidFill>
@@ -15082,6 +13941,7 @@
         <a:solidFill>
           <a:srgbClr val="F5F7FB"/>
         </a:solidFill>
+        <a:effectLst/>
       </p:bgPr>
     </p:bg>
     <p:spTree>
@@ -15146,11 +14006,11 @@
           <a:bodyPr wrap="square" lIns="0" tIns="0" rIns="0" bIns="0" rtlCol="0" anchor="ctr"/>
           <a:lstStyle/>
           <a:p>
-            <a:pPr algn="ctr" indent="0" marL="0">
+            <a:pPr marL="0" indent="0" algn="ctr">
               <a:buNone/>
             </a:pPr>
             <a:r>
-              <a:rPr lang="en-US" sz="1100" b="1" spc="150" kern="0" dirty="0">
+              <a:rPr lang="en-US" sz="1100" b="1" kern="0" spc="150" dirty="0">
                 <a:solidFill>
                   <a:srgbClr val="FFFFFF"/>
                 </a:solidFill>
@@ -15185,7 +14045,7 @@
           <a:bodyPr wrap="square" lIns="0" tIns="0" rIns="0" bIns="0" rtlCol="0" anchor="ctr"/>
           <a:lstStyle/>
           <a:p>
-            <a:pPr indent="0" marL="0">
+            <a:pPr marL="0" indent="0">
               <a:buNone/>
             </a:pPr>
             <a:r>
@@ -15211,7 +14071,7 @@
         </p:nvSpPr>
         <p:spPr>
           <a:xfrm>
-            <a:off x="502920" y="1481328"/>
+            <a:off x="502920" y="1499616"/>
             <a:ext cx="11155680" cy="365760"/>
           </a:xfrm>
           <a:prstGeom prst="rect">
@@ -15224,7 +14084,7 @@
           <a:bodyPr wrap="square" lIns="0" tIns="0" rIns="0" bIns="0" rtlCol="0" anchor="ctr"/>
           <a:lstStyle/>
           <a:p>
-            <a:pPr indent="0" marL="0">
+            <a:pPr marL="0" indent="0">
               <a:buNone/>
             </a:pPr>
             <a:r>
@@ -15258,17 +14118,41 @@
         </p:nvGraphicFramePr>
         <p:xfrm>
           <a:off x="502920" y="2103120"/>
-          <a:ext cx="6949440" cy="914400"/>
+          <a:ext cx="6949440" cy="1901952"/>
         </p:xfrm>
         <a:graphic>
           <a:graphicData uri="http://schemas.openxmlformats.org/drawingml/2006/table">
             <a:tbl>
               <a:tblPr/>
               <a:tblGrid>
-                <a:gridCol w="3108960"/>
-                <a:gridCol w="1188720"/>
-                <a:gridCol w="1188720"/>
-                <a:gridCol w="1463040"/>
+                <a:gridCol w="3108960">
+                  <a:extLst>
+                    <a:ext uri="{9D8B030D-6E8A-4147-A177-3AD203B41FA5}">
+                      <a16:colId xmlns:a16="http://schemas.microsoft.com/office/drawing/2014/main" val="20000"/>
+                    </a:ext>
+                  </a:extLst>
+                </a:gridCol>
+                <a:gridCol w="1188720">
+                  <a:extLst>
+                    <a:ext uri="{9D8B030D-6E8A-4147-A177-3AD203B41FA5}">
+                      <a16:colId xmlns:a16="http://schemas.microsoft.com/office/drawing/2014/main" val="20001"/>
+                    </a:ext>
+                  </a:extLst>
+                </a:gridCol>
+                <a:gridCol w="1188720">
+                  <a:extLst>
+                    <a:ext uri="{9D8B030D-6E8A-4147-A177-3AD203B41FA5}">
+                      <a16:colId xmlns:a16="http://schemas.microsoft.com/office/drawing/2014/main" val="20002"/>
+                    </a:ext>
+                  </a:extLst>
+                </a:gridCol>
+                <a:gridCol w="1463040">
+                  <a:extLst>
+                    <a:ext uri="{9D8B030D-6E8A-4147-A177-3AD203B41FA5}">
+                      <a16:colId xmlns:a16="http://schemas.microsoft.com/office/drawing/2014/main" val="20003"/>
+                    </a:ext>
+                  </a:extLst>
+                </a:gridCol>
               </a:tblGrid>
               <a:tr h="475488">
                 <a:tc>
@@ -15276,7 +14160,7 @@
                     <a:bodyPr/>
                     <a:lstStyle/>
                     <a:p>
-                      <a:pPr indent="0" marL="0">
+                      <a:pPr marL="0" indent="0">
                         <a:buNone/>
                       </a:pPr>
                       <a:r>
@@ -15344,7 +14228,7 @@
                     <a:bodyPr/>
                     <a:lstStyle/>
                     <a:p>
-                      <a:pPr algn="ctr" indent="0" marL="0">
+                      <a:pPr marL="0" indent="0" algn="ctr">
                         <a:buNone/>
                       </a:pPr>
                       <a:r>
@@ -15412,7 +14296,7 @@
                     <a:bodyPr/>
                     <a:lstStyle/>
                     <a:p>
-                      <a:pPr algn="ctr" indent="0" marL="0">
+                      <a:pPr marL="0" indent="0" algn="ctr">
                         <a:buNone/>
                       </a:pPr>
                       <a:r>
@@ -15480,7 +14364,7 @@
                     <a:bodyPr/>
                     <a:lstStyle/>
                     <a:p>
-                      <a:pPr algn="ctr" indent="0" marL="0">
+                      <a:pPr marL="0" indent="0" algn="ctr">
                         <a:buNone/>
                       </a:pPr>
                       <a:r>
@@ -15543,6 +14427,11 @@
                     </a:solidFill>
                   </a:tcPr>
                 </a:tc>
+                <a:extLst>
+                  <a:ext uri="{0D108BD9-81ED-4DB2-BD59-A6C34878D82A}">
+                    <a16:rowId xmlns:a16="http://schemas.microsoft.com/office/drawing/2014/main" val="10000"/>
+                  </a:ext>
+                </a:extLst>
               </a:tr>
               <a:tr h="475488">
                 <a:tc>
@@ -15550,7 +14439,7 @@
                     <a:bodyPr/>
                     <a:lstStyle/>
                     <a:p>
-                      <a:pPr indent="0" marL="0">
+                      <a:pPr marL="0" indent="0">
                         <a:buNone/>
                       </a:pPr>
                       <a:r>
@@ -15618,7 +14507,7 @@
                     <a:bodyPr/>
                     <a:lstStyle/>
                     <a:p>
-                      <a:pPr algn="ctr" indent="0" marL="0">
+                      <a:pPr marL="0" indent="0" algn="ctr">
                         <a:buNone/>
                       </a:pPr>
                       <a:r>
@@ -15686,7 +14575,7 @@
                     <a:bodyPr/>
                     <a:lstStyle/>
                     <a:p>
-                      <a:pPr algn="ctr" indent="0" marL="0">
+                      <a:pPr marL="0" indent="0" algn="ctr">
                         <a:buNone/>
                       </a:pPr>
                       <a:r>
@@ -15754,7 +14643,7 @@
                     <a:bodyPr/>
                     <a:lstStyle/>
                     <a:p>
-                      <a:pPr algn="ctr" indent="0" marL="0">
+                      <a:pPr marL="0" indent="0" algn="ctr">
                         <a:buNone/>
                       </a:pPr>
                       <a:r>
@@ -15817,6 +14706,11 @@
                     </a:solidFill>
                   </a:tcPr>
                 </a:tc>
+                <a:extLst>
+                  <a:ext uri="{0D108BD9-81ED-4DB2-BD59-A6C34878D82A}">
+                    <a16:rowId xmlns:a16="http://schemas.microsoft.com/office/drawing/2014/main" val="10001"/>
+                  </a:ext>
+                </a:extLst>
               </a:tr>
               <a:tr h="475488">
                 <a:tc>
@@ -15824,7 +14718,7 @@
                     <a:bodyPr/>
                     <a:lstStyle/>
                     <a:p>
-                      <a:pPr indent="0" marL="0">
+                      <a:pPr marL="0" indent="0">
                         <a:buNone/>
                       </a:pPr>
                       <a:r>
@@ -15892,7 +14786,7 @@
                     <a:bodyPr/>
                     <a:lstStyle/>
                     <a:p>
-                      <a:pPr algn="ctr" indent="0" marL="0">
+                      <a:pPr marL="0" indent="0" algn="ctr">
                         <a:buNone/>
                       </a:pPr>
                       <a:r>
@@ -15960,7 +14854,7 @@
                     <a:bodyPr/>
                     <a:lstStyle/>
                     <a:p>
-                      <a:pPr algn="ctr" indent="0" marL="0">
+                      <a:pPr marL="0" indent="0" algn="ctr">
                         <a:buNone/>
                       </a:pPr>
                       <a:r>
@@ -16028,7 +14922,7 @@
                     <a:bodyPr/>
                     <a:lstStyle/>
                     <a:p>
-                      <a:pPr algn="ctr" indent="0" marL="0">
+                      <a:pPr marL="0" indent="0" algn="ctr">
                         <a:buNone/>
                       </a:pPr>
                       <a:r>
@@ -16091,6 +14985,11 @@
                     </a:solidFill>
                   </a:tcPr>
                 </a:tc>
+                <a:extLst>
+                  <a:ext uri="{0D108BD9-81ED-4DB2-BD59-A6C34878D82A}">
+                    <a16:rowId xmlns:a16="http://schemas.microsoft.com/office/drawing/2014/main" val="10002"/>
+                  </a:ext>
+                </a:extLst>
               </a:tr>
               <a:tr h="475488">
                 <a:tc>
@@ -16098,7 +14997,7 @@
                     <a:bodyPr/>
                     <a:lstStyle/>
                     <a:p>
-                      <a:pPr indent="0" marL="0">
+                      <a:pPr marL="0" indent="0">
                         <a:buNone/>
                       </a:pPr>
                       <a:r>
@@ -16166,7 +15065,7 @@
                     <a:bodyPr/>
                     <a:lstStyle/>
                     <a:p>
-                      <a:pPr algn="ctr" indent="0" marL="0">
+                      <a:pPr marL="0" indent="0" algn="ctr">
                         <a:buNone/>
                       </a:pPr>
                       <a:r>
@@ -16234,7 +15133,7 @@
                     <a:bodyPr/>
                     <a:lstStyle/>
                     <a:p>
-                      <a:pPr algn="ctr" indent="0" marL="0">
+                      <a:pPr marL="0" indent="0" algn="ctr">
                         <a:buNone/>
                       </a:pPr>
                       <a:r>
@@ -16302,7 +15201,7 @@
                     <a:bodyPr/>
                     <a:lstStyle/>
                     <a:p>
-                      <a:pPr algn="ctr" indent="0" marL="0">
+                      <a:pPr marL="0" indent="0" algn="ctr">
                         <a:buNone/>
                       </a:pPr>
                       <a:r>
@@ -16365,6 +15264,11 @@
                     </a:solidFill>
                   </a:tcPr>
                 </a:tc>
+                <a:extLst>
+                  <a:ext uri="{0D108BD9-81ED-4DB2-BD59-A6C34878D82A}">
+                    <a16:rowId xmlns:a16="http://schemas.microsoft.com/office/drawing/2014/main" val="10003"/>
+                  </a:ext>
+                </a:extLst>
               </a:tr>
             </a:tbl>
           </a:graphicData>
@@ -16445,7 +15349,7 @@
           <a:bodyPr wrap="square" lIns="0" tIns="0" rIns="0" bIns="0" rtlCol="0" anchor="ctr"/>
           <a:lstStyle/>
           <a:p>
-            <a:pPr indent="0" marL="0">
+            <a:pPr marL="0" indent="0">
               <a:buNone/>
             </a:pPr>
             <a:r>
@@ -16484,7 +15388,7 @@
           <a:bodyPr wrap="square" lIns="0" tIns="0" rIns="0" bIns="0" rtlCol="0" anchor="t"/>
           <a:lstStyle/>
           <a:p>
-            <a:pPr indent="0" marL="0">
+            <a:pPr marL="0" indent="0">
               <a:spcAft>
                 <a:spcPts val="400"/>
               </a:spcAft>
@@ -16534,7 +15438,7 @@
       </p:sp>
       <p:sp>
         <p:nvSpPr>
-          <p:cNvPr id="12" name="Shape 9"/>
+          <p:cNvPr id="6" name="Shape 9"/>
           <p:cNvSpPr/>
           <p:nvPr/>
         </p:nvSpPr>
@@ -16580,7 +15484,7 @@
           <a:bodyPr wrap="square" lIns="0" tIns="0" rIns="0" bIns="0" rtlCol="0" anchor="ctr"/>
           <a:lstStyle/>
           <a:p>
-            <a:pPr indent="0" marL="0">
+            <a:pPr marL="0" indent="0">
               <a:buNone/>
             </a:pPr>
             <a:r>
@@ -16619,7 +15523,7 @@
           <a:bodyPr wrap="square" lIns="0" tIns="0" rIns="0" bIns="0" rtlCol="0" anchor="t"/>
           <a:lstStyle/>
           <a:p>
-            <a:pPr indent="0" marL="0">
+            <a:pPr marL="0" indent="0">
               <a:spcAft>
                 <a:spcPts val="400"/>
               </a:spcAft>
@@ -16715,7 +15619,7 @@
           <a:bodyPr wrap="square" lIns="0" tIns="0" rIns="0" bIns="0" rtlCol="0" anchor="ctr"/>
           <a:lstStyle/>
           <a:p>
-            <a:pPr indent="0" marL="0">
+            <a:pPr marL="0" indent="0">
               <a:buNone/>
             </a:pPr>
             <a:r>
@@ -16754,7 +15658,7 @@
           <a:bodyPr wrap="square" lIns="0" tIns="0" rIns="0" bIns="0" rtlCol="0" anchor="t"/>
           <a:lstStyle/>
           <a:p>
-            <a:pPr indent="0" marL="0">
+            <a:pPr marL="0" indent="0">
               <a:spcAft>
                 <a:spcPts val="400"/>
               </a:spcAft>
@@ -16791,6 +15695,7 @@
         <a:solidFill>
           <a:srgbClr val="F5F7FB"/>
         </a:solidFill>
+        <a:effectLst/>
       </p:bgPr>
     </p:bg>
     <p:spTree>
@@ -16855,11 +15760,11 @@
           <a:bodyPr wrap="square" lIns="0" tIns="0" rIns="0" bIns="0" rtlCol="0" anchor="ctr"/>
           <a:lstStyle/>
           <a:p>
-            <a:pPr algn="ctr" indent="0" marL="0">
+            <a:pPr marL="0" indent="0" algn="ctr">
               <a:buNone/>
             </a:pPr>
             <a:r>
-              <a:rPr lang="en-US" sz="1100" b="1" spc="150" kern="0" dirty="0">
+              <a:rPr lang="en-US" sz="1100" b="1" kern="0" spc="150" dirty="0">
                 <a:solidFill>
                   <a:srgbClr val="FFFFFF"/>
                 </a:solidFill>
@@ -16894,7 +15799,7 @@
           <a:bodyPr wrap="square" lIns="0" tIns="0" rIns="0" bIns="0" rtlCol="0" anchor="ctr"/>
           <a:lstStyle/>
           <a:p>
-            <a:pPr indent="0" marL="0">
+            <a:pPr marL="0" indent="0">
               <a:buNone/>
             </a:pPr>
             <a:r>
@@ -16933,7 +15838,7 @@
           <a:bodyPr wrap="square" lIns="0" tIns="0" rIns="0" bIns="0" rtlCol="0" anchor="ctr"/>
           <a:lstStyle/>
           <a:p>
-            <a:pPr indent="0" marL="0">
+            <a:pPr marL="0" indent="0">
               <a:buNone/>
             </a:pPr>
             <a:r>
@@ -17026,7 +15931,7 @@
           <a:bodyPr wrap="square" lIns="0" tIns="0" rIns="0" bIns="0" rtlCol="0" anchor="ctr"/>
           <a:lstStyle/>
           <a:p>
-            <a:pPr indent="0" marL="0">
+            <a:pPr marL="0" indent="0">
               <a:buNone/>
             </a:pPr>
             <a:r>
@@ -17065,7 +15970,7 @@
           <a:bodyPr wrap="square" lIns="0" tIns="0" rIns="0" bIns="0" rtlCol="0" anchor="ctr"/>
           <a:lstStyle/>
           <a:p>
-            <a:pPr indent="0" marL="0">
+            <a:pPr marL="0" indent="0">
               <a:buNone/>
             </a:pPr>
             <a:r>
@@ -17126,7 +16031,7 @@
           <a:bodyPr wrap="square" lIns="0" tIns="0" rIns="0" bIns="0" rtlCol="0" anchor="ctr"/>
           <a:lstStyle/>
           <a:p>
-            <a:pPr indent="0" marL="0">
+            <a:pPr marL="0" indent="0">
               <a:buNone/>
             </a:pPr>
             <a:r>
@@ -17185,7 +16090,7 @@
           <a:bodyPr wrap="square" lIns="0" tIns="0" rIns="0" bIns="0" rtlCol="0" anchor="ctr"/>
           <a:lstStyle/>
           <a:p>
-            <a:pPr indent="0" marL="0">
+            <a:pPr marL="0" indent="0">
               <a:buNone/>
             </a:pPr>
             <a:r>
@@ -17224,7 +16129,7 @@
           <a:bodyPr wrap="square" lIns="0" tIns="0" rIns="0" bIns="0" rtlCol="0" anchor="ctr"/>
           <a:lstStyle/>
           <a:p>
-            <a:pPr indent="0" marL="0">
+            <a:pPr marL="0" indent="0">
               <a:buNone/>
             </a:pPr>
             <a:r>
@@ -17285,7 +16190,7 @@
           <a:bodyPr wrap="square" lIns="0" tIns="0" rIns="0" bIns="0" rtlCol="0" anchor="ctr"/>
           <a:lstStyle/>
           <a:p>
-            <a:pPr indent="0" marL="0">
+            <a:pPr marL="0" indent="0">
               <a:buNone/>
             </a:pPr>
             <a:r>
@@ -17344,7 +16249,7 @@
           <a:bodyPr wrap="square" lIns="0" tIns="0" rIns="0" bIns="0" rtlCol="0" anchor="ctr"/>
           <a:lstStyle/>
           <a:p>
-            <a:pPr indent="0" marL="0">
+            <a:pPr marL="0" indent="0">
               <a:buNone/>
             </a:pPr>
             <a:r>
@@ -17383,7 +16288,7 @@
           <a:bodyPr wrap="square" lIns="0" tIns="0" rIns="0" bIns="0" rtlCol="0" anchor="ctr"/>
           <a:lstStyle/>
           <a:p>
-            <a:pPr indent="0" marL="0">
+            <a:pPr marL="0" indent="0">
               <a:buNone/>
             </a:pPr>
             <a:r>
@@ -17444,7 +16349,7 @@
           <a:bodyPr wrap="square" lIns="0" tIns="0" rIns="0" bIns="0" rtlCol="0" anchor="ctr"/>
           <a:lstStyle/>
           <a:p>
-            <a:pPr indent="0" marL="0">
+            <a:pPr marL="0" indent="0">
               <a:buNone/>
             </a:pPr>
             <a:r>
@@ -17503,7 +16408,7 @@
           <a:bodyPr wrap="square" lIns="0" tIns="0" rIns="0" bIns="0" rtlCol="0" anchor="ctr"/>
           <a:lstStyle/>
           <a:p>
-            <a:pPr indent="0" marL="0">
+            <a:pPr marL="0" indent="0">
               <a:buNone/>
             </a:pPr>
             <a:r>
@@ -17542,7 +16447,7 @@
           <a:bodyPr wrap="square" lIns="0" tIns="0" rIns="0" bIns="0" rtlCol="0" anchor="ctr"/>
           <a:lstStyle/>
           <a:p>
-            <a:pPr indent="0" marL="0">
+            <a:pPr marL="0" indent="0">
               <a:buNone/>
             </a:pPr>
             <a:r>
@@ -17603,7 +16508,7 @@
           <a:bodyPr wrap="square" lIns="0" tIns="0" rIns="0" bIns="0" rtlCol="0" anchor="ctr"/>
           <a:lstStyle/>
           <a:p>
-            <a:pPr indent="0" marL="0">
+            <a:pPr marL="0" indent="0">
               <a:buNone/>
             </a:pPr>
             <a:r>
@@ -17649,7 +16554,7 @@
         </p:nvSpPr>
         <p:spPr>
           <a:xfrm>
-            <a:off x="6099975" y="5632704"/>
+            <a:off x="6097889" y="5646420"/>
             <a:ext cx="640080" cy="292608"/>
           </a:xfrm>
           <a:prstGeom prst="rect">
@@ -17662,7 +16567,7 @@
           <a:bodyPr wrap="square" lIns="0" tIns="0" rIns="0" bIns="0" rtlCol="0" anchor="ctr"/>
           <a:lstStyle/>
           <a:p>
-            <a:pPr indent="0" marL="0">
+            <a:pPr marL="0" indent="0">
               <a:buNone/>
             </a:pPr>
             <a:r>
@@ -17755,7 +16660,7 @@
           <a:bodyPr wrap="square" lIns="0" tIns="0" rIns="0" bIns="0" rtlCol="0" anchor="ctr"/>
           <a:lstStyle/>
           <a:p>
-            <a:pPr indent="0" marL="0">
+            <a:pPr marL="0" indent="0">
               <a:buNone/>
             </a:pPr>
             <a:r>
@@ -17794,7 +16699,7 @@
           <a:bodyPr wrap="square" lIns="0" tIns="0" rIns="0" bIns="0" rtlCol="0" anchor="t"/>
           <a:lstStyle/>
           <a:p>
-            <a:pPr indent="0" marL="0">
+            <a:pPr marL="0" indent="0">
               <a:spcAft>
                 <a:spcPts val="400"/>
               </a:spcAft>
@@ -17890,7 +16795,7 @@
           <a:bodyPr wrap="square" lIns="0" tIns="0" rIns="0" bIns="0" rtlCol="0" anchor="ctr"/>
           <a:lstStyle/>
           <a:p>
-            <a:pPr indent="0" marL="0">
+            <a:pPr marL="0" indent="0">
               <a:buNone/>
             </a:pPr>
             <a:r>
@@ -17929,7 +16834,7 @@
           <a:bodyPr wrap="square" lIns="0" tIns="0" rIns="0" bIns="0" rtlCol="0" anchor="t"/>
           <a:lstStyle/>
           <a:p>
-            <a:pPr indent="0" marL="0">
+            <a:pPr marL="0" indent="0">
               <a:spcAft>
                 <a:spcPts val="400"/>
               </a:spcAft>
@@ -17966,6 +16871,7 @@
         <a:solidFill>
           <a:srgbClr val="F5F7FB"/>
         </a:solidFill>
+        <a:effectLst/>
       </p:bgPr>
     </p:bg>
     <p:spTree>
@@ -18030,11 +16936,11 @@
           <a:bodyPr wrap="square" lIns="0" tIns="0" rIns="0" bIns="0" rtlCol="0" anchor="ctr"/>
           <a:lstStyle/>
           <a:p>
-            <a:pPr algn="ctr" indent="0" marL="0">
+            <a:pPr marL="0" indent="0" algn="ctr">
               <a:buNone/>
             </a:pPr>
             <a:r>
-              <a:rPr lang="en-US" sz="1100" b="1" spc="150" kern="0" dirty="0">
+              <a:rPr lang="en-US" sz="1100" b="1" kern="0" spc="150" dirty="0">
                 <a:solidFill>
                   <a:srgbClr val="FFFFFF"/>
                 </a:solidFill>
@@ -18069,7 +16975,7 @@
           <a:bodyPr wrap="square" lIns="0" tIns="0" rIns="0" bIns="0" rtlCol="0" anchor="ctr"/>
           <a:lstStyle/>
           <a:p>
-            <a:pPr indent="0" marL="0">
+            <a:pPr marL="0" indent="0">
               <a:buNone/>
             </a:pPr>
             <a:r>
@@ -18108,7 +17014,7 @@
           <a:bodyPr wrap="square" lIns="0" tIns="0" rIns="0" bIns="0" rtlCol="0" anchor="ctr"/>
           <a:lstStyle/>
           <a:p>
-            <a:pPr indent="0" marL="0">
+            <a:pPr marL="0" indent="0">
               <a:buNone/>
             </a:pPr>
             <a:r>
@@ -18147,7 +17053,7 @@
           <a:bodyPr wrap="square" lIns="0" tIns="0" rIns="0" bIns="0" rtlCol="0" anchor="ctr"/>
           <a:lstStyle/>
           <a:p>
-            <a:pPr algn="ctr" indent="0" marL="0">
+            <a:pPr marL="0" indent="0" algn="ctr">
               <a:buNone/>
             </a:pPr>
             <a:endParaRPr lang="en-US" sz="1100" dirty="0"/>
@@ -18175,7 +17081,7 @@
           <a:bodyPr wrap="square" lIns="0" tIns="0" rIns="0" bIns="0" rtlCol="0" anchor="ctr"/>
           <a:lstStyle/>
           <a:p>
-            <a:pPr algn="ctr" indent="0" marL="0">
+            <a:pPr marL="0" indent="0" algn="ctr">
               <a:buNone/>
             </a:pPr>
             <a:r>
@@ -18214,7 +17120,7 @@
           <a:bodyPr wrap="square" lIns="0" tIns="0" rIns="0" bIns="0" rtlCol="0" anchor="ctr"/>
           <a:lstStyle/>
           <a:p>
-            <a:pPr algn="ctr" indent="0" marL="0">
+            <a:pPr marL="0" indent="0" algn="ctr">
               <a:buNone/>
             </a:pPr>
             <a:r>
@@ -18253,7 +17159,7 @@
           <a:bodyPr wrap="square" lIns="0" tIns="0" rIns="0" bIns="0" rtlCol="0" anchor="ctr"/>
           <a:lstStyle/>
           <a:p>
-            <a:pPr algn="ctr" indent="0" marL="0">
+            <a:pPr marL="0" indent="0" algn="ctr">
               <a:buNone/>
             </a:pPr>
             <a:r>
@@ -18292,7 +17198,7 @@
           <a:bodyPr wrap="square" lIns="0" tIns="0" rIns="0" bIns="0" rtlCol="0" anchor="ctr"/>
           <a:lstStyle/>
           <a:p>
-            <a:pPr algn="ctr" indent="0" marL="0">
+            <a:pPr marL="0" indent="0" algn="ctr">
               <a:buNone/>
             </a:pPr>
             <a:r>
@@ -18331,7 +17237,7 @@
           <a:bodyPr wrap="square" lIns="0" tIns="0" rIns="0" bIns="0" rtlCol="0" anchor="ctr"/>
           <a:lstStyle/>
           <a:p>
-            <a:pPr algn="ctr" indent="0" marL="0">
+            <a:pPr marL="0" indent="0" algn="ctr">
               <a:buNone/>
             </a:pPr>
             <a:r>
@@ -18370,7 +17276,7 @@
           <a:bodyPr wrap="square" lIns="0" tIns="0" rIns="0" bIns="0" rtlCol="0" anchor="ctr"/>
           <a:lstStyle/>
           <a:p>
-            <a:pPr algn="ctr" indent="0" marL="0">
+            <a:pPr marL="0" indent="0" algn="ctr">
               <a:buNone/>
             </a:pPr>
             <a:r>
@@ -18436,7 +17342,7 @@
           <a:bodyPr wrap="square" lIns="0" tIns="0" rIns="0" bIns="0" rtlCol="0" anchor="ctr"/>
           <a:lstStyle/>
           <a:p>
-            <a:pPr algn="ctr" indent="0" marL="0">
+            <a:pPr marL="0" indent="0" algn="ctr">
               <a:buNone/>
             </a:pPr>
             <a:r>
@@ -18502,7 +17408,7 @@
           <a:bodyPr wrap="square" lIns="0" tIns="0" rIns="0" bIns="0" rtlCol="0" anchor="ctr"/>
           <a:lstStyle/>
           <a:p>
-            <a:pPr algn="ctr" indent="0" marL="0">
+            <a:pPr marL="0" indent="0" algn="ctr">
               <a:buNone/>
             </a:pPr>
             <a:r>
@@ -18568,7 +17474,7 @@
           <a:bodyPr wrap="square" lIns="0" tIns="0" rIns="0" bIns="0" rtlCol="0" anchor="ctr"/>
           <a:lstStyle/>
           <a:p>
-            <a:pPr algn="ctr" indent="0" marL="0">
+            <a:pPr marL="0" indent="0" algn="ctr">
               <a:buNone/>
             </a:pPr>
             <a:r>
@@ -18634,7 +17540,7 @@
           <a:bodyPr wrap="square" lIns="0" tIns="0" rIns="0" bIns="0" rtlCol="0" anchor="ctr"/>
           <a:lstStyle/>
           <a:p>
-            <a:pPr algn="ctr" indent="0" marL="0">
+            <a:pPr marL="0" indent="0" algn="ctr">
               <a:buNone/>
             </a:pPr>
             <a:r>
@@ -18700,7 +17606,7 @@
           <a:bodyPr wrap="square" lIns="0" tIns="0" rIns="0" bIns="0" rtlCol="0" anchor="ctr"/>
           <a:lstStyle/>
           <a:p>
-            <a:pPr algn="ctr" indent="0" marL="0">
+            <a:pPr marL="0" indent="0" algn="ctr">
               <a:buNone/>
             </a:pPr>
             <a:r>
@@ -18739,7 +17645,7 @@
           <a:bodyPr wrap="square" lIns="0" tIns="0" rIns="0" bIns="0" rtlCol="0" anchor="ctr"/>
           <a:lstStyle/>
           <a:p>
-            <a:pPr algn="ctr" indent="0" marL="0">
+            <a:pPr marL="0" indent="0" algn="ctr">
               <a:buNone/>
             </a:pPr>
             <a:r>
@@ -18805,7 +17711,7 @@
           <a:bodyPr wrap="square" lIns="0" tIns="0" rIns="0" bIns="0" rtlCol="0" anchor="ctr"/>
           <a:lstStyle/>
           <a:p>
-            <a:pPr algn="ctr" indent="0" marL="0">
+            <a:pPr marL="0" indent="0" algn="ctr">
               <a:buNone/>
             </a:pPr>
             <a:r>
@@ -18871,7 +17777,7 @@
           <a:bodyPr wrap="square" lIns="0" tIns="0" rIns="0" bIns="0" rtlCol="0" anchor="ctr"/>
           <a:lstStyle/>
           <a:p>
-            <a:pPr algn="ctr" indent="0" marL="0">
+            <a:pPr marL="0" indent="0" algn="ctr">
               <a:buNone/>
             </a:pPr>
             <a:r>
@@ -18937,7 +17843,7 @@
           <a:bodyPr wrap="square" lIns="0" tIns="0" rIns="0" bIns="0" rtlCol="0" anchor="ctr"/>
           <a:lstStyle/>
           <a:p>
-            <a:pPr algn="ctr" indent="0" marL="0">
+            <a:pPr marL="0" indent="0" algn="ctr">
               <a:buNone/>
             </a:pPr>
             <a:r>
@@ -19003,7 +17909,7 @@
           <a:bodyPr wrap="square" lIns="0" tIns="0" rIns="0" bIns="0" rtlCol="0" anchor="ctr"/>
           <a:lstStyle/>
           <a:p>
-            <a:pPr algn="ctr" indent="0" marL="0">
+            <a:pPr marL="0" indent="0" algn="ctr">
               <a:buNone/>
             </a:pPr>
             <a:r>
@@ -19069,7 +17975,7 @@
           <a:bodyPr wrap="square" lIns="0" tIns="0" rIns="0" bIns="0" rtlCol="0" anchor="ctr"/>
           <a:lstStyle/>
           <a:p>
-            <a:pPr algn="ctr" indent="0" marL="0">
+            <a:pPr marL="0" indent="0" algn="ctr">
               <a:buNone/>
             </a:pPr>
             <a:r>
@@ -19108,7 +18014,7 @@
           <a:bodyPr wrap="square" lIns="0" tIns="0" rIns="0" bIns="0" rtlCol="0" anchor="ctr"/>
           <a:lstStyle/>
           <a:p>
-            <a:pPr algn="ctr" indent="0" marL="0">
+            <a:pPr marL="0" indent="0" algn="ctr">
               <a:buNone/>
             </a:pPr>
             <a:r>
@@ -19174,7 +18080,7 @@
           <a:bodyPr wrap="square" lIns="0" tIns="0" rIns="0" bIns="0" rtlCol="0" anchor="ctr"/>
           <a:lstStyle/>
           <a:p>
-            <a:pPr algn="ctr" indent="0" marL="0">
+            <a:pPr marL="0" indent="0" algn="ctr">
               <a:buNone/>
             </a:pPr>
             <a:r>
@@ -19240,7 +18146,7 @@
           <a:bodyPr wrap="square" lIns="0" tIns="0" rIns="0" bIns="0" rtlCol="0" anchor="ctr"/>
           <a:lstStyle/>
           <a:p>
-            <a:pPr algn="ctr" indent="0" marL="0">
+            <a:pPr marL="0" indent="0" algn="ctr">
               <a:buNone/>
             </a:pPr>
             <a:r>
@@ -19306,7 +18212,7 @@
           <a:bodyPr wrap="square" lIns="0" tIns="0" rIns="0" bIns="0" rtlCol="0" anchor="ctr"/>
           <a:lstStyle/>
           <a:p>
-            <a:pPr algn="ctr" indent="0" marL="0">
+            <a:pPr marL="0" indent="0" algn="ctr">
               <a:buNone/>
             </a:pPr>
             <a:r>
@@ -19372,7 +18278,7 @@
           <a:bodyPr wrap="square" lIns="0" tIns="0" rIns="0" bIns="0" rtlCol="0" anchor="ctr"/>
           <a:lstStyle/>
           <a:p>
-            <a:pPr algn="ctr" indent="0" marL="0">
+            <a:pPr marL="0" indent="0" algn="ctr">
               <a:buNone/>
             </a:pPr>
             <a:r>
@@ -19438,7 +18344,7 @@
           <a:bodyPr wrap="square" lIns="0" tIns="0" rIns="0" bIns="0" rtlCol="0" anchor="ctr"/>
           <a:lstStyle/>
           <a:p>
-            <a:pPr algn="ctr" indent="0" marL="0">
+            <a:pPr marL="0" indent="0" algn="ctr">
               <a:buNone/>
             </a:pPr>
             <a:r>
@@ -19477,7 +18383,7 @@
           <a:bodyPr wrap="square" lIns="0" tIns="0" rIns="0" bIns="0" rtlCol="0" anchor="ctr"/>
           <a:lstStyle/>
           <a:p>
-            <a:pPr algn="ctr" indent="0" marL="0">
+            <a:pPr marL="0" indent="0" algn="ctr">
               <a:buNone/>
             </a:pPr>
             <a:r>
@@ -19543,7 +18449,7 @@
           <a:bodyPr wrap="square" lIns="0" tIns="0" rIns="0" bIns="0" rtlCol="0" anchor="ctr"/>
           <a:lstStyle/>
           <a:p>
-            <a:pPr algn="ctr" indent="0" marL="0">
+            <a:pPr marL="0" indent="0" algn="ctr">
               <a:buNone/>
             </a:pPr>
             <a:r>
@@ -19609,7 +18515,7 @@
           <a:bodyPr wrap="square" lIns="0" tIns="0" rIns="0" bIns="0" rtlCol="0" anchor="ctr"/>
           <a:lstStyle/>
           <a:p>
-            <a:pPr algn="ctr" indent="0" marL="0">
+            <a:pPr marL="0" indent="0" algn="ctr">
               <a:buNone/>
             </a:pPr>
             <a:r>
@@ -19675,7 +18581,7 @@
           <a:bodyPr wrap="square" lIns="0" tIns="0" rIns="0" bIns="0" rtlCol="0" anchor="ctr"/>
           <a:lstStyle/>
           <a:p>
-            <a:pPr algn="ctr" indent="0" marL="0">
+            <a:pPr marL="0" indent="0" algn="ctr">
               <a:buNone/>
             </a:pPr>
             <a:r>
@@ -19741,7 +18647,7 @@
           <a:bodyPr wrap="square" lIns="0" tIns="0" rIns="0" bIns="0" rtlCol="0" anchor="ctr"/>
           <a:lstStyle/>
           <a:p>
-            <a:pPr algn="ctr" indent="0" marL="0">
+            <a:pPr marL="0" indent="0" algn="ctr">
               <a:buNone/>
             </a:pPr>
             <a:r>
@@ -19807,7 +18713,7 @@
           <a:bodyPr wrap="square" lIns="0" tIns="0" rIns="0" bIns="0" rtlCol="0" anchor="ctr"/>
           <a:lstStyle/>
           <a:p>
-            <a:pPr algn="ctr" indent="0" marL="0">
+            <a:pPr marL="0" indent="0" algn="ctr">
               <a:buNone/>
             </a:pPr>
             <a:r>
@@ -19846,7 +18752,7 @@
           <a:bodyPr wrap="square" lIns="0" tIns="0" rIns="0" bIns="0" rtlCol="0" anchor="ctr"/>
           <a:lstStyle/>
           <a:p>
-            <a:pPr algn="ctr" indent="0" marL="0">
+            <a:pPr marL="0" indent="0" algn="ctr">
               <a:buNone/>
             </a:pPr>
             <a:r>
@@ -19912,7 +18818,7 @@
           <a:bodyPr wrap="square" lIns="0" tIns="0" rIns="0" bIns="0" rtlCol="0" anchor="ctr"/>
           <a:lstStyle/>
           <a:p>
-            <a:pPr algn="ctr" indent="0" marL="0">
+            <a:pPr marL="0" indent="0" algn="ctr">
               <a:buNone/>
             </a:pPr>
             <a:r>
@@ -19978,7 +18884,7 @@
           <a:bodyPr wrap="square" lIns="0" tIns="0" rIns="0" bIns="0" rtlCol="0" anchor="ctr"/>
           <a:lstStyle/>
           <a:p>
-            <a:pPr algn="ctr" indent="0" marL="0">
+            <a:pPr marL="0" indent="0" algn="ctr">
               <a:buNone/>
             </a:pPr>
             <a:r>
@@ -20044,7 +18950,7 @@
           <a:bodyPr wrap="square" lIns="0" tIns="0" rIns="0" bIns="0" rtlCol="0" anchor="ctr"/>
           <a:lstStyle/>
           <a:p>
-            <a:pPr algn="ctr" indent="0" marL="0">
+            <a:pPr marL="0" indent="0" algn="ctr">
               <a:buNone/>
             </a:pPr>
             <a:r>
@@ -20110,7 +19016,7 @@
           <a:bodyPr wrap="square" lIns="0" tIns="0" rIns="0" bIns="0" rtlCol="0" anchor="ctr"/>
           <a:lstStyle/>
           <a:p>
-            <a:pPr algn="ctr" indent="0" marL="0">
+            <a:pPr marL="0" indent="0" algn="ctr">
               <a:buNone/>
             </a:pPr>
             <a:r>
@@ -20176,7 +19082,7 @@
           <a:bodyPr wrap="square" lIns="0" tIns="0" rIns="0" bIns="0" rtlCol="0" anchor="ctr"/>
           <a:lstStyle/>
           <a:p>
-            <a:pPr algn="ctr" indent="0" marL="0">
+            <a:pPr marL="0" indent="0" algn="ctr">
               <a:buNone/>
             </a:pPr>
             <a:r>
@@ -20215,7 +19121,7 @@
           <a:bodyPr wrap="square" lIns="0" tIns="0" rIns="0" bIns="0" rtlCol="0" anchor="t"/>
           <a:lstStyle/>
           <a:p>
-            <a:pPr indent="0" marL="0">
+            <a:pPr marL="0" indent="0">
               <a:spcAft>
                 <a:spcPts val="400"/>
               </a:spcAft>
@@ -20284,7 +19190,7 @@
           <a:bodyPr wrap="square" lIns="0" tIns="0" rIns="0" bIns="0" rtlCol="0" anchor="ctr"/>
           <a:lstStyle/>
           <a:p>
-            <a:pPr indent="0" marL="0">
+            <a:pPr marL="0" indent="0">
               <a:spcAft>
                 <a:spcPts val="400"/>
               </a:spcAft>
@@ -20301,12 +19207,6 @@
               </a:rPr>
               <a:t>Es el simulacro de la Clase 1, repetido 5 veces. </a:t>
             </a:r>
-            <a:pPr indent="0" marL="0">
-              <a:spcAft>
-                <a:spcPts val="400"/>
-              </a:spcAft>
-              <a:buNone/>
-            </a:pPr>
             <a:r>
               <a:rPr lang="en-US" sz="1250" dirty="0">
                 <a:solidFill>
@@ -20324,7 +19224,7 @@
       </p:sp>
       <p:graphicFrame>
         <p:nvGraphicFramePr>
-          <p:cNvPr id="14" name="Table 0"/>
+          <p:cNvPr id="70" name="Table 0"/>
           <p:cNvGraphicFramePr>
             <a:graphicFrameLocks noGrp="1"/>
           </p:cNvGraphicFramePr>
@@ -20338,16 +19238,34 @@
         </p:nvGraphicFramePr>
         <p:xfrm>
           <a:off x="6903720" y="2103120"/>
-          <a:ext cx="4782312" cy="914400"/>
+          <a:ext cx="4782312" cy="2633472"/>
         </p:xfrm>
         <a:graphic>
           <a:graphicData uri="http://schemas.openxmlformats.org/drawingml/2006/table">
             <a:tbl>
               <a:tblPr/>
               <a:tblGrid>
-                <a:gridCol w="822960"/>
-                <a:gridCol w="1920240"/>
-                <a:gridCol w="2039112"/>
+                <a:gridCol w="822960">
+                  <a:extLst>
+                    <a:ext uri="{9D8B030D-6E8A-4147-A177-3AD203B41FA5}">
+                      <a16:colId xmlns:a16="http://schemas.microsoft.com/office/drawing/2014/main" val="20000"/>
+                    </a:ext>
+                  </a:extLst>
+                </a:gridCol>
+                <a:gridCol w="1920240">
+                  <a:extLst>
+                    <a:ext uri="{9D8B030D-6E8A-4147-A177-3AD203B41FA5}">
+                      <a16:colId xmlns:a16="http://schemas.microsoft.com/office/drawing/2014/main" val="20001"/>
+                    </a:ext>
+                  </a:extLst>
+                </a:gridCol>
+                <a:gridCol w="2039112">
+                  <a:extLst>
+                    <a:ext uri="{9D8B030D-6E8A-4147-A177-3AD203B41FA5}">
+                      <a16:colId xmlns:a16="http://schemas.microsoft.com/office/drawing/2014/main" val="20002"/>
+                    </a:ext>
+                  </a:extLst>
+                </a:gridCol>
               </a:tblGrid>
               <a:tr h="438912">
                 <a:tc>
@@ -20355,7 +19273,7 @@
                     <a:bodyPr/>
                     <a:lstStyle/>
                     <a:p>
-                      <a:pPr algn="ctr" indent="0" marL="0">
+                      <a:pPr marL="0" indent="0" algn="ctr">
                         <a:buNone/>
                       </a:pPr>
                       <a:r>
@@ -20423,7 +19341,7 @@
                     <a:bodyPr/>
                     <a:lstStyle/>
                     <a:p>
-                      <a:pPr algn="ctr" indent="0" marL="0">
+                      <a:pPr marL="0" indent="0" algn="ctr">
                         <a:buNone/>
                       </a:pPr>
                       <a:r>
@@ -20491,7 +19409,7 @@
                     <a:bodyPr/>
                     <a:lstStyle/>
                     <a:p>
-                      <a:pPr algn="ctr" indent="0" marL="0">
+                      <a:pPr marL="0" indent="0" algn="ctr">
                         <a:buNone/>
                       </a:pPr>
                       <a:endParaRPr lang="en-US" sz="1150" dirty="0">
@@ -20543,6 +19461,11 @@
                     </a:solidFill>
                   </a:tcPr>
                 </a:tc>
+                <a:extLst>
+                  <a:ext uri="{0D108BD9-81ED-4DB2-BD59-A6C34878D82A}">
+                    <a16:rowId xmlns:a16="http://schemas.microsoft.com/office/drawing/2014/main" val="10000"/>
+                  </a:ext>
+                </a:extLst>
               </a:tr>
               <a:tr h="438912">
                 <a:tc>
@@ -20550,7 +19473,7 @@
                     <a:bodyPr/>
                     <a:lstStyle/>
                     <a:p>
-                      <a:pPr algn="ctr" indent="0" marL="0">
+                      <a:pPr marL="0" indent="0" algn="ctr">
                         <a:buNone/>
                       </a:pPr>
                       <a:r>
@@ -20618,7 +19541,7 @@
                     <a:bodyPr/>
                     <a:lstStyle/>
                     <a:p>
-                      <a:pPr algn="ctr" indent="0" marL="0">
+                      <a:pPr marL="0" indent="0" algn="ctr">
                         <a:buNone/>
                       </a:pPr>
                       <a:r>
@@ -20686,7 +19609,7 @@
                     <a:bodyPr/>
                     <a:lstStyle/>
                     <a:p>
-                      <a:pPr indent="0" marL="0">
+                      <a:pPr marL="0" indent="0">
                         <a:buNone/>
                       </a:pPr>
                       <a:r>
@@ -20749,6 +19672,11 @@
                     </a:solidFill>
                   </a:tcPr>
                 </a:tc>
+                <a:extLst>
+                  <a:ext uri="{0D108BD9-81ED-4DB2-BD59-A6C34878D82A}">
+                    <a16:rowId xmlns:a16="http://schemas.microsoft.com/office/drawing/2014/main" val="10001"/>
+                  </a:ext>
+                </a:extLst>
               </a:tr>
               <a:tr h="438912">
                 <a:tc>
@@ -20756,7 +19684,7 @@
                     <a:bodyPr/>
                     <a:lstStyle/>
                     <a:p>
-                      <a:pPr algn="ctr" indent="0" marL="0">
+                      <a:pPr marL="0" indent="0" algn="ctr">
                         <a:buNone/>
                       </a:pPr>
                       <a:r>
@@ -20824,7 +19752,7 @@
                     <a:bodyPr/>
                     <a:lstStyle/>
                     <a:p>
-                      <a:pPr algn="ctr" indent="0" marL="0">
+                      <a:pPr marL="0" indent="0" algn="ctr">
                         <a:buNone/>
                       </a:pPr>
                       <a:r>
@@ -20892,7 +19820,7 @@
                     <a:bodyPr/>
                     <a:lstStyle/>
                     <a:p>
-                      <a:pPr indent="0" marL="0">
+                      <a:pPr marL="0" indent="0">
                         <a:buNone/>
                       </a:pPr>
                       <a:r>
@@ -20955,6 +19883,11 @@
                     </a:solidFill>
                   </a:tcPr>
                 </a:tc>
+                <a:extLst>
+                  <a:ext uri="{0D108BD9-81ED-4DB2-BD59-A6C34878D82A}">
+                    <a16:rowId xmlns:a16="http://schemas.microsoft.com/office/drawing/2014/main" val="10002"/>
+                  </a:ext>
+                </a:extLst>
               </a:tr>
               <a:tr h="438912">
                 <a:tc>
@@ -20962,7 +19895,7 @@
                     <a:bodyPr/>
                     <a:lstStyle/>
                     <a:p>
-                      <a:pPr algn="ctr" indent="0" marL="0">
+                      <a:pPr marL="0" indent="0" algn="ctr">
                         <a:buNone/>
                       </a:pPr>
                       <a:r>
@@ -21030,7 +19963,7 @@
                     <a:bodyPr/>
                     <a:lstStyle/>
                     <a:p>
-                      <a:pPr algn="ctr" indent="0" marL="0">
+                      <a:pPr marL="0" indent="0" algn="ctr">
                         <a:buNone/>
                       </a:pPr>
                       <a:r>
@@ -21098,7 +20031,7 @@
                     <a:bodyPr/>
                     <a:lstStyle/>
                     <a:p>
-                      <a:pPr indent="0" marL="0">
+                      <a:pPr marL="0" indent="0">
                         <a:buNone/>
                       </a:pPr>
                       <a:r>
@@ -21161,6 +20094,11 @@
                     </a:solidFill>
                   </a:tcPr>
                 </a:tc>
+                <a:extLst>
+                  <a:ext uri="{0D108BD9-81ED-4DB2-BD59-A6C34878D82A}">
+                    <a16:rowId xmlns:a16="http://schemas.microsoft.com/office/drawing/2014/main" val="10003"/>
+                  </a:ext>
+                </a:extLst>
               </a:tr>
               <a:tr h="438912">
                 <a:tc>
@@ -21168,7 +20106,7 @@
                     <a:bodyPr/>
                     <a:lstStyle/>
                     <a:p>
-                      <a:pPr algn="ctr" indent="0" marL="0">
+                      <a:pPr marL="0" indent="0" algn="ctr">
                         <a:buNone/>
                       </a:pPr>
                       <a:r>
@@ -21236,7 +20174,7 @@
                     <a:bodyPr/>
                     <a:lstStyle/>
                     <a:p>
-                      <a:pPr algn="ctr" indent="0" marL="0">
+                      <a:pPr marL="0" indent="0" algn="ctr">
                         <a:buNone/>
                       </a:pPr>
                       <a:r>
@@ -21304,7 +20242,7 @@
                     <a:bodyPr/>
                     <a:lstStyle/>
                     <a:p>
-                      <a:pPr indent="0" marL="0">
+                      <a:pPr marL="0" indent="0">
                         <a:buNone/>
                       </a:pPr>
                       <a:r>
@@ -21367,6 +20305,11 @@
                     </a:solidFill>
                   </a:tcPr>
                 </a:tc>
+                <a:extLst>
+                  <a:ext uri="{0D108BD9-81ED-4DB2-BD59-A6C34878D82A}">
+                    <a16:rowId xmlns:a16="http://schemas.microsoft.com/office/drawing/2014/main" val="10004"/>
+                  </a:ext>
+                </a:extLst>
               </a:tr>
               <a:tr h="438912">
                 <a:tc>
@@ -21374,7 +20317,7 @@
                     <a:bodyPr/>
                     <a:lstStyle/>
                     <a:p>
-                      <a:pPr algn="ctr" indent="0" marL="0">
+                      <a:pPr marL="0" indent="0" algn="ctr">
                         <a:buNone/>
                       </a:pPr>
                       <a:r>
@@ -21442,7 +20385,7 @@
                     <a:bodyPr/>
                     <a:lstStyle/>
                     <a:p>
-                      <a:pPr algn="ctr" indent="0" marL="0">
+                      <a:pPr marL="0" indent="0" algn="ctr">
                         <a:buNone/>
                       </a:pPr>
                       <a:r>
@@ -21510,7 +20453,7 @@
                     <a:bodyPr/>
                     <a:lstStyle/>
                     <a:p>
-                      <a:pPr indent="0" marL="0">
+                      <a:pPr marL="0" indent="0">
                         <a:buNone/>
                       </a:pPr>
                       <a:r>
@@ -21573,6 +20516,11 @@
                     </a:solidFill>
                   </a:tcPr>
                 </a:tc>
+                <a:extLst>
+                  <a:ext uri="{0D108BD9-81ED-4DB2-BD59-A6C34878D82A}">
+                    <a16:rowId xmlns:a16="http://schemas.microsoft.com/office/drawing/2014/main" val="10005"/>
+                  </a:ext>
+                </a:extLst>
               </a:tr>
             </a:tbl>
           </a:graphicData>
@@ -21626,7 +20574,7 @@
           <a:bodyPr wrap="square" lIns="0" tIns="0" rIns="0" bIns="0" rtlCol="0" anchor="ctr"/>
           <a:lstStyle/>
           <a:p>
-            <a:pPr indent="0" marL="0">
+            <a:pPr marL="0" indent="0">
               <a:spcAft>
                 <a:spcPts val="400"/>
               </a:spcAft>
@@ -21643,12 +20591,6 @@
               </a:rPr>
               <a:t>Con α = 10, medido una sola vez en prueba: </a:t>
             </a:r>
-            <a:pPr indent="0" marL="0">
-              <a:spcAft>
-                <a:spcPts val="400"/>
-              </a:spcAft>
-              <a:buNone/>
-            </a:pPr>
             <a:r>
               <a:rPr lang="en-US" sz="1250" b="1" dirty="0">
                 <a:solidFill>
@@ -21660,12 +20602,6 @@
               </a:rPr>
               <a:t>R² 0.657.</a:t>
             </a:r>
-            <a:pPr indent="0" marL="0">
-              <a:spcAft>
-                <a:spcPts val="400"/>
-              </a:spcAft>
-              <a:buNone/>
-            </a:pPr>
             <a:r>
               <a:rPr lang="en-US" sz="1250" dirty="0">
                 <a:solidFill>
@@ -21697,6 +20633,7 @@
         <a:solidFill>
           <a:srgbClr val="F5F7FB"/>
         </a:solidFill>
+        <a:effectLst/>
       </p:bgPr>
     </p:bg>
     <p:spTree>
@@ -21761,11 +20698,11 @@
           <a:bodyPr wrap="square" lIns="0" tIns="0" rIns="0" bIns="0" rtlCol="0" anchor="ctr"/>
           <a:lstStyle/>
           <a:p>
-            <a:pPr algn="ctr" indent="0" marL="0">
+            <a:pPr marL="0" indent="0" algn="ctr">
               <a:buNone/>
             </a:pPr>
             <a:r>
-              <a:rPr lang="en-US" sz="1100" b="1" spc="150" kern="0" dirty="0">
+              <a:rPr lang="en-US" sz="1100" b="1" kern="0" spc="150" dirty="0">
                 <a:solidFill>
                   <a:srgbClr val="FFFFFF"/>
                 </a:solidFill>
@@ -21800,7 +20737,7 @@
           <a:bodyPr wrap="square" lIns="0" tIns="0" rIns="0" bIns="0" rtlCol="0" anchor="ctr"/>
           <a:lstStyle/>
           <a:p>
-            <a:pPr indent="0" marL="0">
+            <a:pPr marL="0" indent="0">
               <a:buNone/>
             </a:pPr>
             <a:r>
@@ -21839,7 +20776,7 @@
           <a:bodyPr wrap="square" lIns="0" tIns="0" rIns="0" bIns="0" rtlCol="0" anchor="ctr"/>
           <a:lstStyle/>
           <a:p>
-            <a:pPr indent="0" marL="0">
+            <a:pPr marL="0" indent="0">
               <a:buNone/>
             </a:pPr>
             <a:r>
@@ -21859,7 +20796,7 @@
       </p:sp>
       <p:graphicFrame>
         <p:nvGraphicFramePr>
-          <p:cNvPr id="6" name="Chart 0" descr=""/>
+          <p:cNvPr id="6" name="Chart 0"/>
           <p:cNvGraphicFramePr/>
           <p:nvPr/>
         </p:nvGraphicFramePr>
@@ -21867,9 +20804,9 @@
           <a:off x="502920" y="2011680"/>
           <a:ext cx="5669280" cy="2788920"/>
         </p:xfrm>
-        <a:graphic xmlns:a="http://schemas.openxmlformats.org/drawingml/2006/main">
+        <a:graphic>
           <a:graphicData uri="http://schemas.openxmlformats.org/drawingml/2006/chart">
-            <c:chart xmlns:c="http://schemas.openxmlformats.org/drawingml/2006/chart" r:id="rId1"/>
+            <c:chart xmlns:c="http://schemas.openxmlformats.org/drawingml/2006/chart" xmlns:r="http://schemas.openxmlformats.org/officeDocument/2006/relationships" r:id="rId3"/>
           </a:graphicData>
         </a:graphic>
       </p:graphicFrame>
@@ -21889,16 +20826,34 @@
         </p:nvGraphicFramePr>
         <p:xfrm>
           <a:off x="502920" y="4892040"/>
-          <a:ext cx="5669280" cy="914400"/>
+          <a:ext cx="5669280" cy="1316736"/>
         </p:xfrm>
         <a:graphic>
           <a:graphicData uri="http://schemas.openxmlformats.org/drawingml/2006/table">
             <a:tbl>
               <a:tblPr/>
               <a:tblGrid>
-                <a:gridCol w="1828800"/>
-                <a:gridCol w="1920240"/>
-                <a:gridCol w="1920240"/>
+                <a:gridCol w="1828800">
+                  <a:extLst>
+                    <a:ext uri="{9D8B030D-6E8A-4147-A177-3AD203B41FA5}">
+                      <a16:colId xmlns:a16="http://schemas.microsoft.com/office/drawing/2014/main" val="20000"/>
+                    </a:ext>
+                  </a:extLst>
+                </a:gridCol>
+                <a:gridCol w="1920240">
+                  <a:extLst>
+                    <a:ext uri="{9D8B030D-6E8A-4147-A177-3AD203B41FA5}">
+                      <a16:colId xmlns:a16="http://schemas.microsoft.com/office/drawing/2014/main" val="20001"/>
+                    </a:ext>
+                  </a:extLst>
+                </a:gridCol>
+                <a:gridCol w="1920240">
+                  <a:extLst>
+                    <a:ext uri="{9D8B030D-6E8A-4147-A177-3AD203B41FA5}">
+                      <a16:colId xmlns:a16="http://schemas.microsoft.com/office/drawing/2014/main" val="20002"/>
+                    </a:ext>
+                  </a:extLst>
+                </a:gridCol>
               </a:tblGrid>
               <a:tr h="219456">
                 <a:tc>
@@ -21906,7 +20861,7 @@
                     <a:bodyPr/>
                     <a:lstStyle/>
                     <a:p>
-                      <a:pPr algn="ctr" indent="0" marL="0">
+                      <a:pPr marL="0" indent="0" algn="ctr">
                         <a:buNone/>
                       </a:pPr>
                       <a:r>
@@ -21974,7 +20929,7 @@
                     <a:bodyPr/>
                     <a:lstStyle/>
                     <a:p>
-                      <a:pPr algn="ctr" indent="0" marL="0">
+                      <a:pPr marL="0" indent="0" algn="ctr">
                         <a:buNone/>
                       </a:pPr>
                       <a:r>
@@ -22042,7 +20997,7 @@
                     <a:bodyPr/>
                     <a:lstStyle/>
                     <a:p>
-                      <a:pPr algn="ctr" indent="0" marL="0">
+                      <a:pPr marL="0" indent="0" algn="ctr">
                         <a:buNone/>
                       </a:pPr>
                       <a:r>
@@ -22105,6 +21060,11 @@
                     </a:solidFill>
                   </a:tcPr>
                 </a:tc>
+                <a:extLst>
+                  <a:ext uri="{0D108BD9-81ED-4DB2-BD59-A6C34878D82A}">
+                    <a16:rowId xmlns:a16="http://schemas.microsoft.com/office/drawing/2014/main" val="10000"/>
+                  </a:ext>
+                </a:extLst>
               </a:tr>
               <a:tr h="219456">
                 <a:tc>
@@ -22112,7 +21072,7 @@
                     <a:bodyPr/>
                     <a:lstStyle/>
                     <a:p>
-                      <a:pPr algn="ctr" indent="0" marL="0">
+                      <a:pPr marL="0" indent="0" algn="ctr">
                         <a:buNone/>
                       </a:pPr>
                       <a:r>
@@ -22180,7 +21140,7 @@
                     <a:bodyPr/>
                     <a:lstStyle/>
                     <a:p>
-                      <a:pPr algn="ctr" indent="0" marL="0">
+                      <a:pPr marL="0" indent="0" algn="ctr">
                         <a:buNone/>
                       </a:pPr>
                       <a:r>
@@ -22248,7 +21208,7 @@
                     <a:bodyPr/>
                     <a:lstStyle/>
                     <a:p>
-                      <a:pPr algn="ctr" indent="0" marL="0">
+                      <a:pPr marL="0" indent="0" algn="ctr">
                         <a:buNone/>
                       </a:pPr>
                       <a:r>
@@ -22311,6 +21271,11 @@
                     </a:solidFill>
                   </a:tcPr>
                 </a:tc>
+                <a:extLst>
+                  <a:ext uri="{0D108BD9-81ED-4DB2-BD59-A6C34878D82A}">
+                    <a16:rowId xmlns:a16="http://schemas.microsoft.com/office/drawing/2014/main" val="10001"/>
+                  </a:ext>
+                </a:extLst>
               </a:tr>
               <a:tr h="219456">
                 <a:tc>
@@ -22318,7 +21283,7 @@
                     <a:bodyPr/>
                     <a:lstStyle/>
                     <a:p>
-                      <a:pPr algn="ctr" indent="0" marL="0">
+                      <a:pPr marL="0" indent="0" algn="ctr">
                         <a:buNone/>
                       </a:pPr>
                       <a:r>
@@ -22386,7 +21351,7 @@
                     <a:bodyPr/>
                     <a:lstStyle/>
                     <a:p>
-                      <a:pPr algn="ctr" indent="0" marL="0">
+                      <a:pPr marL="0" indent="0" algn="ctr">
                         <a:buNone/>
                       </a:pPr>
                       <a:r>
@@ -22454,7 +21419,7 @@
                     <a:bodyPr/>
                     <a:lstStyle/>
                     <a:p>
-                      <a:pPr algn="ctr" indent="0" marL="0">
+                      <a:pPr marL="0" indent="0" algn="ctr">
                         <a:buNone/>
                       </a:pPr>
                       <a:r>
@@ -22517,6 +21482,11 @@
                     </a:solidFill>
                   </a:tcPr>
                 </a:tc>
+                <a:extLst>
+                  <a:ext uri="{0D108BD9-81ED-4DB2-BD59-A6C34878D82A}">
+                    <a16:rowId xmlns:a16="http://schemas.microsoft.com/office/drawing/2014/main" val="10002"/>
+                  </a:ext>
+                </a:extLst>
               </a:tr>
               <a:tr h="219456">
                 <a:tc>
@@ -22524,7 +21494,7 @@
                     <a:bodyPr/>
                     <a:lstStyle/>
                     <a:p>
-                      <a:pPr algn="ctr" indent="0" marL="0">
+                      <a:pPr marL="0" indent="0" algn="ctr">
                         <a:buNone/>
                       </a:pPr>
                       <a:r>
@@ -22592,7 +21562,7 @@
                     <a:bodyPr/>
                     <a:lstStyle/>
                     <a:p>
-                      <a:pPr algn="ctr" indent="0" marL="0">
+                      <a:pPr marL="0" indent="0" algn="ctr">
                         <a:buNone/>
                       </a:pPr>
                       <a:r>
@@ -22660,7 +21630,7 @@
                     <a:bodyPr/>
                     <a:lstStyle/>
                     <a:p>
-                      <a:pPr algn="ctr" indent="0" marL="0">
+                      <a:pPr marL="0" indent="0" algn="ctr">
                         <a:buNone/>
                       </a:pPr>
                       <a:r>
@@ -22723,6 +21693,11 @@
                     </a:solidFill>
                   </a:tcPr>
                 </a:tc>
+                <a:extLst>
+                  <a:ext uri="{0D108BD9-81ED-4DB2-BD59-A6C34878D82A}">
+                    <a16:rowId xmlns:a16="http://schemas.microsoft.com/office/drawing/2014/main" val="10003"/>
+                  </a:ext>
+                </a:extLst>
               </a:tr>
               <a:tr h="219456">
                 <a:tc>
@@ -22730,7 +21705,7 @@
                     <a:bodyPr/>
                     <a:lstStyle/>
                     <a:p>
-                      <a:pPr algn="ctr" indent="0" marL="0">
+                      <a:pPr marL="0" indent="0" algn="ctr">
                         <a:buNone/>
                       </a:pPr>
                       <a:r>
@@ -22798,7 +21773,7 @@
                     <a:bodyPr/>
                     <a:lstStyle/>
                     <a:p>
-                      <a:pPr algn="ctr" indent="0" marL="0">
+                      <a:pPr marL="0" indent="0" algn="ctr">
                         <a:buNone/>
                       </a:pPr>
                       <a:r>
@@ -22866,7 +21841,7 @@
                     <a:bodyPr/>
                     <a:lstStyle/>
                     <a:p>
-                      <a:pPr algn="ctr" indent="0" marL="0">
+                      <a:pPr marL="0" indent="0" algn="ctr">
                         <a:buNone/>
                       </a:pPr>
                       <a:r>
@@ -22929,6 +21904,11 @@
                     </a:solidFill>
                   </a:tcPr>
                 </a:tc>
+                <a:extLst>
+                  <a:ext uri="{0D108BD9-81ED-4DB2-BD59-A6C34878D82A}">
+                    <a16:rowId xmlns:a16="http://schemas.microsoft.com/office/drawing/2014/main" val="10004"/>
+                  </a:ext>
+                </a:extLst>
               </a:tr>
               <a:tr h="219456">
                 <a:tc>
@@ -22936,7 +21916,7 @@
                     <a:bodyPr/>
                     <a:lstStyle/>
                     <a:p>
-                      <a:pPr algn="ctr" indent="0" marL="0">
+                      <a:pPr marL="0" indent="0" algn="ctr">
                         <a:buNone/>
                       </a:pPr>
                       <a:r>
@@ -23004,7 +21984,7 @@
                     <a:bodyPr/>
                     <a:lstStyle/>
                     <a:p>
-                      <a:pPr algn="ctr" indent="0" marL="0">
+                      <a:pPr marL="0" indent="0" algn="ctr">
                         <a:buNone/>
                       </a:pPr>
                       <a:r>
@@ -23072,7 +22052,7 @@
                     <a:bodyPr/>
                     <a:lstStyle/>
                     <a:p>
-                      <a:pPr algn="ctr" indent="0" marL="0">
+                      <a:pPr marL="0" indent="0" algn="ctr">
                         <a:buNone/>
                       </a:pPr>
                       <a:r>
@@ -23135,6 +22115,11 @@
                     </a:solidFill>
                   </a:tcPr>
                 </a:tc>
+                <a:extLst>
+                  <a:ext uri="{0D108BD9-81ED-4DB2-BD59-A6C34878D82A}">
+                    <a16:rowId xmlns:a16="http://schemas.microsoft.com/office/drawing/2014/main" val="10005"/>
+                  </a:ext>
+                </a:extLst>
               </a:tr>
             </a:tbl>
           </a:graphicData>
@@ -23188,7 +22173,7 @@
           <a:bodyPr wrap="square" lIns="0" tIns="0" rIns="0" bIns="0" rtlCol="0" anchor="ctr"/>
           <a:lstStyle/>
           <a:p>
-            <a:pPr indent="0" marL="0">
+            <a:pPr marL="0" indent="0">
               <a:buNone/>
             </a:pPr>
             <a:r>
@@ -23227,7 +22212,7 @@
           <a:bodyPr wrap="square" lIns="0" tIns="0" rIns="0" bIns="0" rtlCol="0" anchor="ctr"/>
           <a:lstStyle/>
           <a:p>
-            <a:pPr indent="0" marL="0">
+            <a:pPr marL="0" indent="0">
               <a:spcAft>
                 <a:spcPts val="400"/>
               </a:spcAft>
@@ -23296,7 +22281,7 @@
           <a:bodyPr wrap="square" lIns="0" tIns="0" rIns="0" bIns="0" rtlCol="0" anchor="ctr"/>
           <a:lstStyle/>
           <a:p>
-            <a:pPr indent="0" marL="0">
+            <a:pPr marL="0" indent="0">
               <a:buNone/>
             </a:pPr>
             <a:r>
@@ -23335,7 +22320,7 @@
           <a:bodyPr wrap="square" lIns="0" tIns="0" rIns="0" bIns="0" rtlCol="0" anchor="ctr"/>
           <a:lstStyle/>
           <a:p>
-            <a:pPr indent="0" marL="0">
+            <a:pPr marL="0" indent="0">
               <a:spcAft>
                 <a:spcPts val="400"/>
               </a:spcAft>
@@ -23385,7 +22370,7 @@
       </p:sp>
       <p:sp>
         <p:nvSpPr>
-          <p:cNvPr id="15" name="Text 11"/>
+          <p:cNvPr id="7" name="Text 11"/>
           <p:cNvSpPr txBox="1"/>
           <p:nvPr/>
         </p:nvSpPr>
@@ -23404,7 +22389,7 @@
           <a:bodyPr wrap="square" lIns="0" tIns="0" rIns="0" bIns="0" rtlCol="0" anchor="ctr"/>
           <a:lstStyle/>
           <a:p>
-            <a:pPr indent="0" marL="0">
+            <a:pPr marL="0" indent="0">
               <a:buNone/>
             </a:pPr>
             <a:r>
@@ -23443,7 +22428,7 @@
           <a:bodyPr wrap="square" lIns="0" tIns="0" rIns="0" bIns="0" rtlCol="0" anchor="ctr"/>
           <a:lstStyle/>
           <a:p>
-            <a:pPr indent="0" marL="0">
+            <a:pPr marL="0" indent="0">
               <a:spcAft>
                 <a:spcPts val="400"/>
               </a:spcAft>
@@ -23512,7 +22497,7 @@
           <a:bodyPr wrap="square" lIns="0" tIns="0" rIns="0" bIns="0" rtlCol="0" anchor="ctr"/>
           <a:lstStyle/>
           <a:p>
-            <a:pPr indent="0" marL="0">
+            <a:pPr marL="0" indent="0">
               <a:spcAft>
                 <a:spcPts val="400"/>
               </a:spcAft>
@@ -23529,12 +22514,6 @@
               </a:rPr>
               <a:t>El de −50 pesa 30, no 2 500. </a:t>
             </a:r>
-            <a:pPr indent="0" marL="0">
-              <a:spcAft>
-                <a:spcPts val="400"/>
-              </a:spcAft>
-              <a:buNone/>
-            </a:pPr>
             <a:r>
               <a:rPr lang="en-US" sz="1200" dirty="0">
                 <a:solidFill>
@@ -23566,6 +22545,7 @@
         <a:solidFill>
           <a:srgbClr val="F5F7FB"/>
         </a:solidFill>
+        <a:effectLst/>
       </p:bgPr>
     </p:bg>
     <p:spTree>
@@ -23630,11 +22610,11 @@
           <a:bodyPr wrap="square" lIns="0" tIns="0" rIns="0" bIns="0" rtlCol="0" anchor="ctr"/>
           <a:lstStyle/>
           <a:p>
-            <a:pPr algn="ctr" indent="0" marL="0">
+            <a:pPr marL="0" indent="0" algn="ctr">
               <a:buNone/>
             </a:pPr>
             <a:r>
-              <a:rPr lang="en-US" sz="1100" b="1" spc="150" kern="0" dirty="0">
+              <a:rPr lang="en-US" sz="1100" b="1" kern="0" spc="150" dirty="0">
                 <a:solidFill>
                   <a:srgbClr val="FFFFFF"/>
                 </a:solidFill>
@@ -23669,7 +22649,7 @@
           <a:bodyPr wrap="square" lIns="0" tIns="0" rIns="0" bIns="0" rtlCol="0" anchor="ctr"/>
           <a:lstStyle/>
           <a:p>
-            <a:pPr indent="0" marL="0">
+            <a:pPr marL="0" indent="0">
               <a:buNone/>
             </a:pPr>
             <a:r>
@@ -23708,7 +22688,7 @@
           <a:bodyPr wrap="square" lIns="0" tIns="0" rIns="0" bIns="0" rtlCol="0" anchor="ctr"/>
           <a:lstStyle/>
           <a:p>
-            <a:pPr indent="0" marL="0">
+            <a:pPr marL="0" indent="0">
               <a:buNone/>
             </a:pPr>
             <a:r>
@@ -23735,26 +22715,62 @@
           <p:nvPr>
             <p:extLst>
               <p:ext uri="{D42A27DB-BD31-4B8C-83A1-F6EECF244321}">
-                <p14:modId xmlns:p14="http://schemas.microsoft.com/office/powerpoint/2010/main" val="1579011935"/>
+                <p14:modId xmlns:p14="http://schemas.microsoft.com/office/powerpoint/2010/main" val="3282659447"/>
               </p:ext>
             </p:extLst>
           </p:nvPr>
         </p:nvGraphicFramePr>
         <p:xfrm>
           <a:off x="502920" y="2103120"/>
-          <a:ext cx="11183112" cy="914400"/>
+          <a:ext cx="11183112" cy="1901952"/>
         </p:xfrm>
         <a:graphic>
           <a:graphicData uri="http://schemas.openxmlformats.org/drawingml/2006/table">
             <a:tbl>
               <a:tblPr/>
               <a:tblGrid>
-                <a:gridCol w="3291840"/>
-                <a:gridCol w="1188720"/>
-                <a:gridCol w="1188720"/>
-                <a:gridCol w="1737360"/>
-                <a:gridCol w="1828800"/>
-                <a:gridCol w="1947672"/>
+                <a:gridCol w="3291840">
+                  <a:extLst>
+                    <a:ext uri="{9D8B030D-6E8A-4147-A177-3AD203B41FA5}">
+                      <a16:colId xmlns:a16="http://schemas.microsoft.com/office/drawing/2014/main" val="20000"/>
+                    </a:ext>
+                  </a:extLst>
+                </a:gridCol>
+                <a:gridCol w="1188720">
+                  <a:extLst>
+                    <a:ext uri="{9D8B030D-6E8A-4147-A177-3AD203B41FA5}">
+                      <a16:colId xmlns:a16="http://schemas.microsoft.com/office/drawing/2014/main" val="20001"/>
+                    </a:ext>
+                  </a:extLst>
+                </a:gridCol>
+                <a:gridCol w="1188720">
+                  <a:extLst>
+                    <a:ext uri="{9D8B030D-6E8A-4147-A177-3AD203B41FA5}">
+                      <a16:colId xmlns:a16="http://schemas.microsoft.com/office/drawing/2014/main" val="20002"/>
+                    </a:ext>
+                  </a:extLst>
+                </a:gridCol>
+                <a:gridCol w="1737360">
+                  <a:extLst>
+                    <a:ext uri="{9D8B030D-6E8A-4147-A177-3AD203B41FA5}">
+                      <a16:colId xmlns:a16="http://schemas.microsoft.com/office/drawing/2014/main" val="20003"/>
+                    </a:ext>
+                  </a:extLst>
+                </a:gridCol>
+                <a:gridCol w="1828800">
+                  <a:extLst>
+                    <a:ext uri="{9D8B030D-6E8A-4147-A177-3AD203B41FA5}">
+                      <a16:colId xmlns:a16="http://schemas.microsoft.com/office/drawing/2014/main" val="20004"/>
+                    </a:ext>
+                  </a:extLst>
+                </a:gridCol>
+                <a:gridCol w="1947672">
+                  <a:extLst>
+                    <a:ext uri="{9D8B030D-6E8A-4147-A177-3AD203B41FA5}">
+                      <a16:colId xmlns:a16="http://schemas.microsoft.com/office/drawing/2014/main" val="20005"/>
+                    </a:ext>
+                  </a:extLst>
+                </a:gridCol>
               </a:tblGrid>
               <a:tr h="475488">
                 <a:tc>
@@ -23762,7 +22778,7 @@
                     <a:bodyPr/>
                     <a:lstStyle/>
                     <a:p>
-                      <a:pPr indent="0" marL="0">
+                      <a:pPr marL="0" indent="0">
                         <a:buNone/>
                       </a:pPr>
                       <a:r>
@@ -23830,7 +22846,7 @@
                     <a:bodyPr/>
                     <a:lstStyle/>
                     <a:p>
-                      <a:pPr algn="ctr" indent="0" marL="0">
+                      <a:pPr marL="0" indent="0" algn="ctr">
                         <a:buNone/>
                       </a:pPr>
                       <a:r>
@@ -23898,7 +22914,7 @@
                     <a:bodyPr/>
                     <a:lstStyle/>
                     <a:p>
-                      <a:pPr algn="ctr" indent="0" marL="0">
+                      <a:pPr marL="0" indent="0" algn="ctr">
                         <a:buNone/>
                       </a:pPr>
                       <a:r>
@@ -23966,7 +22982,7 @@
                     <a:bodyPr/>
                     <a:lstStyle/>
                     <a:p>
-                      <a:pPr algn="ctr" indent="0" marL="0">
+                      <a:pPr marL="0" indent="0" algn="ctr">
                         <a:buNone/>
                       </a:pPr>
                       <a:r>
@@ -24034,7 +23050,7 @@
                     <a:bodyPr/>
                     <a:lstStyle/>
                     <a:p>
-                      <a:pPr algn="ctr" indent="0" marL="0">
+                      <a:pPr marL="0" indent="0" algn="ctr">
                         <a:buNone/>
                       </a:pPr>
                       <a:r>
@@ -24102,7 +23118,7 @@
                     <a:bodyPr/>
                     <a:lstStyle/>
                     <a:p>
-                      <a:pPr algn="ctr" indent="0" marL="0">
+                      <a:pPr marL="0" indent="0" algn="ctr">
                         <a:buNone/>
                       </a:pPr>
                       <a:r>
@@ -24165,6 +23181,11 @@
                     </a:solidFill>
                   </a:tcPr>
                 </a:tc>
+                <a:extLst>
+                  <a:ext uri="{0D108BD9-81ED-4DB2-BD59-A6C34878D82A}">
+                    <a16:rowId xmlns:a16="http://schemas.microsoft.com/office/drawing/2014/main" val="10000"/>
+                  </a:ext>
+                </a:extLst>
               </a:tr>
               <a:tr h="475488">
                 <a:tc>
@@ -24172,7 +23193,7 @@
                     <a:bodyPr/>
                     <a:lstStyle/>
                     <a:p>
-                      <a:pPr indent="0" marL="0">
+                      <a:pPr marL="0" indent="0">
                         <a:buNone/>
                       </a:pPr>
                       <a:r>
@@ -24240,7 +23261,7 @@
                     <a:bodyPr/>
                     <a:lstStyle/>
                     <a:p>
-                      <a:pPr algn="ctr" indent="0" marL="0">
+                      <a:pPr marL="0" indent="0" algn="ctr">
                         <a:buNone/>
                       </a:pPr>
                       <a:r>
@@ -24308,7 +23329,7 @@
                     <a:bodyPr/>
                     <a:lstStyle/>
                     <a:p>
-                      <a:pPr algn="ctr" indent="0" marL="0">
+                      <a:pPr marL="0" indent="0" algn="ctr">
                         <a:buNone/>
                       </a:pPr>
                       <a:r>
@@ -24376,7 +23397,7 @@
                     <a:bodyPr/>
                     <a:lstStyle/>
                     <a:p>
-                      <a:pPr algn="ctr" indent="0" marL="0">
+                      <a:pPr marL="0" indent="0" algn="ctr">
                         <a:buNone/>
                       </a:pPr>
                       <a:r>
@@ -24444,7 +23465,7 @@
                     <a:bodyPr/>
                     <a:lstStyle/>
                     <a:p>
-                      <a:pPr algn="ctr" indent="0" marL="0">
+                      <a:pPr marL="0" indent="0" algn="ctr">
                         <a:buNone/>
                       </a:pPr>
                       <a:r>
@@ -24512,7 +23533,7 @@
                     <a:bodyPr/>
                     <a:lstStyle/>
                     <a:p>
-                      <a:pPr algn="ctr" indent="0" marL="0">
+                      <a:pPr marL="0" indent="0" algn="ctr">
                         <a:buNone/>
                       </a:pPr>
                       <a:r>
@@ -24575,6 +23596,11 @@
                     </a:solidFill>
                   </a:tcPr>
                 </a:tc>
+                <a:extLst>
+                  <a:ext uri="{0D108BD9-81ED-4DB2-BD59-A6C34878D82A}">
+                    <a16:rowId xmlns:a16="http://schemas.microsoft.com/office/drawing/2014/main" val="10001"/>
+                  </a:ext>
+                </a:extLst>
               </a:tr>
               <a:tr h="475488">
                 <a:tc>
@@ -24582,7 +23608,7 @@
                     <a:bodyPr/>
                     <a:lstStyle/>
                     <a:p>
-                      <a:pPr indent="0" marL="0">
+                      <a:pPr marL="0" indent="0">
                         <a:buNone/>
                       </a:pPr>
                       <a:r>
@@ -24650,7 +23676,7 @@
                     <a:bodyPr/>
                     <a:lstStyle/>
                     <a:p>
-                      <a:pPr algn="ctr" indent="0" marL="0">
+                      <a:pPr marL="0" indent="0" algn="ctr">
                         <a:buNone/>
                       </a:pPr>
                       <a:r>
@@ -24718,7 +23744,7 @@
                     <a:bodyPr/>
                     <a:lstStyle/>
                     <a:p>
-                      <a:pPr algn="ctr" indent="0" marL="0">
+                      <a:pPr marL="0" indent="0" algn="ctr">
                         <a:buNone/>
                       </a:pPr>
                       <a:r>
@@ -24786,7 +23812,7 @@
                     <a:bodyPr/>
                     <a:lstStyle/>
                     <a:p>
-                      <a:pPr algn="ctr" indent="0" marL="0">
+                      <a:pPr marL="0" indent="0" algn="ctr">
                         <a:buNone/>
                       </a:pPr>
                       <a:r>
@@ -24854,7 +23880,7 @@
                     <a:bodyPr/>
                     <a:lstStyle/>
                     <a:p>
-                      <a:pPr algn="ctr" indent="0" marL="0">
+                      <a:pPr marL="0" indent="0" algn="ctr">
                         <a:buNone/>
                       </a:pPr>
                       <a:r>
@@ -24922,7 +23948,7 @@
                     <a:bodyPr/>
                     <a:lstStyle/>
                     <a:p>
-                      <a:pPr algn="ctr" indent="0" marL="0">
+                      <a:pPr marL="0" indent="0" algn="ctr">
                         <a:buNone/>
                       </a:pPr>
                       <a:r>
@@ -24985,6 +24011,11 @@
                     </a:solidFill>
                   </a:tcPr>
                 </a:tc>
+                <a:extLst>
+                  <a:ext uri="{0D108BD9-81ED-4DB2-BD59-A6C34878D82A}">
+                    <a16:rowId xmlns:a16="http://schemas.microsoft.com/office/drawing/2014/main" val="10002"/>
+                  </a:ext>
+                </a:extLst>
               </a:tr>
               <a:tr h="475488">
                 <a:tc>
@@ -24992,7 +24023,7 @@
                     <a:bodyPr/>
                     <a:lstStyle/>
                     <a:p>
-                      <a:pPr indent="0" marL="0">
+                      <a:pPr marL="0" indent="0">
                         <a:buNone/>
                       </a:pPr>
                       <a:r>
@@ -25060,7 +24091,7 @@
                     <a:bodyPr/>
                     <a:lstStyle/>
                     <a:p>
-                      <a:pPr algn="ctr" indent="0" marL="0">
+                      <a:pPr marL="0" indent="0" algn="ctr">
                         <a:buNone/>
                       </a:pPr>
                       <a:r>
@@ -25128,7 +24159,7 @@
                     <a:bodyPr/>
                     <a:lstStyle/>
                     <a:p>
-                      <a:pPr algn="ctr" indent="0" marL="0">
+                      <a:pPr marL="0" indent="0" algn="ctr">
                         <a:buNone/>
                       </a:pPr>
                       <a:r>
@@ -25196,7 +24227,7 @@
                     <a:bodyPr/>
                     <a:lstStyle/>
                     <a:p>
-                      <a:pPr algn="ctr" indent="0" marL="0">
+                      <a:pPr marL="0" indent="0" algn="ctr">
                         <a:buNone/>
                       </a:pPr>
                       <a:r>
@@ -25264,7 +24295,7 @@
                     <a:bodyPr/>
                     <a:lstStyle/>
                     <a:p>
-                      <a:pPr algn="ctr" indent="0" marL="0">
+                      <a:pPr marL="0" indent="0" algn="ctr">
                         <a:buNone/>
                       </a:pPr>
                       <a:r>
@@ -25332,7 +24363,7 @@
                     <a:bodyPr/>
                     <a:lstStyle/>
                     <a:p>
-                      <a:pPr algn="ctr" indent="0" marL="0">
+                      <a:pPr marL="0" indent="0" algn="ctr">
                         <a:buNone/>
                       </a:pPr>
                       <a:r>
@@ -25395,6 +24426,11 @@
                     </a:solidFill>
                   </a:tcPr>
                 </a:tc>
+                <a:extLst>
+                  <a:ext uri="{0D108BD9-81ED-4DB2-BD59-A6C34878D82A}">
+                    <a16:rowId xmlns:a16="http://schemas.microsoft.com/office/drawing/2014/main" val="10003"/>
+                  </a:ext>
+                </a:extLst>
               </a:tr>
             </a:tbl>
           </a:graphicData>
@@ -25448,7 +24484,7 @@
           <a:bodyPr wrap="square" lIns="0" tIns="0" rIns="0" bIns="0" rtlCol="0" anchor="ctr"/>
           <a:lstStyle/>
           <a:p>
-            <a:pPr indent="0" marL="0">
+            <a:pPr marL="0" indent="0">
               <a:buNone/>
             </a:pPr>
             <a:r>
@@ -25487,7 +24523,7 @@
           <a:bodyPr wrap="square" lIns="0" tIns="0" rIns="0" bIns="0" rtlCol="0" anchor="t"/>
           <a:lstStyle/>
           <a:p>
-            <a:pPr indent="0" marL="0">
+            <a:pPr marL="0" indent="0">
               <a:spcAft>
                 <a:spcPts val="400"/>
               </a:spcAft>
@@ -25556,7 +24592,7 @@
           <a:bodyPr wrap="square" lIns="0" tIns="0" rIns="0" bIns="0" rtlCol="0" anchor="ctr"/>
           <a:lstStyle/>
           <a:p>
-            <a:pPr indent="0" marL="0">
+            <a:pPr marL="0" indent="0">
               <a:buNone/>
             </a:pPr>
             <a:r>
@@ -25595,7 +24631,7 @@
           <a:bodyPr wrap="square" lIns="0" tIns="0" rIns="0" bIns="0" rtlCol="0" anchor="t"/>
           <a:lstStyle/>
           <a:p>
-            <a:pPr indent="0" marL="0">
+            <a:pPr marL="0" indent="0">
               <a:spcAft>
                 <a:spcPts val="400"/>
               </a:spcAft>
@@ -25664,7 +24700,7 @@
           <a:bodyPr wrap="square" lIns="0" tIns="0" rIns="0" bIns="0" rtlCol="0" anchor="ctr"/>
           <a:lstStyle/>
           <a:p>
-            <a:pPr indent="0" marL="0">
+            <a:pPr marL="0" indent="0">
               <a:buNone/>
             </a:pPr>
             <a:r>
@@ -25703,7 +24739,7 @@
           <a:bodyPr wrap="square" lIns="0" tIns="0" rIns="0" bIns="0" rtlCol="0" anchor="t"/>
           <a:lstStyle/>
           <a:p>
-            <a:pPr indent="0" marL="0">
+            <a:pPr marL="0" indent="0">
               <a:spcAft>
                 <a:spcPts val="400"/>
               </a:spcAft>
@@ -25740,6 +24776,7 @@
         <a:solidFill>
           <a:srgbClr val="F5F7FB"/>
         </a:solidFill>
+        <a:effectLst/>
       </p:bgPr>
     </p:bg>
     <p:spTree>
@@ -25804,11 +24841,11 @@
           <a:bodyPr wrap="square" lIns="0" tIns="0" rIns="0" bIns="0" rtlCol="0" anchor="ctr"/>
           <a:lstStyle/>
           <a:p>
-            <a:pPr algn="ctr" indent="0" marL="0">
+            <a:pPr marL="0" indent="0" algn="ctr">
               <a:buNone/>
             </a:pPr>
             <a:r>
-              <a:rPr lang="en-US" sz="1100" b="1" spc="150" kern="0" dirty="0">
+              <a:rPr lang="en-US" sz="1100" b="1" kern="0" spc="150" dirty="0">
                 <a:solidFill>
                   <a:srgbClr val="FFFFFF"/>
                 </a:solidFill>
@@ -25843,7 +24880,7 @@
           <a:bodyPr wrap="square" lIns="0" tIns="0" rIns="0" bIns="0" rtlCol="0" anchor="ctr"/>
           <a:lstStyle/>
           <a:p>
-            <a:pPr indent="0" marL="0">
+            <a:pPr marL="0" indent="0">
               <a:buNone/>
             </a:pPr>
             <a:r>
@@ -25882,7 +24919,7 @@
           <a:bodyPr wrap="square" lIns="0" tIns="0" rIns="0" bIns="0" rtlCol="0" anchor="ctr"/>
           <a:lstStyle/>
           <a:p>
-            <a:pPr indent="0" marL="0">
+            <a:pPr marL="0" indent="0">
               <a:buNone/>
             </a:pPr>
             <a:r>
@@ -25973,7 +25010,7 @@
           <a:bodyPr wrap="square" lIns="0" tIns="0" rIns="0" bIns="0" rtlCol="0" anchor="ctr"/>
           <a:lstStyle/>
           <a:p>
-            <a:pPr algn="ctr" indent="0" marL="0">
+            <a:pPr marL="0" indent="0" algn="ctr">
               <a:buNone/>
             </a:pPr>
             <a:r>
@@ -26012,7 +25049,7 @@
           <a:bodyPr wrap="square" lIns="0" tIns="0" rIns="0" bIns="0" rtlCol="0" anchor="ctr"/>
           <a:lstStyle/>
           <a:p>
-            <a:pPr indent="0" marL="0">
+            <a:pPr marL="0" indent="0">
               <a:buNone/>
             </a:pPr>
             <a:r>
@@ -26051,7 +25088,7 @@
           <a:bodyPr wrap="square" lIns="0" tIns="0" rIns="0" bIns="0" rtlCol="0" anchor="ctr"/>
           <a:lstStyle/>
           <a:p>
-            <a:pPr indent="0" marL="0">
+            <a:pPr marL="0" indent="0">
               <a:buNone/>
             </a:pPr>
             <a:r>
@@ -26090,7 +25127,7 @@
           <a:bodyPr wrap="square" lIns="0" tIns="0" rIns="0" bIns="0" rtlCol="0" anchor="ctr"/>
           <a:lstStyle/>
           <a:p>
-            <a:pPr indent="0" marL="0">
+            <a:pPr marL="0" indent="0">
               <a:buNone/>
             </a:pPr>
             <a:r>
@@ -26181,7 +25218,7 @@
           <a:bodyPr wrap="square" lIns="0" tIns="0" rIns="0" bIns="0" rtlCol="0" anchor="ctr"/>
           <a:lstStyle/>
           <a:p>
-            <a:pPr algn="ctr" indent="0" marL="0">
+            <a:pPr marL="0" indent="0" algn="ctr">
               <a:buNone/>
             </a:pPr>
             <a:r>
@@ -26220,7 +25257,7 @@
           <a:bodyPr wrap="square" lIns="0" tIns="0" rIns="0" bIns="0" rtlCol="0" anchor="ctr"/>
           <a:lstStyle/>
           <a:p>
-            <a:pPr indent="0" marL="0">
+            <a:pPr marL="0" indent="0">
               <a:buNone/>
             </a:pPr>
             <a:r>
@@ -26259,7 +25296,7 @@
           <a:bodyPr wrap="square" lIns="0" tIns="0" rIns="0" bIns="0" rtlCol="0" anchor="ctr"/>
           <a:lstStyle/>
           <a:p>
-            <a:pPr indent="0" marL="0">
+            <a:pPr marL="0" indent="0">
               <a:buNone/>
             </a:pPr>
             <a:r>
@@ -26298,7 +25335,7 @@
           <a:bodyPr wrap="square" lIns="0" tIns="0" rIns="0" bIns="0" rtlCol="0" anchor="ctr"/>
           <a:lstStyle/>
           <a:p>
-            <a:pPr indent="0" marL="0">
+            <a:pPr marL="0" indent="0">
               <a:buNone/>
             </a:pPr>
             <a:r>
@@ -26389,7 +25426,7 @@
           <a:bodyPr wrap="square" lIns="0" tIns="0" rIns="0" bIns="0" rtlCol="0" anchor="ctr"/>
           <a:lstStyle/>
           <a:p>
-            <a:pPr algn="ctr" indent="0" marL="0">
+            <a:pPr marL="0" indent="0" algn="ctr">
               <a:buNone/>
             </a:pPr>
             <a:r>
@@ -26428,7 +25465,7 @@
           <a:bodyPr wrap="square" lIns="0" tIns="0" rIns="0" bIns="0" rtlCol="0" anchor="ctr"/>
           <a:lstStyle/>
           <a:p>
-            <a:pPr indent="0" marL="0">
+            <a:pPr marL="0" indent="0">
               <a:buNone/>
             </a:pPr>
             <a:r>
@@ -26467,7 +25504,7 @@
           <a:bodyPr wrap="square" lIns="0" tIns="0" rIns="0" bIns="0" rtlCol="0" anchor="ctr"/>
           <a:lstStyle/>
           <a:p>
-            <a:pPr indent="0" marL="0">
+            <a:pPr marL="0" indent="0">
               <a:buNone/>
             </a:pPr>
             <a:r>
@@ -26506,7 +25543,7 @@
           <a:bodyPr wrap="square" lIns="0" tIns="0" rIns="0" bIns="0" rtlCol="0" anchor="ctr"/>
           <a:lstStyle/>
           <a:p>
-            <a:pPr indent="0" marL="0">
+            <a:pPr marL="0" indent="0">
               <a:buNone/>
             </a:pPr>
             <a:r>
@@ -26597,7 +25634,7 @@
           <a:bodyPr wrap="square" lIns="0" tIns="0" rIns="0" bIns="0" rtlCol="0" anchor="ctr"/>
           <a:lstStyle/>
           <a:p>
-            <a:pPr algn="ctr" indent="0" marL="0">
+            <a:pPr marL="0" indent="0" algn="ctr">
               <a:buNone/>
             </a:pPr>
             <a:r>
@@ -26636,7 +25673,7 @@
           <a:bodyPr wrap="square" lIns="0" tIns="0" rIns="0" bIns="0" rtlCol="0" anchor="ctr"/>
           <a:lstStyle/>
           <a:p>
-            <a:pPr indent="0" marL="0">
+            <a:pPr marL="0" indent="0">
               <a:buNone/>
             </a:pPr>
             <a:r>
@@ -26675,7 +25712,7 @@
           <a:bodyPr wrap="square" lIns="0" tIns="0" rIns="0" bIns="0" rtlCol="0" anchor="ctr"/>
           <a:lstStyle/>
           <a:p>
-            <a:pPr indent="0" marL="0">
+            <a:pPr marL="0" indent="0">
               <a:buNone/>
             </a:pPr>
             <a:r>
@@ -26714,7 +25751,7 @@
           <a:bodyPr wrap="square" lIns="0" tIns="0" rIns="0" bIns="0" rtlCol="0" anchor="ctr"/>
           <a:lstStyle/>
           <a:p>
-            <a:pPr indent="0" marL="0">
+            <a:pPr marL="0" indent="0">
               <a:buNone/>
             </a:pPr>
             <a:r>
@@ -26805,7 +25842,7 @@
           <a:bodyPr wrap="square" lIns="0" tIns="0" rIns="0" bIns="0" rtlCol="0" anchor="ctr"/>
           <a:lstStyle/>
           <a:p>
-            <a:pPr algn="ctr" indent="0" marL="0">
+            <a:pPr marL="0" indent="0" algn="ctr">
               <a:buNone/>
             </a:pPr>
             <a:r>
@@ -26844,7 +25881,7 @@
           <a:bodyPr wrap="square" lIns="0" tIns="0" rIns="0" bIns="0" rtlCol="0" anchor="ctr"/>
           <a:lstStyle/>
           <a:p>
-            <a:pPr indent="0" marL="0">
+            <a:pPr marL="0" indent="0">
               <a:buNone/>
             </a:pPr>
             <a:r>
@@ -26883,7 +25920,7 @@
           <a:bodyPr wrap="square" lIns="0" tIns="0" rIns="0" bIns="0" rtlCol="0" anchor="ctr"/>
           <a:lstStyle/>
           <a:p>
-            <a:pPr indent="0" marL="0">
+            <a:pPr marL="0" indent="0">
               <a:buNone/>
             </a:pPr>
             <a:r>
@@ -26922,7 +25959,7 @@
           <a:bodyPr wrap="square" lIns="0" tIns="0" rIns="0" bIns="0" rtlCol="0" anchor="ctr"/>
           <a:lstStyle/>
           <a:p>
-            <a:pPr indent="0" marL="0">
+            <a:pPr marL="0" indent="0">
               <a:buNone/>
             </a:pPr>
             <a:r>
@@ -26988,7 +26025,7 @@
           <a:bodyPr wrap="square" lIns="0" tIns="0" rIns="0" bIns="0" rtlCol="0" anchor="ctr"/>
           <a:lstStyle/>
           <a:p>
-            <a:pPr indent="0" marL="0">
+            <a:pPr marL="0" indent="0">
               <a:spcAft>
                 <a:spcPts val="400"/>
               </a:spcAft>
@@ -27005,12 +26042,6 @@
               </a:rPr>
               <a:t>Reto para quien termine antes: </a:t>
             </a:r>
-            <a:pPr indent="0" marL="0">
-              <a:spcAft>
-                <a:spcPts val="400"/>
-              </a:spcAft>
-              <a:buNone/>
-            </a:pPr>
             <a:r>
               <a:rPr lang="en-US" sz="1200" dirty="0">
                 <a:solidFill>
@@ -27042,6 +26073,7 @@
         <a:solidFill>
           <a:srgbClr val="0A2559"/>
         </a:solidFill>
+        <a:effectLst/>
       </p:bgPr>
     </p:bg>
     <p:spTree>
@@ -27106,11 +26138,11 @@
           <a:bodyPr wrap="square" lIns="0" tIns="0" rIns="0" bIns="0" rtlCol="0" anchor="ctr"/>
           <a:lstStyle/>
           <a:p>
-            <a:pPr algn="ctr" indent="0" marL="0">
+            <a:pPr marL="0" indent="0" algn="ctr">
               <a:buNone/>
             </a:pPr>
             <a:r>
-              <a:rPr lang="en-US" sz="1100" b="1" spc="150" kern="0" dirty="0">
+              <a:rPr lang="en-US" sz="1100" b="1" kern="0" spc="150" dirty="0">
                 <a:solidFill>
                   <a:srgbClr val="FFFFFF"/>
                 </a:solidFill>
@@ -27145,7 +26177,7 @@
           <a:bodyPr wrap="square" lIns="0" tIns="0" rIns="0" bIns="0" rtlCol="0" anchor="ctr"/>
           <a:lstStyle/>
           <a:p>
-            <a:pPr indent="0" marL="0">
+            <a:pPr marL="0" indent="0">
               <a:buNone/>
             </a:pPr>
             <a:r>
@@ -27184,7 +26216,7 @@
           <a:bodyPr wrap="square" lIns="0" tIns="0" rIns="0" bIns="0" rtlCol="0" anchor="ctr"/>
           <a:lstStyle/>
           <a:p>
-            <a:pPr indent="0" marL="0">
+            <a:pPr marL="0" indent="0">
               <a:buNone/>
             </a:pPr>
             <a:r>
@@ -27277,7 +26309,7 @@
           <a:bodyPr wrap="square" lIns="0" tIns="0" rIns="0" bIns="0" rtlCol="0" anchor="ctr"/>
           <a:lstStyle/>
           <a:p>
-            <a:pPr indent="0" marL="0">
+            <a:pPr marL="0" indent="0">
               <a:buNone/>
             </a:pPr>
             <a:r>
@@ -27311,17 +26343,41 @@
         </p:nvGraphicFramePr>
         <p:xfrm>
           <a:off x="731520" y="2743200"/>
-          <a:ext cx="5577840" cy="914400"/>
+          <a:ext cx="5577840" cy="2752344"/>
         </p:xfrm>
         <a:graphic>
           <a:graphicData uri="http://schemas.openxmlformats.org/drawingml/2006/table">
             <a:tbl>
               <a:tblPr/>
               <a:tblGrid>
-                <a:gridCol w="2651760"/>
-                <a:gridCol w="822960"/>
-                <a:gridCol w="914400"/>
-                <a:gridCol w="1188720"/>
+                <a:gridCol w="2651760">
+                  <a:extLst>
+                    <a:ext uri="{9D8B030D-6E8A-4147-A177-3AD203B41FA5}">
+                      <a16:colId xmlns:a16="http://schemas.microsoft.com/office/drawing/2014/main" val="20000"/>
+                    </a:ext>
+                  </a:extLst>
+                </a:gridCol>
+                <a:gridCol w="822960">
+                  <a:extLst>
+                    <a:ext uri="{9D8B030D-6E8A-4147-A177-3AD203B41FA5}">
+                      <a16:colId xmlns:a16="http://schemas.microsoft.com/office/drawing/2014/main" val="20001"/>
+                    </a:ext>
+                  </a:extLst>
+                </a:gridCol>
+                <a:gridCol w="914400">
+                  <a:extLst>
+                    <a:ext uri="{9D8B030D-6E8A-4147-A177-3AD203B41FA5}">
+                      <a16:colId xmlns:a16="http://schemas.microsoft.com/office/drawing/2014/main" val="20002"/>
+                    </a:ext>
+                  </a:extLst>
+                </a:gridCol>
+                <a:gridCol w="1188720">
+                  <a:extLst>
+                    <a:ext uri="{9D8B030D-6E8A-4147-A177-3AD203B41FA5}">
+                      <a16:colId xmlns:a16="http://schemas.microsoft.com/office/drawing/2014/main" val="20003"/>
+                    </a:ext>
+                  </a:extLst>
+                </a:gridCol>
               </a:tblGrid>
               <a:tr h="393192">
                 <a:tc>
@@ -27329,7 +26385,7 @@
                     <a:bodyPr/>
                     <a:lstStyle/>
                     <a:p>
-                      <a:pPr algn="l" indent="0" marL="0">
+                      <a:pPr marL="0" indent="0" algn="l">
                         <a:buNone/>
                       </a:pPr>
                       <a:r>
@@ -27397,7 +26453,7 @@
                     <a:bodyPr/>
                     <a:lstStyle/>
                     <a:p>
-                      <a:pPr algn="r" indent="0" marL="0">
+                      <a:pPr marL="0" indent="0" algn="r">
                         <a:buNone/>
                       </a:pPr>
                       <a:r>
@@ -27465,7 +26521,7 @@
                     <a:bodyPr/>
                     <a:lstStyle/>
                     <a:p>
-                      <a:pPr algn="r" indent="0" marL="0">
+                      <a:pPr marL="0" indent="0" algn="r">
                         <a:buNone/>
                       </a:pPr>
                       <a:r>
@@ -27533,7 +26589,7 @@
                     <a:bodyPr/>
                     <a:lstStyle/>
                     <a:p>
-                      <a:pPr algn="r" indent="0" marL="0">
+                      <a:pPr marL="0" indent="0" algn="r">
                         <a:buNone/>
                       </a:pPr>
                       <a:r>
@@ -27596,6 +26652,11 @@
                     </a:solidFill>
                   </a:tcPr>
                 </a:tc>
+                <a:extLst>
+                  <a:ext uri="{0D108BD9-81ED-4DB2-BD59-A6C34878D82A}">
+                    <a16:rowId xmlns:a16="http://schemas.microsoft.com/office/drawing/2014/main" val="10000"/>
+                  </a:ext>
+                </a:extLst>
               </a:tr>
               <a:tr h="393192">
                 <a:tc>
@@ -27603,7 +26664,7 @@
                     <a:bodyPr/>
                     <a:lstStyle/>
                     <a:p>
-                      <a:pPr indent="0" marL="0">
+                      <a:pPr marL="0" indent="0">
                         <a:buNone/>
                       </a:pPr>
                       <a:r>
@@ -27671,7 +26732,7 @@
                     <a:bodyPr/>
                     <a:lstStyle/>
                     <a:p>
-                      <a:pPr algn="r" indent="0" marL="0">
+                      <a:pPr marL="0" indent="0" algn="r">
                         <a:buNone/>
                       </a:pPr>
                       <a:r>
@@ -27739,7 +26800,7 @@
                     <a:bodyPr/>
                     <a:lstStyle/>
                     <a:p>
-                      <a:pPr algn="r" indent="0" marL="0">
+                      <a:pPr marL="0" indent="0" algn="r">
                         <a:buNone/>
                       </a:pPr>
                       <a:r>
@@ -27807,7 +26868,7 @@
                     <a:bodyPr/>
                     <a:lstStyle/>
                     <a:p>
-                      <a:pPr algn="r" indent="0" marL="0">
+                      <a:pPr marL="0" indent="0" algn="r">
                         <a:buNone/>
                       </a:pPr>
                       <a:r>
@@ -27870,6 +26931,11 @@
                     </a:solidFill>
                   </a:tcPr>
                 </a:tc>
+                <a:extLst>
+                  <a:ext uri="{0D108BD9-81ED-4DB2-BD59-A6C34878D82A}">
+                    <a16:rowId xmlns:a16="http://schemas.microsoft.com/office/drawing/2014/main" val="10001"/>
+                  </a:ext>
+                </a:extLst>
               </a:tr>
               <a:tr h="393192">
                 <a:tc>
@@ -27877,7 +26943,7 @@
                     <a:bodyPr/>
                     <a:lstStyle/>
                     <a:p>
-                      <a:pPr indent="0" marL="0">
+                      <a:pPr marL="0" indent="0">
                         <a:buNone/>
                       </a:pPr>
                       <a:r>
@@ -27945,7 +27011,7 @@
                     <a:bodyPr/>
                     <a:lstStyle/>
                     <a:p>
-                      <a:pPr algn="r" indent="0" marL="0">
+                      <a:pPr marL="0" indent="0" algn="r">
                         <a:buNone/>
                       </a:pPr>
                       <a:r>
@@ -28013,7 +27079,7 @@
                     <a:bodyPr/>
                     <a:lstStyle/>
                     <a:p>
-                      <a:pPr algn="r" indent="0" marL="0">
+                      <a:pPr marL="0" indent="0" algn="r">
                         <a:buNone/>
                       </a:pPr>
                       <a:r>
@@ -28081,7 +27147,7 @@
                     <a:bodyPr/>
                     <a:lstStyle/>
                     <a:p>
-                      <a:pPr algn="r" indent="0" marL="0">
+                      <a:pPr marL="0" indent="0" algn="r">
                         <a:buNone/>
                       </a:pPr>
                       <a:r>
@@ -28144,6 +27210,11 @@
                     </a:solidFill>
                   </a:tcPr>
                 </a:tc>
+                <a:extLst>
+                  <a:ext uri="{0D108BD9-81ED-4DB2-BD59-A6C34878D82A}">
+                    <a16:rowId xmlns:a16="http://schemas.microsoft.com/office/drawing/2014/main" val="10002"/>
+                  </a:ext>
+                </a:extLst>
               </a:tr>
               <a:tr h="393192">
                 <a:tc>
@@ -28151,7 +27222,7 @@
                     <a:bodyPr/>
                     <a:lstStyle/>
                     <a:p>
-                      <a:pPr indent="0" marL="0">
+                      <a:pPr marL="0" indent="0">
                         <a:buNone/>
                       </a:pPr>
                       <a:r>
@@ -28219,7 +27290,7 @@
                     <a:bodyPr/>
                     <a:lstStyle/>
                     <a:p>
-                      <a:pPr algn="r" indent="0" marL="0">
+                      <a:pPr marL="0" indent="0" algn="r">
                         <a:buNone/>
                       </a:pPr>
                       <a:r>
@@ -28287,7 +27358,7 @@
                     <a:bodyPr/>
                     <a:lstStyle/>
                     <a:p>
-                      <a:pPr algn="r" indent="0" marL="0">
+                      <a:pPr marL="0" indent="0" algn="r">
                         <a:buNone/>
                       </a:pPr>
                       <a:r>
@@ -28355,7 +27426,7 @@
                     <a:bodyPr/>
                     <a:lstStyle/>
                     <a:p>
-                      <a:pPr algn="r" indent="0" marL="0">
+                      <a:pPr marL="0" indent="0" algn="r">
                         <a:buNone/>
                       </a:pPr>
                       <a:r>
@@ -28418,6 +27489,11 @@
                     </a:solidFill>
                   </a:tcPr>
                 </a:tc>
+                <a:extLst>
+                  <a:ext uri="{0D108BD9-81ED-4DB2-BD59-A6C34878D82A}">
+                    <a16:rowId xmlns:a16="http://schemas.microsoft.com/office/drawing/2014/main" val="10003"/>
+                  </a:ext>
+                </a:extLst>
               </a:tr>
               <a:tr h="393192">
                 <a:tc>
@@ -28425,7 +27501,7 @@
                     <a:bodyPr/>
                     <a:lstStyle/>
                     <a:p>
-                      <a:pPr indent="0" marL="0">
+                      <a:pPr marL="0" indent="0">
                         <a:buNone/>
                       </a:pPr>
                       <a:r>
@@ -28493,7 +27569,7 @@
                     <a:bodyPr/>
                     <a:lstStyle/>
                     <a:p>
-                      <a:pPr algn="r" indent="0" marL="0">
+                      <a:pPr marL="0" indent="0" algn="r">
                         <a:buNone/>
                       </a:pPr>
                       <a:r>
@@ -28561,7 +27637,7 @@
                     <a:bodyPr/>
                     <a:lstStyle/>
                     <a:p>
-                      <a:pPr algn="r" indent="0" marL="0">
+                      <a:pPr marL="0" indent="0" algn="r">
                         <a:buNone/>
                       </a:pPr>
                       <a:r>
@@ -28629,7 +27705,7 @@
                     <a:bodyPr/>
                     <a:lstStyle/>
                     <a:p>
-                      <a:pPr algn="r" indent="0" marL="0">
+                      <a:pPr marL="0" indent="0" algn="r">
                         <a:buNone/>
                       </a:pPr>
                       <a:r>
@@ -28692,6 +27768,11 @@
                     </a:solidFill>
                   </a:tcPr>
                 </a:tc>
+                <a:extLst>
+                  <a:ext uri="{0D108BD9-81ED-4DB2-BD59-A6C34878D82A}">
+                    <a16:rowId xmlns:a16="http://schemas.microsoft.com/office/drawing/2014/main" val="10004"/>
+                  </a:ext>
+                </a:extLst>
               </a:tr>
               <a:tr h="393192">
                 <a:tc>
@@ -28699,7 +27780,7 @@
                     <a:bodyPr/>
                     <a:lstStyle/>
                     <a:p>
-                      <a:pPr indent="0" marL="0">
+                      <a:pPr marL="0" indent="0">
                         <a:buNone/>
                       </a:pPr>
                       <a:r>
@@ -28767,7 +27848,7 @@
                     <a:bodyPr/>
                     <a:lstStyle/>
                     <a:p>
-                      <a:pPr algn="r" indent="0" marL="0">
+                      <a:pPr marL="0" indent="0" algn="r">
                         <a:buNone/>
                       </a:pPr>
                       <a:r>
@@ -28835,7 +27916,7 @@
                     <a:bodyPr/>
                     <a:lstStyle/>
                     <a:p>
-                      <a:pPr algn="r" indent="0" marL="0">
+                      <a:pPr marL="0" indent="0" algn="r">
                         <a:buNone/>
                       </a:pPr>
                       <a:r>
@@ -28903,7 +27984,7 @@
                     <a:bodyPr/>
                     <a:lstStyle/>
                     <a:p>
-                      <a:pPr algn="r" indent="0" marL="0">
+                      <a:pPr marL="0" indent="0" algn="r">
                         <a:buNone/>
                       </a:pPr>
                       <a:r>
@@ -28966,6 +28047,11 @@
                     </a:solidFill>
                   </a:tcPr>
                 </a:tc>
+                <a:extLst>
+                  <a:ext uri="{0D108BD9-81ED-4DB2-BD59-A6C34878D82A}">
+                    <a16:rowId xmlns:a16="http://schemas.microsoft.com/office/drawing/2014/main" val="10005"/>
+                  </a:ext>
+                </a:extLst>
               </a:tr>
               <a:tr h="393192">
                 <a:tc>
@@ -28973,7 +28059,7 @@
                     <a:bodyPr/>
                     <a:lstStyle/>
                     <a:p>
-                      <a:pPr indent="0" marL="0">
+                      <a:pPr marL="0" indent="0">
                         <a:buNone/>
                       </a:pPr>
                       <a:r>
@@ -29041,7 +28127,7 @@
                     <a:bodyPr/>
                     <a:lstStyle/>
                     <a:p>
-                      <a:pPr algn="r" indent="0" marL="0">
+                      <a:pPr marL="0" indent="0" algn="r">
                         <a:buNone/>
                       </a:pPr>
                       <a:r>
@@ -29109,7 +28195,7 @@
                     <a:bodyPr/>
                     <a:lstStyle/>
                     <a:p>
-                      <a:pPr algn="r" indent="0" marL="0">
+                      <a:pPr marL="0" indent="0" algn="r">
                         <a:buNone/>
                       </a:pPr>
                       <a:r>
@@ -29177,7 +28263,7 @@
                     <a:bodyPr/>
                     <a:lstStyle/>
                     <a:p>
-                      <a:pPr algn="r" indent="0" marL="0">
+                      <a:pPr marL="0" indent="0" algn="r">
                         <a:buNone/>
                       </a:pPr>
                       <a:r>
@@ -29240,6 +28326,11 @@
                     </a:solidFill>
                   </a:tcPr>
                 </a:tc>
+                <a:extLst>
+                  <a:ext uri="{0D108BD9-81ED-4DB2-BD59-A6C34878D82A}">
+                    <a16:rowId xmlns:a16="http://schemas.microsoft.com/office/drawing/2014/main" val="10006"/>
+                  </a:ext>
+                </a:extLst>
               </a:tr>
             </a:tbl>
           </a:graphicData>
@@ -29320,7 +28411,7 @@
           <a:bodyPr wrap="square" lIns="0" tIns="0" rIns="0" bIns="0" rtlCol="0" anchor="ctr"/>
           <a:lstStyle/>
           <a:p>
-            <a:pPr indent="0" marL="0">
+            <a:pPr marL="0" indent="0">
               <a:buNone/>
             </a:pPr>
             <a:r>
@@ -29359,7 +28450,7 @@
           <a:bodyPr wrap="square" lIns="0" tIns="0" rIns="0" bIns="0" rtlCol="0" anchor="t"/>
           <a:lstStyle/>
           <a:p>
-            <a:pPr indent="0" marL="0">
+            <a:pPr marL="0" indent="0">
               <a:spcAft>
                 <a:spcPts val="400"/>
               </a:spcAft>
@@ -29379,7 +28470,7 @@
             <a:endParaRPr lang="en-US" sz="1200" dirty="0"/>
           </a:p>
           <a:p>
-            <a:pPr indent="0" marL="0">
+            <a:pPr marL="0" indent="0">
               <a:spcAft>
                 <a:spcPts val="400"/>
               </a:spcAft>
@@ -29475,7 +28566,7 @@
           <a:bodyPr wrap="square" lIns="0" tIns="0" rIns="0" bIns="0" rtlCol="0" anchor="ctr"/>
           <a:lstStyle/>
           <a:p>
-            <a:pPr indent="0" marL="0">
+            <a:pPr marL="0" indent="0">
               <a:buNone/>
             </a:pPr>
             <a:r>
@@ -29601,7 +28692,7 @@
       </p:sp>
       <p:sp>
         <p:nvSpPr>
-          <p:cNvPr id="18" name="Text 15"/>
+          <p:cNvPr id="9" name="Text 15"/>
           <p:cNvSpPr txBox="1"/>
           <p:nvPr/>
         </p:nvSpPr>
@@ -29620,7 +28711,7 @@
           <a:bodyPr wrap="square" lIns="0" tIns="0" rIns="0" bIns="0" rtlCol="0" anchor="ctr"/>
           <a:lstStyle/>
           <a:p>
-            <a:pPr indent="0" marL="0">
+            <a:pPr marL="0" indent="0">
               <a:buNone/>
             </a:pPr>
             <a:r>
@@ -29654,6 +28745,7 @@
         <a:solidFill>
           <a:srgbClr val="F5F7FB"/>
         </a:solidFill>
+        <a:effectLst/>
       </p:bgPr>
     </p:bg>
     <p:spTree>
@@ -29718,11 +28810,11 @@
           <a:bodyPr wrap="square" lIns="0" tIns="0" rIns="0" bIns="0" rtlCol="0" anchor="ctr"/>
           <a:lstStyle/>
           <a:p>
-            <a:pPr algn="ctr" indent="0" marL="0">
+            <a:pPr marL="0" indent="0" algn="ctr">
               <a:buNone/>
             </a:pPr>
             <a:r>
-              <a:rPr lang="en-US" sz="1100" b="1" spc="150" kern="0" dirty="0">
+              <a:rPr lang="en-US" sz="1100" b="1" kern="0" spc="150" dirty="0">
                 <a:solidFill>
                   <a:srgbClr val="FFFFFF"/>
                 </a:solidFill>
@@ -29757,7 +28849,7 @@
           <a:bodyPr wrap="square" lIns="0" tIns="0" rIns="0" bIns="0" rtlCol="0" anchor="ctr"/>
           <a:lstStyle/>
           <a:p>
-            <a:pPr indent="0" marL="0">
+            <a:pPr marL="0" indent="0">
               <a:buNone/>
             </a:pPr>
             <a:r>
@@ -29796,7 +28888,7 @@
           <a:bodyPr wrap="square" lIns="0" tIns="0" rIns="0" bIns="0" rtlCol="0" anchor="ctr"/>
           <a:lstStyle/>
           <a:p>
-            <a:pPr indent="0" marL="0">
+            <a:pPr marL="0" indent="0">
               <a:buNone/>
             </a:pPr>
             <a:r>
@@ -29816,30 +28908,48 @@
       </p:sp>
       <p:graphicFrame>
         <p:nvGraphicFramePr>
-          <p:cNvPr id="3" name="Table 0"/>
+          <p:cNvPr id="6" name="Table 0"/>
           <p:cNvGraphicFramePr>
             <a:graphicFrameLocks noGrp="1"/>
           </p:cNvGraphicFramePr>
           <p:nvPr>
             <p:extLst>
               <p:ext uri="{D42A27DB-BD31-4B8C-83A1-F6EECF244321}">
-                <p14:modId xmlns:p14="http://schemas.microsoft.com/office/powerpoint/2010/main" val="1579011935"/>
+                <p14:modId xmlns:p14="http://schemas.microsoft.com/office/powerpoint/2010/main" val="879603775"/>
               </p:ext>
             </p:extLst>
           </p:nvPr>
         </p:nvGraphicFramePr>
         <p:xfrm>
           <a:off x="502920" y="2103120"/>
-          <a:ext cx="11183112" cy="914400"/>
+          <a:ext cx="11183112" cy="2011680"/>
         </p:xfrm>
         <a:graphic>
           <a:graphicData uri="http://schemas.openxmlformats.org/drawingml/2006/table">
             <a:tbl>
               <a:tblPr/>
               <a:tblGrid>
-                <a:gridCol w="2743200"/>
-                <a:gridCol w="6400800"/>
-                <a:gridCol w="2039112"/>
+                <a:gridCol w="2743200">
+                  <a:extLst>
+                    <a:ext uri="{9D8B030D-6E8A-4147-A177-3AD203B41FA5}">
+                      <a16:colId xmlns:a16="http://schemas.microsoft.com/office/drawing/2014/main" val="20000"/>
+                    </a:ext>
+                  </a:extLst>
+                </a:gridCol>
+                <a:gridCol w="6400800">
+                  <a:extLst>
+                    <a:ext uri="{9D8B030D-6E8A-4147-A177-3AD203B41FA5}">
+                      <a16:colId xmlns:a16="http://schemas.microsoft.com/office/drawing/2014/main" val="20001"/>
+                    </a:ext>
+                  </a:extLst>
+                </a:gridCol>
+                <a:gridCol w="2039112">
+                  <a:extLst>
+                    <a:ext uri="{9D8B030D-6E8A-4147-A177-3AD203B41FA5}">
+                      <a16:colId xmlns:a16="http://schemas.microsoft.com/office/drawing/2014/main" val="20002"/>
+                    </a:ext>
+                  </a:extLst>
+                </a:gridCol>
               </a:tblGrid>
               <a:tr h="502920">
                 <a:tc>
@@ -29847,7 +28957,7 @@
                     <a:bodyPr/>
                     <a:lstStyle/>
                     <a:p>
-                      <a:pPr indent="0" marL="0">
+                      <a:pPr marL="0" indent="0">
                         <a:buNone/>
                       </a:pPr>
                       <a:r>
@@ -29915,7 +29025,7 @@
                     <a:bodyPr/>
                     <a:lstStyle/>
                     <a:p>
-                      <a:pPr indent="0" marL="0">
+                      <a:pPr marL="0" indent="0">
                         <a:buNone/>
                       </a:pPr>
                       <a:r>
@@ -29983,7 +29093,7 @@
                     <a:bodyPr/>
                     <a:lstStyle/>
                     <a:p>
-                      <a:pPr indent="0" marL="0">
+                      <a:pPr marL="0" indent="0">
                         <a:buNone/>
                       </a:pPr>
                       <a:r>
@@ -30046,6 +29156,11 @@
                     </a:solidFill>
                   </a:tcPr>
                 </a:tc>
+                <a:extLst>
+                  <a:ext uri="{0D108BD9-81ED-4DB2-BD59-A6C34878D82A}">
+                    <a16:rowId xmlns:a16="http://schemas.microsoft.com/office/drawing/2014/main" val="10000"/>
+                  </a:ext>
+                </a:extLst>
               </a:tr>
               <a:tr h="502920">
                 <a:tc>
@@ -30053,7 +29168,7 @@
                     <a:bodyPr/>
                     <a:lstStyle/>
                     <a:p>
-                      <a:pPr indent="0" marL="0">
+                      <a:pPr marL="0" indent="0">
                         <a:buNone/>
                       </a:pPr>
                       <a:r>
@@ -30121,7 +29236,7 @@
                     <a:bodyPr/>
                     <a:lstStyle/>
                     <a:p>
-                      <a:pPr indent="0" marL="0">
+                      <a:pPr marL="0" indent="0">
                         <a:buNone/>
                       </a:pPr>
                       <a:r>
@@ -30189,7 +29304,7 @@
                     <a:bodyPr/>
                     <a:lstStyle/>
                     <a:p>
-                      <a:pPr indent="0" marL="0">
+                      <a:pPr marL="0" indent="0">
                         <a:buNone/>
                       </a:pPr>
                       <a:r>
@@ -30252,6 +29367,11 @@
                     </a:solidFill>
                   </a:tcPr>
                 </a:tc>
+                <a:extLst>
+                  <a:ext uri="{0D108BD9-81ED-4DB2-BD59-A6C34878D82A}">
+                    <a16:rowId xmlns:a16="http://schemas.microsoft.com/office/drawing/2014/main" val="10001"/>
+                  </a:ext>
+                </a:extLst>
               </a:tr>
               <a:tr h="502920">
                 <a:tc>
@@ -30259,7 +29379,7 @@
                     <a:bodyPr/>
                     <a:lstStyle/>
                     <a:p>
-                      <a:pPr indent="0" marL="0">
+                      <a:pPr marL="0" indent="0">
                         <a:buNone/>
                       </a:pPr>
                       <a:r>
@@ -30327,7 +29447,7 @@
                     <a:bodyPr/>
                     <a:lstStyle/>
                     <a:p>
-                      <a:pPr indent="0" marL="0">
+                      <a:pPr marL="0" indent="0">
                         <a:buNone/>
                       </a:pPr>
                       <a:r>
@@ -30395,7 +29515,7 @@
                     <a:bodyPr/>
                     <a:lstStyle/>
                     <a:p>
-                      <a:pPr indent="0" marL="0">
+                      <a:pPr marL="0" indent="0">
                         <a:buNone/>
                       </a:pPr>
                       <a:r>
@@ -30458,6 +29578,11 @@
                     </a:solidFill>
                   </a:tcPr>
                 </a:tc>
+                <a:extLst>
+                  <a:ext uri="{0D108BD9-81ED-4DB2-BD59-A6C34878D82A}">
+                    <a16:rowId xmlns:a16="http://schemas.microsoft.com/office/drawing/2014/main" val="10002"/>
+                  </a:ext>
+                </a:extLst>
               </a:tr>
               <a:tr h="502920">
                 <a:tc>
@@ -30465,7 +29590,7 @@
                     <a:bodyPr/>
                     <a:lstStyle/>
                     <a:p>
-                      <a:pPr indent="0" marL="0">
+                      <a:pPr marL="0" indent="0">
                         <a:buNone/>
                       </a:pPr>
                       <a:r>
@@ -30533,7 +29658,7 @@
                     <a:bodyPr/>
                     <a:lstStyle/>
                     <a:p>
-                      <a:pPr indent="0" marL="0">
+                      <a:pPr marL="0" indent="0">
                         <a:buNone/>
                       </a:pPr>
                       <a:r>
@@ -30601,7 +29726,7 @@
                     <a:bodyPr/>
                     <a:lstStyle/>
                     <a:p>
-                      <a:pPr indent="0" marL="0">
+                      <a:pPr marL="0" indent="0">
                         <a:buNone/>
                       </a:pPr>
                       <a:r>
@@ -30664,6 +29789,11 @@
                     </a:solidFill>
                   </a:tcPr>
                 </a:tc>
+                <a:extLst>
+                  <a:ext uri="{0D108BD9-81ED-4DB2-BD59-A6C34878D82A}">
+                    <a16:rowId xmlns:a16="http://schemas.microsoft.com/office/drawing/2014/main" val="10003"/>
+                  </a:ext>
+                </a:extLst>
               </a:tr>
             </a:tbl>
           </a:graphicData>
@@ -30744,7 +29874,7 @@
           <a:bodyPr wrap="square" lIns="0" tIns="0" rIns="0" bIns="0" rtlCol="0" anchor="ctr"/>
           <a:lstStyle/>
           <a:p>
-            <a:pPr indent="0" marL="0">
+            <a:pPr marL="0" indent="0">
               <a:buNone/>
             </a:pPr>
             <a:r>
@@ -30783,7 +29913,7 @@
           <a:bodyPr wrap="square" lIns="0" tIns="0" rIns="0" bIns="0" rtlCol="0" anchor="t"/>
           <a:lstStyle/>
           <a:p>
-            <a:pPr indent="0" marL="0">
+            <a:pPr marL="0" indent="0">
               <a:spcAft>
                 <a:spcPts val="400"/>
               </a:spcAft>
@@ -30800,12 +29930,6 @@
               </a:rPr>
               <a:t>Regresión lineal con 12 variables: </a:t>
             </a:r>
-            <a:pPr indent="0" marL="0">
-              <a:spcAft>
-                <a:spcPts val="400"/>
-              </a:spcAft>
-              <a:buNone/>
-            </a:pPr>
             <a:r>
               <a:rPr lang="en-US" sz="1250" b="1" dirty="0">
                 <a:solidFill>
@@ -30820,7 +29944,7 @@
             <a:endParaRPr lang="en-US" sz="1250" dirty="0"/>
           </a:p>
           <a:p>
-            <a:pPr indent="0" marL="0">
+            <a:pPr marL="0" indent="0">
               <a:spcAft>
                 <a:spcPts val="400"/>
               </a:spcAft>
@@ -30840,7 +29964,7 @@
             <a:endParaRPr lang="en-US" sz="1250" dirty="0"/>
           </a:p>
           <a:p>
-            <a:pPr indent="0" marL="0">
+            <a:pPr marL="0" indent="0">
               <a:spcAft>
                 <a:spcPts val="400"/>
               </a:spcAft>
@@ -30936,7 +30060,7 @@
           <a:bodyPr wrap="square" lIns="0" tIns="0" rIns="0" bIns="0" rtlCol="0" anchor="ctr"/>
           <a:lstStyle/>
           <a:p>
-            <a:pPr indent="0" marL="0">
+            <a:pPr marL="0" indent="0">
               <a:buNone/>
             </a:pPr>
             <a:r>
@@ -30975,7 +30099,7 @@
           <a:bodyPr wrap="square" lIns="0" tIns="0" rIns="0" bIns="0" rtlCol="0" anchor="t"/>
           <a:lstStyle/>
           <a:p>
-            <a:pPr indent="0" marL="0">
+            <a:pPr marL="0" indent="0">
               <a:spcAft>
                 <a:spcPts val="400"/>
               </a:spcAft>
@@ -31012,6 +30136,7 @@
         <a:solidFill>
           <a:srgbClr val="F5F7FB"/>
         </a:solidFill>
+        <a:effectLst/>
       </p:bgPr>
     </p:bg>
     <p:spTree>
@@ -31076,11 +30201,11 @@
           <a:bodyPr wrap="square" lIns="0" tIns="0" rIns="0" bIns="0" rtlCol="0" anchor="ctr"/>
           <a:lstStyle/>
           <a:p>
-            <a:pPr algn="ctr" indent="0" marL="0">
+            <a:pPr marL="0" indent="0" algn="ctr">
               <a:buNone/>
             </a:pPr>
             <a:r>
-              <a:rPr lang="en-US" sz="1100" b="1" spc="150" kern="0" dirty="0">
+              <a:rPr lang="en-US" sz="1100" b="1" kern="0" spc="150" dirty="0">
                 <a:solidFill>
                   <a:srgbClr val="FFFFFF"/>
                 </a:solidFill>
@@ -31115,7 +30240,7 @@
           <a:bodyPr wrap="square" lIns="0" tIns="0" rIns="0" bIns="0" rtlCol="0" anchor="ctr"/>
           <a:lstStyle/>
           <a:p>
-            <a:pPr indent="0" marL="0">
+            <a:pPr marL="0" indent="0">
               <a:buNone/>
             </a:pPr>
             <a:r>
@@ -31154,7 +30279,7 @@
           <a:bodyPr wrap="square" lIns="0" tIns="0" rIns="0" bIns="0" rtlCol="0" anchor="ctr"/>
           <a:lstStyle/>
           <a:p>
-            <a:pPr indent="0" marL="0">
+            <a:pPr marL="0" indent="0">
               <a:buNone/>
             </a:pPr>
             <a:r>
@@ -31174,7 +30299,7 @@
       </p:sp>
       <p:graphicFrame>
         <p:nvGraphicFramePr>
-          <p:cNvPr id="4" name="Table 0"/>
+          <p:cNvPr id="6" name="Table 0"/>
           <p:cNvGraphicFramePr>
             <a:graphicFrameLocks noGrp="1"/>
           </p:cNvGraphicFramePr>
@@ -31188,16 +30313,34 @@
         </p:nvGraphicFramePr>
         <p:xfrm>
           <a:off x="502920" y="2103120"/>
-          <a:ext cx="6766560" cy="914400"/>
+          <a:ext cx="6766560" cy="3364992"/>
         </p:xfrm>
         <a:graphic>
           <a:graphicData uri="http://schemas.openxmlformats.org/drawingml/2006/table">
             <a:tbl>
               <a:tblPr/>
               <a:tblGrid>
-                <a:gridCol w="822960"/>
-                <a:gridCol w="5212080"/>
-                <a:gridCol w="731520"/>
+                <a:gridCol w="822960">
+                  <a:extLst>
+                    <a:ext uri="{9D8B030D-6E8A-4147-A177-3AD203B41FA5}">
+                      <a16:colId xmlns:a16="http://schemas.microsoft.com/office/drawing/2014/main" val="20000"/>
+                    </a:ext>
+                  </a:extLst>
+                </a:gridCol>
+                <a:gridCol w="5212080">
+                  <a:extLst>
+                    <a:ext uri="{9D8B030D-6E8A-4147-A177-3AD203B41FA5}">
+                      <a16:colId xmlns:a16="http://schemas.microsoft.com/office/drawing/2014/main" val="20001"/>
+                    </a:ext>
+                  </a:extLst>
+                </a:gridCol>
+                <a:gridCol w="731520">
+                  <a:extLst>
+                    <a:ext uri="{9D8B030D-6E8A-4147-A177-3AD203B41FA5}">
+                      <a16:colId xmlns:a16="http://schemas.microsoft.com/office/drawing/2014/main" val="20002"/>
+                    </a:ext>
+                  </a:extLst>
+                </a:gridCol>
               </a:tblGrid>
               <a:tr h="420624">
                 <a:tc>
@@ -31205,7 +30348,7 @@
                     <a:bodyPr/>
                     <a:lstStyle/>
                     <a:p>
-                      <a:pPr indent="0" marL="0">
+                      <a:pPr marL="0" indent="0">
                         <a:buNone/>
                       </a:pPr>
                       <a:r>
@@ -31273,7 +30416,7 @@
                     <a:bodyPr/>
                     <a:lstStyle/>
                     <a:p>
-                      <a:pPr indent="0" marL="0">
+                      <a:pPr marL="0" indent="0">
                         <a:buNone/>
                       </a:pPr>
                       <a:r>
@@ -31341,7 +30484,7 @@
                     <a:bodyPr/>
                     <a:lstStyle/>
                     <a:p>
-                      <a:pPr algn="ctr" indent="0" marL="0">
+                      <a:pPr marL="0" indent="0" algn="ctr">
                         <a:buNone/>
                       </a:pPr>
                       <a:r>
@@ -31404,6 +30547,11 @@
                     </a:solidFill>
                   </a:tcPr>
                 </a:tc>
+                <a:extLst>
+                  <a:ext uri="{0D108BD9-81ED-4DB2-BD59-A6C34878D82A}">
+                    <a16:rowId xmlns:a16="http://schemas.microsoft.com/office/drawing/2014/main" val="10000"/>
+                  </a:ext>
+                </a:extLst>
               </a:tr>
               <a:tr h="420624">
                 <a:tc>
@@ -31411,7 +30559,7 @@
                     <a:bodyPr/>
                     <a:lstStyle/>
                     <a:p>
-                      <a:pPr indent="0" marL="0">
+                      <a:pPr marL="0" indent="0">
                         <a:buNone/>
                       </a:pPr>
                       <a:r>
@@ -31479,7 +30627,7 @@
                     <a:bodyPr/>
                     <a:lstStyle/>
                     <a:p>
-                      <a:pPr indent="0" marL="0">
+                      <a:pPr marL="0" indent="0">
                         <a:buNone/>
                       </a:pPr>
                       <a:r>
@@ -31547,7 +30695,7 @@
                     <a:bodyPr/>
                     <a:lstStyle/>
                     <a:p>
-                      <a:pPr algn="ctr" indent="0" marL="0">
+                      <a:pPr marL="0" indent="0" algn="ctr">
                         <a:buNone/>
                       </a:pPr>
                       <a:r>
@@ -31610,6 +30758,11 @@
                     </a:solidFill>
                   </a:tcPr>
                 </a:tc>
+                <a:extLst>
+                  <a:ext uri="{0D108BD9-81ED-4DB2-BD59-A6C34878D82A}">
+                    <a16:rowId xmlns:a16="http://schemas.microsoft.com/office/drawing/2014/main" val="10001"/>
+                  </a:ext>
+                </a:extLst>
               </a:tr>
               <a:tr h="420624">
                 <a:tc>
@@ -31617,7 +30770,7 @@
                     <a:bodyPr/>
                     <a:lstStyle/>
                     <a:p>
-                      <a:pPr indent="0" marL="0">
+                      <a:pPr marL="0" indent="0">
                         <a:buNone/>
                       </a:pPr>
                       <a:r>
@@ -31685,7 +30838,7 @@
                     <a:bodyPr/>
                     <a:lstStyle/>
                     <a:p>
-                      <a:pPr indent="0" marL="0">
+                      <a:pPr marL="0" indent="0">
                         <a:buNone/>
                       </a:pPr>
                       <a:r>
@@ -31753,7 +30906,7 @@
                     <a:bodyPr/>
                     <a:lstStyle/>
                     <a:p>
-                      <a:pPr algn="ctr" indent="0" marL="0">
+                      <a:pPr marL="0" indent="0" algn="ctr">
                         <a:buNone/>
                       </a:pPr>
                       <a:r>
@@ -31816,6 +30969,11 @@
                     </a:solidFill>
                   </a:tcPr>
                 </a:tc>
+                <a:extLst>
+                  <a:ext uri="{0D108BD9-81ED-4DB2-BD59-A6C34878D82A}">
+                    <a16:rowId xmlns:a16="http://schemas.microsoft.com/office/drawing/2014/main" val="10002"/>
+                  </a:ext>
+                </a:extLst>
               </a:tr>
               <a:tr h="420624">
                 <a:tc>
@@ -31823,7 +30981,7 @@
                     <a:bodyPr/>
                     <a:lstStyle/>
                     <a:p>
-                      <a:pPr indent="0" marL="0">
+                      <a:pPr marL="0" indent="0">
                         <a:buNone/>
                       </a:pPr>
                       <a:r>
@@ -31891,7 +31049,7 @@
                     <a:bodyPr/>
                     <a:lstStyle/>
                     <a:p>
-                      <a:pPr indent="0" marL="0">
+                      <a:pPr marL="0" indent="0">
                         <a:buNone/>
                       </a:pPr>
                       <a:r>
@@ -31959,7 +31117,7 @@
                     <a:bodyPr/>
                     <a:lstStyle/>
                     <a:p>
-                      <a:pPr algn="ctr" indent="0" marL="0">
+                      <a:pPr marL="0" indent="0" algn="ctr">
                         <a:buNone/>
                       </a:pPr>
                       <a:r>
@@ -32022,6 +31180,11 @@
                     </a:solidFill>
                   </a:tcPr>
                 </a:tc>
+                <a:extLst>
+                  <a:ext uri="{0D108BD9-81ED-4DB2-BD59-A6C34878D82A}">
+                    <a16:rowId xmlns:a16="http://schemas.microsoft.com/office/drawing/2014/main" val="10003"/>
+                  </a:ext>
+                </a:extLst>
               </a:tr>
               <a:tr h="420624">
                 <a:tc>
@@ -32029,7 +31192,7 @@
                     <a:bodyPr/>
                     <a:lstStyle/>
                     <a:p>
-                      <a:pPr indent="0" marL="0">
+                      <a:pPr marL="0" indent="0">
                         <a:buNone/>
                       </a:pPr>
                       <a:r>
@@ -32097,7 +31260,7 @@
                     <a:bodyPr/>
                     <a:lstStyle/>
                     <a:p>
-                      <a:pPr indent="0" marL="0">
+                      <a:pPr marL="0" indent="0">
                         <a:buNone/>
                       </a:pPr>
                       <a:r>
@@ -32165,7 +31328,7 @@
                     <a:bodyPr/>
                     <a:lstStyle/>
                     <a:p>
-                      <a:pPr algn="ctr" indent="0" marL="0">
+                      <a:pPr marL="0" indent="0" algn="ctr">
                         <a:buNone/>
                       </a:pPr>
                       <a:r>
@@ -32228,6 +31391,11 @@
                     </a:solidFill>
                   </a:tcPr>
                 </a:tc>
+                <a:extLst>
+                  <a:ext uri="{0D108BD9-81ED-4DB2-BD59-A6C34878D82A}">
+                    <a16:rowId xmlns:a16="http://schemas.microsoft.com/office/drawing/2014/main" val="10004"/>
+                  </a:ext>
+                </a:extLst>
               </a:tr>
               <a:tr h="420624">
                 <a:tc>
@@ -32235,7 +31403,7 @@
                     <a:bodyPr/>
                     <a:lstStyle/>
                     <a:p>
-                      <a:pPr indent="0" marL="0">
+                      <a:pPr marL="0" indent="0">
                         <a:buNone/>
                       </a:pPr>
                       <a:r>
@@ -32303,7 +31471,7 @@
                     <a:bodyPr/>
                     <a:lstStyle/>
                     <a:p>
-                      <a:pPr indent="0" marL="0">
+                      <a:pPr marL="0" indent="0">
                         <a:buNone/>
                       </a:pPr>
                       <a:r>
@@ -32371,7 +31539,7 @@
                     <a:bodyPr/>
                     <a:lstStyle/>
                     <a:p>
-                      <a:pPr algn="ctr" indent="0" marL="0">
+                      <a:pPr marL="0" indent="0" algn="ctr">
                         <a:buNone/>
                       </a:pPr>
                       <a:r>
@@ -32434,6 +31602,11 @@
                     </a:solidFill>
                   </a:tcPr>
                 </a:tc>
+                <a:extLst>
+                  <a:ext uri="{0D108BD9-81ED-4DB2-BD59-A6C34878D82A}">
+                    <a16:rowId xmlns:a16="http://schemas.microsoft.com/office/drawing/2014/main" val="10005"/>
+                  </a:ext>
+                </a:extLst>
               </a:tr>
               <a:tr h="420624">
                 <a:tc>
@@ -32441,7 +31614,7 @@
                     <a:bodyPr/>
                     <a:lstStyle/>
                     <a:p>
-                      <a:pPr indent="0" marL="0">
+                      <a:pPr marL="0" indent="0">
                         <a:buNone/>
                       </a:pPr>
                       <a:r>
@@ -32509,7 +31682,7 @@
                     <a:bodyPr/>
                     <a:lstStyle/>
                     <a:p>
-                      <a:pPr indent="0" marL="0">
+                      <a:pPr marL="0" indent="0">
                         <a:buNone/>
                       </a:pPr>
                       <a:r>
@@ -32577,7 +31750,7 @@
                     <a:bodyPr/>
                     <a:lstStyle/>
                     <a:p>
-                      <a:pPr algn="ctr" indent="0" marL="0">
+                      <a:pPr marL="0" indent="0" algn="ctr">
                         <a:buNone/>
                       </a:pPr>
                       <a:r>
@@ -32640,6 +31813,11 @@
                     </a:solidFill>
                   </a:tcPr>
                 </a:tc>
+                <a:extLst>
+                  <a:ext uri="{0D108BD9-81ED-4DB2-BD59-A6C34878D82A}">
+                    <a16:rowId xmlns:a16="http://schemas.microsoft.com/office/drawing/2014/main" val="10006"/>
+                  </a:ext>
+                </a:extLst>
               </a:tr>
               <a:tr h="420624">
                 <a:tc>
@@ -32647,7 +31825,7 @@
                     <a:bodyPr/>
                     <a:lstStyle/>
                     <a:p>
-                      <a:pPr indent="0" marL="0">
+                      <a:pPr marL="0" indent="0">
                         <a:buNone/>
                       </a:pPr>
                       <a:r>
@@ -32715,7 +31893,7 @@
                     <a:bodyPr/>
                     <a:lstStyle/>
                     <a:p>
-                      <a:pPr indent="0" marL="0">
+                      <a:pPr marL="0" indent="0">
                         <a:buNone/>
                       </a:pPr>
                       <a:r>
@@ -32783,7 +31961,7 @@
                     <a:bodyPr/>
                     <a:lstStyle/>
                     <a:p>
-                      <a:pPr algn="ctr" indent="0" marL="0">
+                      <a:pPr marL="0" indent="0" algn="ctr">
                         <a:buNone/>
                       </a:pPr>
                       <a:r>
@@ -32846,6 +32024,11 @@
                     </a:solidFill>
                   </a:tcPr>
                 </a:tc>
+                <a:extLst>
+                  <a:ext uri="{0D108BD9-81ED-4DB2-BD59-A6C34878D82A}">
+                    <a16:rowId xmlns:a16="http://schemas.microsoft.com/office/drawing/2014/main" val="10007"/>
+                  </a:ext>
+                </a:extLst>
               </a:tr>
             </a:tbl>
           </a:graphicData>
@@ -32926,7 +32109,7 @@
           <a:bodyPr wrap="square" lIns="0" tIns="0" rIns="0" bIns="0" rtlCol="0" anchor="ctr"/>
           <a:lstStyle/>
           <a:p>
-            <a:pPr indent="0" marL="0">
+            <a:pPr marL="0" indent="0">
               <a:buNone/>
             </a:pPr>
             <a:r>
@@ -33146,7 +32329,7 @@
           <a:bodyPr wrap="square" lIns="0" tIns="0" rIns="0" bIns="0" rtlCol="0" anchor="ctr"/>
           <a:lstStyle/>
           <a:p>
-            <a:pPr indent="0" marL="0">
+            <a:pPr marL="0" indent="0">
               <a:buNone/>
             </a:pPr>
             <a:r>
@@ -33185,7 +32368,7 @@
           <a:bodyPr wrap="square" lIns="0" tIns="0" rIns="0" bIns="0" rtlCol="0" anchor="t"/>
           <a:lstStyle/>
           <a:p>
-            <a:pPr indent="0" marL="0">
+            <a:pPr marL="0" indent="0">
               <a:spcAft>
                 <a:spcPts val="400"/>
               </a:spcAft>
@@ -33222,6 +32405,7 @@
         <a:solidFill>
           <a:srgbClr val="F5F7FB"/>
         </a:solidFill>
+        <a:effectLst/>
       </p:bgPr>
     </p:bg>
     <p:spTree>
@@ -33286,11 +32470,11 @@
           <a:bodyPr wrap="square" lIns="0" tIns="0" rIns="0" bIns="0" rtlCol="0" anchor="ctr"/>
           <a:lstStyle/>
           <a:p>
-            <a:pPr algn="ctr" indent="0" marL="0">
+            <a:pPr marL="0" indent="0" algn="ctr">
               <a:buNone/>
             </a:pPr>
             <a:r>
-              <a:rPr lang="en-US" sz="1100" b="1" spc="150" kern="0" dirty="0">
+              <a:rPr lang="en-US" sz="1100" b="1" kern="0" spc="150" dirty="0">
                 <a:solidFill>
                   <a:srgbClr val="FFFFFF"/>
                 </a:solidFill>
@@ -33325,7 +32509,7 @@
           <a:bodyPr wrap="square" lIns="0" tIns="0" rIns="0" bIns="0" rtlCol="0" anchor="ctr"/>
           <a:lstStyle/>
           <a:p>
-            <a:pPr indent="0" marL="0">
+            <a:pPr marL="0" indent="0">
               <a:buNone/>
             </a:pPr>
             <a:r>
@@ -33364,7 +32548,7 @@
           <a:bodyPr wrap="square" lIns="0" tIns="0" rIns="0" bIns="0" rtlCol="0" anchor="ctr"/>
           <a:lstStyle/>
           <a:p>
-            <a:pPr indent="0" marL="0">
+            <a:pPr marL="0" indent="0">
               <a:buNone/>
             </a:pPr>
             <a:r>
@@ -33430,7 +32614,7 @@
           <a:bodyPr wrap="square" lIns="0" tIns="0" rIns="0" bIns="0" rtlCol="0" anchor="ctr"/>
           <a:lstStyle/>
           <a:p>
-            <a:pPr algn="ctr" indent="0" marL="0">
+            <a:pPr marL="0" indent="0" algn="ctr">
               <a:buNone/>
             </a:pPr>
             <a:r>
@@ -33444,9 +32628,17 @@
               </a:rPr>
               <a:t>Ridge minimiza   </a:t>
             </a:r>
-            <a:pPr algn="ctr" indent="0" marL="0">
-              <a:buNone/>
-            </a:pPr>
+            <a:r>
+              <a:rPr lang="en-US" sz="3000" b="1" dirty="0" err="1">
+                <a:solidFill>
+                  <a:srgbClr val="FFFFFF"/>
+                </a:solidFill>
+                <a:latin typeface="Calibri" pitchFamily="34" charset="0"/>
+                <a:ea typeface="Calibri" pitchFamily="34" charset="-122"/>
+                <a:cs typeface="Calibri" pitchFamily="34" charset="-120"/>
+              </a:rPr>
+              <a:t>Σ</a:t>
+            </a:r>
             <a:r>
               <a:rPr lang="en-US" sz="3000" b="1" dirty="0">
                 <a:solidFill>
@@ -33456,11 +32648,8 @@
                 <a:ea typeface="Calibri" pitchFamily="34" charset="-122"/>
                 <a:cs typeface="Calibri" pitchFamily="34" charset="-120"/>
               </a:rPr>
-              <a:t>Σ eᵢ²</a:t>
+              <a:t> eᵢ²</a:t>
             </a:r>
-            <a:pPr algn="ctr" indent="0" marL="0">
-              <a:buNone/>
-            </a:pPr>
             <a:r>
               <a:rPr lang="en-US" sz="3000" b="1" dirty="0">
                 <a:solidFill>
@@ -33472,9 +32661,6 @@
               </a:rPr>
               <a:t>   +   </a:t>
             </a:r>
-            <a:pPr algn="ctr" indent="0" marL="0">
-              <a:buNone/>
-            </a:pPr>
             <a:r>
               <a:rPr lang="en-US" sz="3000" b="1" dirty="0">
                 <a:solidFill>
@@ -33484,7 +32670,29 @@
                 <a:ea typeface="Calibri" pitchFamily="34" charset="-122"/>
                 <a:cs typeface="Calibri" pitchFamily="34" charset="-120"/>
               </a:rPr>
-              <a:t>α · Σ bⱼ²</a:t>
+              <a:t>α · </a:t>
+            </a:r>
+            <a:r>
+              <a:rPr lang="en-US" sz="3000" b="1" dirty="0" err="1">
+                <a:solidFill>
+                  <a:srgbClr val="FF6B9A"/>
+                </a:solidFill>
+                <a:latin typeface="Calibri" pitchFamily="34" charset="0"/>
+                <a:ea typeface="Calibri" pitchFamily="34" charset="-122"/>
+                <a:cs typeface="Calibri" pitchFamily="34" charset="-120"/>
+              </a:rPr>
+              <a:t>Σ</a:t>
+            </a:r>
+            <a:r>
+              <a:rPr lang="en-US" sz="3000" b="1" dirty="0">
+                <a:solidFill>
+                  <a:srgbClr val="FF6B9A"/>
+                </a:solidFill>
+                <a:latin typeface="Calibri" pitchFamily="34" charset="0"/>
+                <a:ea typeface="Calibri" pitchFamily="34" charset="-122"/>
+                <a:cs typeface="Calibri" pitchFamily="34" charset="-120"/>
+              </a:rPr>
+              <a:t> bⱼ²</a:t>
             </a:r>
             <a:endParaRPr lang="en-US" sz="3000" dirty="0"/>
           </a:p>
@@ -33492,7 +32700,7 @@
       </p:sp>
       <p:graphicFrame>
         <p:nvGraphicFramePr>
-          <p:cNvPr id="5" name="Table 0"/>
+          <p:cNvPr id="8" name="Table 0"/>
           <p:cNvGraphicFramePr>
             <a:graphicFrameLocks noGrp="1"/>
           </p:cNvGraphicFramePr>
@@ -33506,16 +32714,34 @@
         </p:nvGraphicFramePr>
         <p:xfrm>
           <a:off x="502920" y="3566160"/>
-          <a:ext cx="6766560" cy="914400"/>
+          <a:ext cx="6766560" cy="1755648"/>
         </p:xfrm>
         <a:graphic>
           <a:graphicData uri="http://schemas.openxmlformats.org/drawingml/2006/table">
             <a:tbl>
               <a:tblPr/>
               <a:tblGrid>
-                <a:gridCol w="1188720"/>
-                <a:gridCol w="2377440"/>
-                <a:gridCol w="3200400"/>
+                <a:gridCol w="1188720">
+                  <a:extLst>
+                    <a:ext uri="{9D8B030D-6E8A-4147-A177-3AD203B41FA5}">
+                      <a16:colId xmlns:a16="http://schemas.microsoft.com/office/drawing/2014/main" val="20000"/>
+                    </a:ext>
+                  </a:extLst>
+                </a:gridCol>
+                <a:gridCol w="2377440">
+                  <a:extLst>
+                    <a:ext uri="{9D8B030D-6E8A-4147-A177-3AD203B41FA5}">
+                      <a16:colId xmlns:a16="http://schemas.microsoft.com/office/drawing/2014/main" val="20001"/>
+                    </a:ext>
+                  </a:extLst>
+                </a:gridCol>
+                <a:gridCol w="3200400">
+                  <a:extLst>
+                    <a:ext uri="{9D8B030D-6E8A-4147-A177-3AD203B41FA5}">
+                      <a16:colId xmlns:a16="http://schemas.microsoft.com/office/drawing/2014/main" val="20002"/>
+                    </a:ext>
+                  </a:extLst>
+                </a:gridCol>
               </a:tblGrid>
               <a:tr h="438912">
                 <a:tc>
@@ -33523,7 +32749,7 @@
                     <a:bodyPr/>
                     <a:lstStyle/>
                     <a:p>
-                      <a:pPr indent="0" marL="0">
+                      <a:pPr marL="0" indent="0">
                         <a:buNone/>
                       </a:pPr>
                       <a:r>
@@ -33591,7 +32817,7 @@
                     <a:bodyPr/>
                     <a:lstStyle/>
                     <a:p>
-                      <a:pPr indent="0" marL="0">
+                      <a:pPr marL="0" indent="0">
                         <a:buNone/>
                       </a:pPr>
                       <a:r>
@@ -33659,7 +32885,7 @@
                     <a:bodyPr/>
                     <a:lstStyle/>
                     <a:p>
-                      <a:pPr indent="0" marL="0">
+                      <a:pPr marL="0" indent="0">
                         <a:buNone/>
                       </a:pPr>
                       <a:r>
@@ -33722,6 +32948,11 @@
                     </a:solidFill>
                   </a:tcPr>
                 </a:tc>
+                <a:extLst>
+                  <a:ext uri="{0D108BD9-81ED-4DB2-BD59-A6C34878D82A}">
+                    <a16:rowId xmlns:a16="http://schemas.microsoft.com/office/drawing/2014/main" val="10000"/>
+                  </a:ext>
+                </a:extLst>
               </a:tr>
               <a:tr h="438912">
                 <a:tc>
@@ -33729,7 +32960,7 @@
                     <a:bodyPr/>
                     <a:lstStyle/>
                     <a:p>
-                      <a:pPr indent="0" marL="0">
+                      <a:pPr marL="0" indent="0">
                         <a:buNone/>
                       </a:pPr>
                       <a:r>
@@ -33797,7 +33028,7 @@
                     <a:bodyPr/>
                     <a:lstStyle/>
                     <a:p>
-                      <a:pPr indent="0" marL="0">
+                      <a:pPr marL="0" indent="0">
                         <a:buNone/>
                       </a:pPr>
                       <a:r>
@@ -33865,7 +33096,7 @@
                     <a:bodyPr/>
                     <a:lstStyle/>
                     <a:p>
-                      <a:pPr indent="0" marL="0">
+                      <a:pPr marL="0" indent="0">
                         <a:buNone/>
                       </a:pPr>
                       <a:r>
@@ -33928,6 +33159,11 @@
                     </a:solidFill>
                   </a:tcPr>
                 </a:tc>
+                <a:extLst>
+                  <a:ext uri="{0D108BD9-81ED-4DB2-BD59-A6C34878D82A}">
+                    <a16:rowId xmlns:a16="http://schemas.microsoft.com/office/drawing/2014/main" val="10001"/>
+                  </a:ext>
+                </a:extLst>
               </a:tr>
               <a:tr h="438912">
                 <a:tc>
@@ -33935,7 +33171,7 @@
                     <a:bodyPr/>
                     <a:lstStyle/>
                     <a:p>
-                      <a:pPr indent="0" marL="0">
+                      <a:pPr marL="0" indent="0">
                         <a:buNone/>
                       </a:pPr>
                       <a:r>
@@ -34003,7 +33239,7 @@
                     <a:bodyPr/>
                     <a:lstStyle/>
                     <a:p>
-                      <a:pPr indent="0" marL="0">
+                      <a:pPr marL="0" indent="0">
                         <a:buNone/>
                       </a:pPr>
                       <a:r>
@@ -34071,7 +33307,7 @@
                     <a:bodyPr/>
                     <a:lstStyle/>
                     <a:p>
-                      <a:pPr indent="0" marL="0">
+                      <a:pPr marL="0" indent="0">
                         <a:buNone/>
                       </a:pPr>
                       <a:r>
@@ -34134,6 +33370,11 @@
                     </a:solidFill>
                   </a:tcPr>
                 </a:tc>
+                <a:extLst>
+                  <a:ext uri="{0D108BD9-81ED-4DB2-BD59-A6C34878D82A}">
+                    <a16:rowId xmlns:a16="http://schemas.microsoft.com/office/drawing/2014/main" val="10002"/>
+                  </a:ext>
+                </a:extLst>
               </a:tr>
               <a:tr h="438912">
                 <a:tc>
@@ -34141,7 +33382,7 @@
                     <a:bodyPr/>
                     <a:lstStyle/>
                     <a:p>
-                      <a:pPr indent="0" marL="0">
+                      <a:pPr marL="0" indent="0">
                         <a:buNone/>
                       </a:pPr>
                       <a:r>
@@ -34209,7 +33450,7 @@
                     <a:bodyPr/>
                     <a:lstStyle/>
                     <a:p>
-                      <a:pPr indent="0" marL="0">
+                      <a:pPr marL="0" indent="0">
                         <a:buNone/>
                       </a:pPr>
                       <a:r>
@@ -34277,7 +33518,7 @@
                     <a:bodyPr/>
                     <a:lstStyle/>
                     <a:p>
-                      <a:pPr indent="0" marL="0">
+                      <a:pPr marL="0" indent="0">
                         <a:buNone/>
                       </a:pPr>
                       <a:r>
@@ -34340,6 +33581,11 @@
                     </a:solidFill>
                   </a:tcPr>
                 </a:tc>
+                <a:extLst>
+                  <a:ext uri="{0D108BD9-81ED-4DB2-BD59-A6C34878D82A}">
+                    <a16:rowId xmlns:a16="http://schemas.microsoft.com/office/drawing/2014/main" val="10003"/>
+                  </a:ext>
+                </a:extLst>
               </a:tr>
             </a:tbl>
           </a:graphicData>
@@ -34393,7 +33639,7 @@
           <a:bodyPr wrap="square" lIns="0" tIns="0" rIns="0" bIns="0" rtlCol="0" anchor="ctr"/>
           <a:lstStyle/>
           <a:p>
-            <a:pPr indent="0" marL="0">
+            <a:pPr marL="0" indent="0">
               <a:buNone/>
             </a:pPr>
             <a:r>
@@ -34432,7 +33678,7 @@
           <a:bodyPr wrap="square" lIns="0" tIns="0" rIns="0" bIns="0" rtlCol="0" anchor="ctr"/>
           <a:lstStyle/>
           <a:p>
-            <a:pPr indent="0" marL="0">
+            <a:pPr marL="0" indent="0">
               <a:spcAft>
                 <a:spcPts val="400"/>
               </a:spcAft>
@@ -34501,7 +33747,7 @@
           <a:bodyPr wrap="square" lIns="0" tIns="0" rIns="0" bIns="0" rtlCol="0" anchor="ctr"/>
           <a:lstStyle/>
           <a:p>
-            <a:pPr indent="0" marL="0">
+            <a:pPr marL="0" indent="0">
               <a:buNone/>
             </a:pPr>
             <a:r>
@@ -34540,7 +33786,7 @@
           <a:bodyPr wrap="square" lIns="0" tIns="0" rIns="0" bIns="0" rtlCol="0" anchor="ctr"/>
           <a:lstStyle/>
           <a:p>
-            <a:pPr indent="0" marL="0">
+            <a:pPr marL="0" indent="0">
               <a:spcAft>
                 <a:spcPts val="400"/>
               </a:spcAft>
@@ -34609,7 +33855,7 @@
           <a:bodyPr wrap="square" lIns="0" tIns="0" rIns="0" bIns="0" rtlCol="0" anchor="ctr"/>
           <a:lstStyle/>
           <a:p>
-            <a:pPr indent="0" marL="0">
+            <a:pPr marL="0" indent="0">
               <a:buNone/>
             </a:pPr>
             <a:r>
@@ -34648,7 +33894,7 @@
           <a:bodyPr wrap="square" lIns="0" tIns="0" rIns="0" bIns="0" rtlCol="0" anchor="ctr"/>
           <a:lstStyle/>
           <a:p>
-            <a:pPr indent="0" marL="0">
+            <a:pPr marL="0" indent="0">
               <a:spcAft>
                 <a:spcPts val="400"/>
               </a:spcAft>
@@ -34690,7 +33936,7 @@
           <a:bodyPr wrap="square" lIns="0" tIns="0" rIns="0" bIns="0" rtlCol="0" anchor="t"/>
           <a:lstStyle/>
           <a:p>
-            <a:pPr indent="0" marL="0">
+            <a:pPr marL="0" indent="0">
               <a:spcAft>
                 <a:spcPts val="400"/>
               </a:spcAft>
@@ -34727,6 +33973,7 @@
         <a:solidFill>
           <a:srgbClr val="F5F7FB"/>
         </a:solidFill>
+        <a:effectLst/>
       </p:bgPr>
     </p:bg>
     <p:spTree>
@@ -34791,11 +34038,11 @@
           <a:bodyPr wrap="square" lIns="0" tIns="0" rIns="0" bIns="0" rtlCol="0" anchor="ctr"/>
           <a:lstStyle/>
           <a:p>
-            <a:pPr algn="ctr" indent="0" marL="0">
+            <a:pPr marL="0" indent="0" algn="ctr">
               <a:buNone/>
             </a:pPr>
             <a:r>
-              <a:rPr lang="en-US" sz="1100" b="1" spc="150" kern="0" dirty="0">
+              <a:rPr lang="en-US" sz="1100" b="1" kern="0" spc="150" dirty="0">
                 <a:solidFill>
                   <a:srgbClr val="FFFFFF"/>
                 </a:solidFill>
@@ -34830,7 +34077,7 @@
           <a:bodyPr wrap="square" lIns="0" tIns="0" rIns="0" bIns="0" rtlCol="0" anchor="ctr"/>
           <a:lstStyle/>
           <a:p>
-            <a:pPr indent="0" marL="0">
+            <a:pPr marL="0" indent="0">
               <a:buNone/>
             </a:pPr>
             <a:r>
@@ -34869,7 +34116,7 @@
           <a:bodyPr wrap="square" lIns="0" tIns="0" rIns="0" bIns="0" rtlCol="0" anchor="ctr"/>
           <a:lstStyle/>
           <a:p>
-            <a:pPr indent="0" marL="0">
+            <a:pPr marL="0" indent="0">
               <a:buNone/>
             </a:pPr>
             <a:r>
@@ -34935,7 +34182,7 @@
           <a:bodyPr wrap="square" lIns="0" tIns="0" rIns="0" bIns="0" rtlCol="0" anchor="ctr"/>
           <a:lstStyle/>
           <a:p>
-            <a:pPr algn="ctr" indent="0" marL="0">
+            <a:pPr marL="0" indent="0" algn="ctr">
               <a:buNone/>
             </a:pPr>
             <a:r>
@@ -34974,7 +34221,7 @@
           <a:bodyPr wrap="square" lIns="0" tIns="0" rIns="0" bIns="0" rtlCol="0" anchor="t"/>
           <a:lstStyle/>
           <a:p>
-            <a:pPr algn="ctr" indent="0" marL="0">
+            <a:pPr marL="0" indent="0" algn="ctr">
               <a:spcAft>
                 <a:spcPts val="400"/>
               </a:spcAft>
@@ -35070,7 +34317,7 @@
           <a:bodyPr wrap="square" lIns="0" tIns="0" rIns="0" bIns="0" rtlCol="0" anchor="ctr"/>
           <a:lstStyle/>
           <a:p>
-            <a:pPr indent="0" marL="0">
+            <a:pPr marL="0" indent="0">
               <a:buNone/>
             </a:pPr>
             <a:r>
@@ -35109,7 +34356,7 @@
           <a:bodyPr wrap="square" lIns="0" tIns="0" rIns="0" bIns="0" rtlCol="0" anchor="ctr"/>
           <a:lstStyle/>
           <a:p>
-            <a:pPr indent="0" marL="0">
+            <a:pPr marL="0" indent="0">
               <a:buNone/>
             </a:pPr>
             <a:r>
@@ -35148,7 +34395,7 @@
           <a:bodyPr wrap="square" lIns="0" tIns="0" rIns="0" bIns="0" rtlCol="0" anchor="ctr"/>
           <a:lstStyle/>
           <a:p>
-            <a:pPr indent="0" marL="0">
+            <a:pPr marL="0" indent="0">
               <a:buNone/>
             </a:pPr>
             <a:r>
@@ -35212,7 +34459,7 @@
           <a:bodyPr wrap="square" lIns="0" tIns="0" rIns="0" bIns="0" rtlCol="0" anchor="ctr"/>
           <a:lstStyle/>
           <a:p>
-            <a:pPr indent="0" marL="0">
+            <a:pPr marL="0" indent="0">
               <a:buNone/>
             </a:pPr>
             <a:r>
@@ -35251,7 +34498,7 @@
           <a:bodyPr wrap="square" lIns="0" tIns="0" rIns="0" bIns="0" rtlCol="0" anchor="ctr"/>
           <a:lstStyle/>
           <a:p>
-            <a:pPr indent="0" marL="0">
+            <a:pPr marL="0" indent="0">
               <a:buNone/>
             </a:pPr>
             <a:r>
@@ -35290,7 +34537,7 @@
           <a:bodyPr wrap="square" lIns="0" tIns="0" rIns="0" bIns="0" rtlCol="0" anchor="ctr"/>
           <a:lstStyle/>
           <a:p>
-            <a:pPr indent="0" marL="0">
+            <a:pPr marL="0" indent="0">
               <a:buNone/>
             </a:pPr>
             <a:r>
@@ -35354,7 +34601,7 @@
           <a:bodyPr wrap="square" lIns="0" tIns="0" rIns="0" bIns="0" rtlCol="0" anchor="ctr"/>
           <a:lstStyle/>
           <a:p>
-            <a:pPr indent="0" marL="0">
+            <a:pPr marL="0" indent="0">
               <a:buNone/>
             </a:pPr>
             <a:r>
@@ -35393,7 +34640,7 @@
           <a:bodyPr wrap="square" lIns="0" tIns="0" rIns="0" bIns="0" rtlCol="0" anchor="ctr"/>
           <a:lstStyle/>
           <a:p>
-            <a:pPr indent="0" marL="0">
+            <a:pPr marL="0" indent="0">
               <a:buNone/>
             </a:pPr>
             <a:r>
@@ -35432,7 +34679,7 @@
           <a:bodyPr wrap="square" lIns="0" tIns="0" rIns="0" bIns="0" rtlCol="0" anchor="ctr"/>
           <a:lstStyle/>
           <a:p>
-            <a:pPr indent="0" marL="0">
+            <a:pPr marL="0" indent="0">
               <a:buNone/>
             </a:pPr>
             <a:r>
@@ -35496,7 +34743,7 @@
           <a:bodyPr wrap="square" lIns="0" tIns="0" rIns="0" bIns="0" rtlCol="0" anchor="ctr"/>
           <a:lstStyle/>
           <a:p>
-            <a:pPr indent="0" marL="0">
+            <a:pPr marL="0" indent="0">
               <a:buNone/>
             </a:pPr>
             <a:r>
@@ -35535,7 +34782,7 @@
           <a:bodyPr wrap="square" lIns="0" tIns="0" rIns="0" bIns="0" rtlCol="0" anchor="ctr"/>
           <a:lstStyle/>
           <a:p>
-            <a:pPr indent="0" marL="0">
+            <a:pPr marL="0" indent="0">
               <a:buNone/>
             </a:pPr>
             <a:r>
@@ -35574,7 +34821,7 @@
           <a:bodyPr wrap="square" lIns="0" tIns="0" rIns="0" bIns="0" rtlCol="0" anchor="ctr"/>
           <a:lstStyle/>
           <a:p>
-            <a:pPr indent="0" marL="0">
+            <a:pPr marL="0" indent="0">
               <a:buNone/>
             </a:pPr>
             <a:r>
@@ -35638,7 +34885,7 @@
           <a:bodyPr wrap="square" lIns="0" tIns="0" rIns="0" bIns="0" rtlCol="0" anchor="ctr"/>
           <a:lstStyle/>
           <a:p>
-            <a:pPr indent="0" marL="0">
+            <a:pPr marL="0" indent="0">
               <a:buNone/>
             </a:pPr>
             <a:r>
@@ -35677,7 +34924,7 @@
           <a:bodyPr wrap="square" lIns="0" tIns="0" rIns="0" bIns="0" rtlCol="0" anchor="t"/>
           <a:lstStyle/>
           <a:p>
-            <a:pPr indent="0" marL="0">
+            <a:pPr marL="0" indent="0">
               <a:spcAft>
                 <a:spcPts val="400"/>
               </a:spcAft>
@@ -35773,7 +35020,7 @@
           <a:bodyPr wrap="square" lIns="0" tIns="0" rIns="0" bIns="0" rtlCol="0" anchor="ctr"/>
           <a:lstStyle/>
           <a:p>
-            <a:pPr indent="0" marL="0">
+            <a:pPr marL="0" indent="0">
               <a:buNone/>
             </a:pPr>
             <a:r>
@@ -35812,7 +35059,7 @@
           <a:bodyPr wrap="square" lIns="0" tIns="0" rIns="0" bIns="0" rtlCol="0" anchor="t"/>
           <a:lstStyle/>
           <a:p>
-            <a:pPr indent="0" marL="0">
+            <a:pPr marL="0" indent="0">
               <a:spcAft>
                 <a:spcPts val="400"/>
               </a:spcAft>
@@ -35849,6 +35096,7 @@
         <a:solidFill>
           <a:srgbClr val="F5F7FB"/>
         </a:solidFill>
+        <a:effectLst/>
       </p:bgPr>
     </p:bg>
     <p:spTree>
@@ -35913,11 +35161,11 @@
           <a:bodyPr wrap="square" lIns="0" tIns="0" rIns="0" bIns="0" rtlCol="0" anchor="ctr"/>
           <a:lstStyle/>
           <a:p>
-            <a:pPr algn="ctr" indent="0" marL="0">
+            <a:pPr marL="0" indent="0" algn="ctr">
               <a:buNone/>
             </a:pPr>
             <a:r>
-              <a:rPr lang="en-US" sz="1100" b="1" spc="150" kern="0" dirty="0">
+              <a:rPr lang="en-US" sz="1100" b="1" kern="0" spc="150" dirty="0">
                 <a:solidFill>
                   <a:srgbClr val="FFFFFF"/>
                 </a:solidFill>
@@ -35952,7 +35200,7 @@
           <a:bodyPr wrap="square" lIns="0" tIns="0" rIns="0" bIns="0" rtlCol="0" anchor="ctr"/>
           <a:lstStyle/>
           <a:p>
-            <a:pPr indent="0" marL="0">
+            <a:pPr marL="0" indent="0">
               <a:buNone/>
             </a:pPr>
             <a:r>
@@ -35991,7 +35239,7 @@
           <a:bodyPr wrap="square" lIns="0" tIns="0" rIns="0" bIns="0" rtlCol="0" anchor="ctr"/>
           <a:lstStyle/>
           <a:p>
-            <a:pPr indent="0" marL="0">
+            <a:pPr marL="0" indent="0">
               <a:buNone/>
             </a:pPr>
             <a:r>
@@ -36025,17 +35273,41 @@
         </p:nvGraphicFramePr>
         <p:xfrm>
           <a:off x="502920" y="2103120"/>
-          <a:ext cx="6949440" cy="914400"/>
+          <a:ext cx="6949440" cy="1426464"/>
         </p:xfrm>
         <a:graphic>
           <a:graphicData uri="http://schemas.openxmlformats.org/drawingml/2006/table">
             <a:tbl>
               <a:tblPr/>
               <a:tblGrid>
-                <a:gridCol w="1737360"/>
-                <a:gridCol w="1828800"/>
-                <a:gridCol w="1828800"/>
-                <a:gridCol w="1554480"/>
+                <a:gridCol w="1737360">
+                  <a:extLst>
+                    <a:ext uri="{9D8B030D-6E8A-4147-A177-3AD203B41FA5}">
+                      <a16:colId xmlns:a16="http://schemas.microsoft.com/office/drawing/2014/main" val="20000"/>
+                    </a:ext>
+                  </a:extLst>
+                </a:gridCol>
+                <a:gridCol w="1828800">
+                  <a:extLst>
+                    <a:ext uri="{9D8B030D-6E8A-4147-A177-3AD203B41FA5}">
+                      <a16:colId xmlns:a16="http://schemas.microsoft.com/office/drawing/2014/main" val="20001"/>
+                    </a:ext>
+                  </a:extLst>
+                </a:gridCol>
+                <a:gridCol w="1828800">
+                  <a:extLst>
+                    <a:ext uri="{9D8B030D-6E8A-4147-A177-3AD203B41FA5}">
+                      <a16:colId xmlns:a16="http://schemas.microsoft.com/office/drawing/2014/main" val="20002"/>
+                    </a:ext>
+                  </a:extLst>
+                </a:gridCol>
+                <a:gridCol w="1554480">
+                  <a:extLst>
+                    <a:ext uri="{9D8B030D-6E8A-4147-A177-3AD203B41FA5}">
+                      <a16:colId xmlns:a16="http://schemas.microsoft.com/office/drawing/2014/main" val="20003"/>
+                    </a:ext>
+                  </a:extLst>
+                </a:gridCol>
               </a:tblGrid>
               <a:tr h="475488">
                 <a:tc>
@@ -36043,7 +35315,7 @@
                     <a:bodyPr/>
                     <a:lstStyle/>
                     <a:p>
-                      <a:pPr indent="0" marL="0">
+                      <a:pPr marL="0" indent="0">
                         <a:buNone/>
                       </a:pPr>
                       <a:r>
@@ -36111,7 +35383,7 @@
                     <a:bodyPr/>
                     <a:lstStyle/>
                     <a:p>
-                      <a:pPr indent="0" marL="0">
+                      <a:pPr marL="0" indent="0">
                         <a:buNone/>
                       </a:pPr>
                       <a:r>
@@ -36179,7 +35451,7 @@
                     <a:bodyPr/>
                     <a:lstStyle/>
                     <a:p>
-                      <a:pPr algn="ctr" indent="0" marL="0">
+                      <a:pPr marL="0" indent="0" algn="ctr">
                         <a:buNone/>
                       </a:pPr>
                       <a:r>
@@ -36247,7 +35519,7 @@
                     <a:bodyPr/>
                     <a:lstStyle/>
                     <a:p>
-                      <a:pPr algn="ctr" indent="0" marL="0">
+                      <a:pPr marL="0" indent="0" algn="ctr">
                         <a:buNone/>
                       </a:pPr>
                       <a:r>
@@ -36310,6 +35582,11 @@
                     </a:solidFill>
                   </a:tcPr>
                 </a:tc>
+                <a:extLst>
+                  <a:ext uri="{0D108BD9-81ED-4DB2-BD59-A6C34878D82A}">
+                    <a16:rowId xmlns:a16="http://schemas.microsoft.com/office/drawing/2014/main" val="10000"/>
+                  </a:ext>
+                </a:extLst>
               </a:tr>
               <a:tr h="475488">
                 <a:tc>
@@ -36317,7 +35594,7 @@
                     <a:bodyPr/>
                     <a:lstStyle/>
                     <a:p>
-                      <a:pPr indent="0" marL="0">
+                      <a:pPr marL="0" indent="0">
                         <a:buNone/>
                       </a:pPr>
                       <a:r>
@@ -36385,7 +35662,7 @@
                     <a:bodyPr/>
                     <a:lstStyle/>
                     <a:p>
-                      <a:pPr indent="0" marL="0">
+                      <a:pPr marL="0" indent="0">
                         <a:buNone/>
                       </a:pPr>
                       <a:r>
@@ -36453,7 +35730,7 @@
                     <a:bodyPr/>
                     <a:lstStyle/>
                     <a:p>
-                      <a:pPr algn="ctr" indent="0" marL="0">
+                      <a:pPr marL="0" indent="0" algn="ctr">
                         <a:buNone/>
                       </a:pPr>
                       <a:r>
@@ -36521,7 +35798,7 @@
                     <a:bodyPr/>
                     <a:lstStyle/>
                     <a:p>
-                      <a:pPr algn="ctr" indent="0" marL="0">
+                      <a:pPr marL="0" indent="0" algn="ctr">
                         <a:buNone/>
                       </a:pPr>
                       <a:r>
@@ -36584,6 +35861,11 @@
                     </a:solidFill>
                   </a:tcPr>
                 </a:tc>
+                <a:extLst>
+                  <a:ext uri="{0D108BD9-81ED-4DB2-BD59-A6C34878D82A}">
+                    <a16:rowId xmlns:a16="http://schemas.microsoft.com/office/drawing/2014/main" val="10001"/>
+                  </a:ext>
+                </a:extLst>
               </a:tr>
               <a:tr h="475488">
                 <a:tc>
@@ -36591,7 +35873,7 @@
                     <a:bodyPr/>
                     <a:lstStyle/>
                     <a:p>
-                      <a:pPr indent="0" marL="0">
+                      <a:pPr marL="0" indent="0">
                         <a:buNone/>
                       </a:pPr>
                       <a:r>
@@ -36659,7 +35941,7 @@
                     <a:bodyPr/>
                     <a:lstStyle/>
                     <a:p>
-                      <a:pPr indent="0" marL="0">
+                      <a:pPr marL="0" indent="0">
                         <a:buNone/>
                       </a:pPr>
                       <a:r>
@@ -36727,7 +36009,7 @@
                     <a:bodyPr/>
                     <a:lstStyle/>
                     <a:p>
-                      <a:pPr algn="ctr" indent="0" marL="0">
+                      <a:pPr marL="0" indent="0" algn="ctr">
                         <a:buNone/>
                       </a:pPr>
                       <a:r>
@@ -36795,7 +36077,7 @@
                     <a:bodyPr/>
                     <a:lstStyle/>
                     <a:p>
-                      <a:pPr algn="ctr" indent="0" marL="0">
+                      <a:pPr marL="0" indent="0" algn="ctr">
                         <a:buNone/>
                       </a:pPr>
                       <a:r>
@@ -36858,6 +36140,11 @@
                     </a:solidFill>
                   </a:tcPr>
                 </a:tc>
+                <a:extLst>
+                  <a:ext uri="{0D108BD9-81ED-4DB2-BD59-A6C34878D82A}">
+                    <a16:rowId xmlns:a16="http://schemas.microsoft.com/office/drawing/2014/main" val="10002"/>
+                  </a:ext>
+                </a:extLst>
               </a:tr>
             </a:tbl>
           </a:graphicData>
@@ -36865,7 +36152,7 @@
       </p:graphicFrame>
       <p:sp>
         <p:nvSpPr>
-          <p:cNvPr id="7" name="Shape 4"/>
+          <p:cNvPr id="6" name="Shape 4"/>
           <p:cNvSpPr/>
           <p:nvPr/>
         </p:nvSpPr>
@@ -36938,7 +36225,7 @@
           <a:bodyPr wrap="square" lIns="0" tIns="0" rIns="0" bIns="0" rtlCol="0" anchor="ctr"/>
           <a:lstStyle/>
           <a:p>
-            <a:pPr indent="0" marL="0">
+            <a:pPr marL="0" indent="0">
               <a:buNone/>
             </a:pPr>
             <a:r>
@@ -36977,7 +36264,7 @@
           <a:bodyPr wrap="square" lIns="0" tIns="0" rIns="0" bIns="0" rtlCol="0" anchor="t"/>
           <a:lstStyle/>
           <a:p>
-            <a:pPr indent="0" marL="0">
+            <a:pPr marL="0" indent="0">
               <a:spcAft>
                 <a:spcPts val="400"/>
               </a:spcAft>
@@ -37046,7 +36333,7 @@
           <a:bodyPr wrap="square" lIns="0" tIns="0" rIns="0" bIns="0" rtlCol="0" anchor="t"/>
           <a:lstStyle/>
           <a:p>
-            <a:pPr indent="0" marL="0">
+            <a:pPr marL="0" indent="0">
               <a:buNone/>
             </a:pPr>
             <a:r>
@@ -37063,7 +36350,7 @@
             <a:endParaRPr lang="en-US" sz="1250" dirty="0"/>
           </a:p>
           <a:p>
-            <a:pPr indent="0" marL="0">
+            <a:pPr marL="0" indent="0">
               <a:buNone/>
             </a:pPr>
             <a:r>
@@ -37080,7 +36367,7 @@
             <a:endParaRPr lang="en-US" sz="1250" dirty="0"/>
           </a:p>
           <a:p>
-            <a:pPr indent="0" marL="0">
+            <a:pPr marL="0" indent="0">
               <a:buNone/>
             </a:pPr>
             <a:r>
@@ -37097,7 +36384,7 @@
             <a:endParaRPr lang="en-US" sz="1250" dirty="0"/>
           </a:p>
           <a:p>
-            <a:pPr indent="0" marL="0">
+            <a:pPr marL="0" indent="0">
               <a:buNone/>
             </a:pPr>
             <a:r>
@@ -37114,7 +36401,7 @@
             <a:endParaRPr lang="en-US" sz="1250" dirty="0"/>
           </a:p>
           <a:p>
-            <a:pPr indent="0" marL="0">
+            <a:pPr marL="0" indent="0">
               <a:buNone/>
             </a:pPr>
             <a:r>
@@ -37131,7 +36418,7 @@
             <a:endParaRPr lang="en-US" sz="1250" dirty="0"/>
           </a:p>
           <a:p>
-            <a:pPr indent="0" marL="0">
+            <a:pPr marL="0" indent="0">
               <a:buNone/>
             </a:pPr>
             <a:r>
@@ -37148,7 +36435,7 @@
             <a:endParaRPr lang="en-US" sz="1250" dirty="0"/>
           </a:p>
           <a:p>
-            <a:pPr indent="0" marL="0">
+            <a:pPr marL="0" indent="0">
               <a:buNone/>
             </a:pPr>
             <a:r>
@@ -37165,7 +36452,7 @@
             <a:endParaRPr lang="en-US" sz="1250" dirty="0"/>
           </a:p>
           <a:p>
-            <a:pPr indent="0" marL="0">
+            <a:pPr marL="0" indent="0">
               <a:buNone/>
             </a:pPr>
             <a:r>
@@ -37182,7 +36469,7 @@
             <a:endParaRPr lang="en-US" sz="1250" dirty="0"/>
           </a:p>
           <a:p>
-            <a:pPr indent="0" marL="0">
+            <a:pPr marL="0" indent="0">
               <a:buNone/>
             </a:pPr>
             <a:r>
@@ -37199,7 +36486,7 @@
             <a:endParaRPr lang="en-US" sz="1250" dirty="0"/>
           </a:p>
           <a:p>
-            <a:pPr indent="0" marL="0">
+            <a:pPr marL="0" indent="0">
               <a:buNone/>
             </a:pPr>
             <a:r>
@@ -37233,6 +36520,7 @@
         <a:solidFill>
           <a:srgbClr val="F5F7FB"/>
         </a:solidFill>
+        <a:effectLst/>
       </p:bgPr>
     </p:bg>
     <p:spTree>
@@ -37297,11 +36585,11 @@
           <a:bodyPr wrap="square" lIns="0" tIns="0" rIns="0" bIns="0" rtlCol="0" anchor="ctr"/>
           <a:lstStyle/>
           <a:p>
-            <a:pPr algn="ctr" indent="0" marL="0">
+            <a:pPr marL="0" indent="0" algn="ctr">
               <a:buNone/>
             </a:pPr>
             <a:r>
-              <a:rPr lang="en-US" sz="1100" b="1" spc="150" kern="0" dirty="0">
+              <a:rPr lang="en-US" sz="1100" b="1" kern="0" spc="150" dirty="0">
                 <a:solidFill>
                   <a:srgbClr val="FFFFFF"/>
                 </a:solidFill>
@@ -37336,7 +36624,7 @@
           <a:bodyPr wrap="square" lIns="0" tIns="0" rIns="0" bIns="0" rtlCol="0" anchor="ctr"/>
           <a:lstStyle/>
           <a:p>
-            <a:pPr indent="0" marL="0">
+            <a:pPr marL="0" indent="0">
               <a:buNone/>
             </a:pPr>
             <a:r>
@@ -37375,7 +36663,7 @@
           <a:bodyPr wrap="square" lIns="0" tIns="0" rIns="0" bIns="0" rtlCol="0" anchor="ctr"/>
           <a:lstStyle/>
           <a:p>
-            <a:pPr indent="0" marL="0">
+            <a:pPr marL="0" indent="0">
               <a:buNone/>
             </a:pPr>
             <a:r>
@@ -37395,7 +36683,7 @@
       </p:sp>
       <p:graphicFrame>
         <p:nvGraphicFramePr>
-          <p:cNvPr id="6" name="Chart 0" descr=""/>
+          <p:cNvPr id="6" name="Chart 0"/>
           <p:cNvGraphicFramePr/>
           <p:nvPr/>
         </p:nvGraphicFramePr>
@@ -37403,9 +36691,9 @@
           <a:off x="502920" y="2057400"/>
           <a:ext cx="5852160" cy="3749040"/>
         </p:xfrm>
-        <a:graphic xmlns:a="http://schemas.openxmlformats.org/drawingml/2006/main">
+        <a:graphic>
           <a:graphicData uri="http://schemas.openxmlformats.org/drawingml/2006/chart">
-            <c:chart xmlns:c="http://schemas.openxmlformats.org/drawingml/2006/chart" r:id="rId1"/>
+            <c:chart xmlns:c="http://schemas.openxmlformats.org/drawingml/2006/chart" xmlns:r="http://schemas.openxmlformats.org/officeDocument/2006/relationships" r:id="rId3"/>
           </a:graphicData>
         </a:graphic>
       </p:graphicFrame>
@@ -37430,7 +36718,7 @@
           <a:bodyPr wrap="square" lIns="0" tIns="0" rIns="0" bIns="0" rtlCol="0" anchor="t"/>
           <a:lstStyle/>
           <a:p>
-            <a:pPr indent="0" marL="0">
+            <a:pPr marL="0" indent="0">
               <a:spcAft>
                 <a:spcPts val="400"/>
               </a:spcAft>
@@ -37467,16 +36755,34 @@
         </p:nvGraphicFramePr>
         <p:xfrm>
           <a:off x="6629400" y="2103120"/>
-          <a:ext cx="5056632" cy="914400"/>
+          <a:ext cx="5056632" cy="2194560"/>
         </p:xfrm>
         <a:graphic>
           <a:graphicData uri="http://schemas.openxmlformats.org/drawingml/2006/table">
             <a:tbl>
               <a:tblPr/>
               <a:tblGrid>
-                <a:gridCol w="1280160"/>
-                <a:gridCol w="1883664"/>
-                <a:gridCol w="1892808"/>
+                <a:gridCol w="1280160">
+                  <a:extLst>
+                    <a:ext uri="{9D8B030D-6E8A-4147-A177-3AD203B41FA5}">
+                      <a16:colId xmlns:a16="http://schemas.microsoft.com/office/drawing/2014/main" val="20000"/>
+                    </a:ext>
+                  </a:extLst>
+                </a:gridCol>
+                <a:gridCol w="1883664">
+                  <a:extLst>
+                    <a:ext uri="{9D8B030D-6E8A-4147-A177-3AD203B41FA5}">
+                      <a16:colId xmlns:a16="http://schemas.microsoft.com/office/drawing/2014/main" val="20001"/>
+                    </a:ext>
+                  </a:extLst>
+                </a:gridCol>
+                <a:gridCol w="1892808">
+                  <a:extLst>
+                    <a:ext uri="{9D8B030D-6E8A-4147-A177-3AD203B41FA5}">
+                      <a16:colId xmlns:a16="http://schemas.microsoft.com/office/drawing/2014/main" val="20002"/>
+                    </a:ext>
+                  </a:extLst>
+                </a:gridCol>
               </a:tblGrid>
               <a:tr h="365760">
                 <a:tc>
@@ -37484,7 +36790,7 @@
                     <a:bodyPr/>
                     <a:lstStyle/>
                     <a:p>
-                      <a:pPr algn="ctr" indent="0" marL="0">
+                      <a:pPr marL="0" indent="0" algn="ctr">
                         <a:buNone/>
                       </a:pPr>
                       <a:r>
@@ -37552,7 +36858,7 @@
                     <a:bodyPr/>
                     <a:lstStyle/>
                     <a:p>
-                      <a:pPr algn="ctr" indent="0" marL="0">
+                      <a:pPr marL="0" indent="0" algn="ctr">
                         <a:buNone/>
                       </a:pPr>
                       <a:r>
@@ -37620,7 +36926,7 @@
                     <a:bodyPr/>
                     <a:lstStyle/>
                     <a:p>
-                      <a:pPr algn="ctr" indent="0" marL="0">
+                      <a:pPr marL="0" indent="0" algn="ctr">
                         <a:buNone/>
                       </a:pPr>
                       <a:r>
@@ -37683,6 +36989,11 @@
                     </a:solidFill>
                   </a:tcPr>
                 </a:tc>
+                <a:extLst>
+                  <a:ext uri="{0D108BD9-81ED-4DB2-BD59-A6C34878D82A}">
+                    <a16:rowId xmlns:a16="http://schemas.microsoft.com/office/drawing/2014/main" val="10000"/>
+                  </a:ext>
+                </a:extLst>
               </a:tr>
               <a:tr h="365760">
                 <a:tc>
@@ -37690,7 +37001,7 @@
                     <a:bodyPr/>
                     <a:lstStyle/>
                     <a:p>
-                      <a:pPr algn="ctr" indent="0" marL="0">
+                      <a:pPr marL="0" indent="0" algn="ctr">
                         <a:buNone/>
                       </a:pPr>
                       <a:r>
@@ -37758,7 +37069,7 @@
                     <a:bodyPr/>
                     <a:lstStyle/>
                     <a:p>
-                      <a:pPr algn="ctr" indent="0" marL="0">
+                      <a:pPr marL="0" indent="0" algn="ctr">
                         <a:buNone/>
                       </a:pPr>
                       <a:r>
@@ -37826,7 +37137,7 @@
                     <a:bodyPr/>
                     <a:lstStyle/>
                     <a:p>
-                      <a:pPr algn="ctr" indent="0" marL="0">
+                      <a:pPr marL="0" indent="0" algn="ctr">
                         <a:buNone/>
                       </a:pPr>
                       <a:r>
@@ -37889,6 +37200,11 @@
                     </a:solidFill>
                   </a:tcPr>
                 </a:tc>
+                <a:extLst>
+                  <a:ext uri="{0D108BD9-81ED-4DB2-BD59-A6C34878D82A}">
+                    <a16:rowId xmlns:a16="http://schemas.microsoft.com/office/drawing/2014/main" val="10001"/>
+                  </a:ext>
+                </a:extLst>
               </a:tr>
               <a:tr h="365760">
                 <a:tc>
@@ -37896,7 +37212,7 @@
                     <a:bodyPr/>
                     <a:lstStyle/>
                     <a:p>
-                      <a:pPr algn="ctr" indent="0" marL="0">
+                      <a:pPr marL="0" indent="0" algn="ctr">
                         <a:buNone/>
                       </a:pPr>
                       <a:r>
@@ -37964,7 +37280,7 @@
                     <a:bodyPr/>
                     <a:lstStyle/>
                     <a:p>
-                      <a:pPr algn="ctr" indent="0" marL="0">
+                      <a:pPr marL="0" indent="0" algn="ctr">
                         <a:buNone/>
                       </a:pPr>
                       <a:r>
@@ -38032,7 +37348,7 @@
                     <a:bodyPr/>
                     <a:lstStyle/>
                     <a:p>
-                      <a:pPr algn="ctr" indent="0" marL="0">
+                      <a:pPr marL="0" indent="0" algn="ctr">
                         <a:buNone/>
                       </a:pPr>
                       <a:r>
@@ -38095,6 +37411,11 @@
                     </a:solidFill>
                   </a:tcPr>
                 </a:tc>
+                <a:extLst>
+                  <a:ext uri="{0D108BD9-81ED-4DB2-BD59-A6C34878D82A}">
+                    <a16:rowId xmlns:a16="http://schemas.microsoft.com/office/drawing/2014/main" val="10002"/>
+                  </a:ext>
+                </a:extLst>
               </a:tr>
               <a:tr h="365760">
                 <a:tc>
@@ -38102,7 +37423,7 @@
                     <a:bodyPr/>
                     <a:lstStyle/>
                     <a:p>
-                      <a:pPr algn="ctr" indent="0" marL="0">
+                      <a:pPr marL="0" indent="0" algn="ctr">
                         <a:buNone/>
                       </a:pPr>
                       <a:r>
@@ -38170,7 +37491,7 @@
                     <a:bodyPr/>
                     <a:lstStyle/>
                     <a:p>
-                      <a:pPr algn="ctr" indent="0" marL="0">
+                      <a:pPr marL="0" indent="0" algn="ctr">
                         <a:buNone/>
                       </a:pPr>
                       <a:r>
@@ -38238,7 +37559,7 @@
                     <a:bodyPr/>
                     <a:lstStyle/>
                     <a:p>
-                      <a:pPr algn="ctr" indent="0" marL="0">
+                      <a:pPr marL="0" indent="0" algn="ctr">
                         <a:buNone/>
                       </a:pPr>
                       <a:r>
@@ -38301,6 +37622,11 @@
                     </a:solidFill>
                   </a:tcPr>
                 </a:tc>
+                <a:extLst>
+                  <a:ext uri="{0D108BD9-81ED-4DB2-BD59-A6C34878D82A}">
+                    <a16:rowId xmlns:a16="http://schemas.microsoft.com/office/drawing/2014/main" val="10003"/>
+                  </a:ext>
+                </a:extLst>
               </a:tr>
               <a:tr h="365760">
                 <a:tc>
@@ -38308,7 +37634,7 @@
                     <a:bodyPr/>
                     <a:lstStyle/>
                     <a:p>
-                      <a:pPr algn="ctr" indent="0" marL="0">
+                      <a:pPr marL="0" indent="0" algn="ctr">
                         <a:buNone/>
                       </a:pPr>
                       <a:r>
@@ -38376,7 +37702,7 @@
                     <a:bodyPr/>
                     <a:lstStyle/>
                     <a:p>
-                      <a:pPr algn="ctr" indent="0" marL="0">
+                      <a:pPr marL="0" indent="0" algn="ctr">
                         <a:buNone/>
                       </a:pPr>
                       <a:r>
@@ -38444,7 +37770,7 @@
                     <a:bodyPr/>
                     <a:lstStyle/>
                     <a:p>
-                      <a:pPr algn="ctr" indent="0" marL="0">
+                      <a:pPr marL="0" indent="0" algn="ctr">
                         <a:buNone/>
                       </a:pPr>
                       <a:r>
@@ -38507,6 +37833,11 @@
                     </a:solidFill>
                   </a:tcPr>
                 </a:tc>
+                <a:extLst>
+                  <a:ext uri="{0D108BD9-81ED-4DB2-BD59-A6C34878D82A}">
+                    <a16:rowId xmlns:a16="http://schemas.microsoft.com/office/drawing/2014/main" val="10004"/>
+                  </a:ext>
+                </a:extLst>
               </a:tr>
               <a:tr h="365760">
                 <a:tc>
@@ -38514,7 +37845,7 @@
                     <a:bodyPr/>
                     <a:lstStyle/>
                     <a:p>
-                      <a:pPr algn="ctr" indent="0" marL="0">
+                      <a:pPr marL="0" indent="0" algn="ctr">
                         <a:buNone/>
                       </a:pPr>
                       <a:r>
@@ -38582,7 +37913,7 @@
                     <a:bodyPr/>
                     <a:lstStyle/>
                     <a:p>
-                      <a:pPr algn="ctr" indent="0" marL="0">
+                      <a:pPr marL="0" indent="0" algn="ctr">
                         <a:buNone/>
                       </a:pPr>
                       <a:r>
@@ -38650,7 +37981,7 @@
                     <a:bodyPr/>
                     <a:lstStyle/>
                     <a:p>
-                      <a:pPr algn="ctr" indent="0" marL="0">
+                      <a:pPr marL="0" indent="0" algn="ctr">
                         <a:buNone/>
                       </a:pPr>
                       <a:r>
@@ -38713,6 +38044,11 @@
                     </a:solidFill>
                   </a:tcPr>
                 </a:tc>
+                <a:extLst>
+                  <a:ext uri="{0D108BD9-81ED-4DB2-BD59-A6C34878D82A}">
+                    <a16:rowId xmlns:a16="http://schemas.microsoft.com/office/drawing/2014/main" val="10005"/>
+                  </a:ext>
+                </a:extLst>
               </a:tr>
             </a:tbl>
           </a:graphicData>
@@ -38739,7 +38075,7 @@
           <a:bodyPr wrap="square" lIns="0" tIns="0" rIns="0" bIns="0" rtlCol="0" anchor="t"/>
           <a:lstStyle/>
           <a:p>
-            <a:pPr indent="0" marL="0">
+            <a:pPr marL="0" indent="0">
               <a:spcAft>
                 <a:spcPts val="400"/>
               </a:spcAft>
@@ -38808,7 +38144,7 @@
           <a:bodyPr wrap="square" lIns="0" tIns="0" rIns="0" bIns="0" rtlCol="0" anchor="ctr"/>
           <a:lstStyle/>
           <a:p>
-            <a:pPr indent="0" marL="0">
+            <a:pPr marL="0" indent="0">
               <a:spcAft>
                 <a:spcPts val="400"/>
               </a:spcAft>
@@ -38825,12 +38161,6 @@
               </a:rPr>
               <a:t>Ridge no elimina la multicolinealidad: la domestica. </a:t>
             </a:r>
-            <a:pPr indent="0" marL="0">
-              <a:spcAft>
-                <a:spcPts val="400"/>
-              </a:spcAft>
-              <a:buNone/>
-            </a:pPr>
             <a:r>
               <a:rPr lang="en-US" sz="1200" dirty="0">
                 <a:solidFill>
@@ -38862,6 +38192,7 @@
         <a:solidFill>
           <a:srgbClr val="F5F7FB"/>
         </a:solidFill>
+        <a:effectLst/>
       </p:bgPr>
     </p:bg>
     <p:spTree>
@@ -38926,11 +38257,11 @@
           <a:bodyPr wrap="square" lIns="0" tIns="0" rIns="0" bIns="0" rtlCol="0" anchor="ctr"/>
           <a:lstStyle/>
           <a:p>
-            <a:pPr algn="ctr" indent="0" marL="0">
+            <a:pPr marL="0" indent="0" algn="ctr">
               <a:buNone/>
             </a:pPr>
             <a:r>
-              <a:rPr lang="en-US" sz="1100" b="1" spc="150" kern="0" dirty="0">
+              <a:rPr lang="en-US" sz="1100" b="1" kern="0" spc="150" dirty="0">
                 <a:solidFill>
                   <a:srgbClr val="FFFFFF"/>
                 </a:solidFill>
@@ -38965,7 +38296,7 @@
           <a:bodyPr wrap="square" lIns="0" tIns="0" rIns="0" bIns="0" rtlCol="0" anchor="ctr"/>
           <a:lstStyle/>
           <a:p>
-            <a:pPr indent="0" marL="0">
+            <a:pPr marL="0" indent="0">
               <a:buNone/>
             </a:pPr>
             <a:r>
@@ -39004,7 +38335,7 @@
           <a:bodyPr wrap="square" lIns="0" tIns="0" rIns="0" bIns="0" rtlCol="0" anchor="ctr"/>
           <a:lstStyle/>
           <a:p>
-            <a:pPr indent="0" marL="0">
+            <a:pPr marL="0" indent="0">
               <a:buNone/>
             </a:pPr>
             <a:r>
@@ -39070,7 +38401,7 @@
           <a:bodyPr wrap="square" lIns="0" tIns="0" rIns="0" bIns="0" rtlCol="0" anchor="ctr"/>
           <a:lstStyle/>
           <a:p>
-            <a:pPr indent="0" marL="0">
+            <a:pPr marL="0" indent="0">
               <a:buNone/>
             </a:pPr>
             <a:r>
@@ -39109,7 +38440,7 @@
           <a:bodyPr wrap="square" lIns="0" tIns="0" rIns="0" bIns="0" rtlCol="0" anchor="ctr"/>
           <a:lstStyle/>
           <a:p>
-            <a:pPr indent="0" marL="0">
+            <a:pPr marL="0" indent="0">
               <a:buNone/>
             </a:pPr>
             <a:r>
@@ -39148,7 +38479,7 @@
           <a:bodyPr wrap="square" lIns="0" tIns="0" rIns="0" bIns="0" rtlCol="0" anchor="t"/>
           <a:lstStyle/>
           <a:p>
-            <a:pPr indent="0" marL="0">
+            <a:pPr marL="0" indent="0">
               <a:spcAft>
                 <a:spcPts val="400"/>
               </a:spcAft>
@@ -39217,7 +38548,7 @@
           <a:bodyPr wrap="square" lIns="0" tIns="0" rIns="0" bIns="0" rtlCol="0" anchor="ctr"/>
           <a:lstStyle/>
           <a:p>
-            <a:pPr indent="0" marL="0">
+            <a:pPr marL="0" indent="0">
               <a:buNone/>
             </a:pPr>
             <a:r>
@@ -39256,7 +38587,7 @@
           <a:bodyPr wrap="square" lIns="0" tIns="0" rIns="0" bIns="0" rtlCol="0" anchor="ctr"/>
           <a:lstStyle/>
           <a:p>
-            <a:pPr indent="0" marL="0">
+            <a:pPr marL="0" indent="0">
               <a:buNone/>
             </a:pPr>
             <a:r>
@@ -39295,7 +38626,7 @@
           <a:bodyPr wrap="square" lIns="0" tIns="0" rIns="0" bIns="0" rtlCol="0" anchor="t"/>
           <a:lstStyle/>
           <a:p>
-            <a:pPr indent="0" marL="0">
+            <a:pPr marL="0" indent="0">
               <a:spcAft>
                 <a:spcPts val="400"/>
               </a:spcAft>
@@ -39364,7 +38695,7 @@
           <a:bodyPr wrap="square" lIns="0" tIns="0" rIns="0" bIns="0" rtlCol="0" anchor="ctr"/>
           <a:lstStyle/>
           <a:p>
-            <a:pPr indent="0" marL="0">
+            <a:pPr marL="0" indent="0">
               <a:spcAft>
                 <a:spcPts val="400"/>
               </a:spcAft>
@@ -39381,12 +38712,6 @@
               </a:rPr>
               <a:t>El trade-off sesgo-varianza de la Clase 1, </a:t>
             </a:r>
-            <a:pPr indent="0" marL="0">
-              <a:spcAft>
-                <a:spcPts val="400"/>
-              </a:spcAft>
-              <a:buNone/>
-            </a:pPr>
             <a:r>
               <a:rPr lang="en-US" sz="1250" dirty="0">
                 <a:solidFill>
@@ -39423,7 +38748,7 @@
           <a:bodyPr wrap="square" lIns="0" tIns="0" rIns="0" bIns="0" rtlCol="0" anchor="ctr"/>
           <a:lstStyle/>
           <a:p>
-            <a:pPr indent="0" marL="0">
+            <a:pPr marL="0" indent="0">
               <a:buNone/>
             </a:pPr>
             <a:r>
@@ -39457,6 +38782,7 @@
         <a:solidFill>
           <a:srgbClr val="F5F7FB"/>
         </a:solidFill>
+        <a:effectLst/>
       </p:bgPr>
     </p:bg>
     <p:spTree>
@@ -39521,11 +38847,11 @@
           <a:bodyPr wrap="square" lIns="0" tIns="0" rIns="0" bIns="0" rtlCol="0" anchor="ctr"/>
           <a:lstStyle/>
           <a:p>
-            <a:pPr algn="ctr" indent="0" marL="0">
+            <a:pPr marL="0" indent="0" algn="ctr">
               <a:buNone/>
             </a:pPr>
             <a:r>
-              <a:rPr lang="en-US" sz="1100" b="1" spc="150" kern="0" dirty="0">
+              <a:rPr lang="en-US" sz="1100" b="1" kern="0" spc="150" dirty="0">
                 <a:solidFill>
                   <a:srgbClr val="FFFFFF"/>
                 </a:solidFill>
@@ -39560,7 +38886,7 @@
           <a:bodyPr wrap="square" lIns="0" tIns="0" rIns="0" bIns="0" rtlCol="0" anchor="ctr"/>
           <a:lstStyle/>
           <a:p>
-            <a:pPr indent="0" marL="0">
+            <a:pPr marL="0" indent="0">
               <a:buNone/>
             </a:pPr>
             <a:r>
@@ -39599,7 +38925,7 @@
           <a:bodyPr wrap="square" lIns="0" tIns="0" rIns="0" bIns="0" rtlCol="0" anchor="ctr"/>
           <a:lstStyle/>
           <a:p>
-            <a:pPr indent="0" marL="0">
+            <a:pPr marL="0" indent="0">
               <a:buNone/>
             </a:pPr>
             <a:r>
@@ -39665,7 +38991,7 @@
           <a:bodyPr wrap="square" lIns="0" tIns="0" rIns="0" bIns="0" rtlCol="0" anchor="ctr"/>
           <a:lstStyle/>
           <a:p>
-            <a:pPr algn="ctr" indent="0" marL="0">
+            <a:pPr marL="0" indent="0" algn="ctr">
               <a:buNone/>
             </a:pPr>
             <a:r>
@@ -39679,9 +39005,6 @@
               </a:rPr>
               <a:t>Lasso minimiza   </a:t>
             </a:r>
-            <a:pPr algn="ctr" indent="0" marL="0">
-              <a:buNone/>
-            </a:pPr>
             <a:r>
               <a:rPr lang="en-US" sz="2800" b="1" dirty="0">
                 <a:solidFill>
@@ -39693,9 +39016,6 @@
               </a:rPr>
               <a:t>Σ eᵢ²</a:t>
             </a:r>
-            <a:pPr algn="ctr" indent="0" marL="0">
-              <a:buNone/>
-            </a:pPr>
             <a:r>
               <a:rPr lang="en-US" sz="2800" b="1" dirty="0">
                 <a:solidFill>
@@ -39707,9 +39027,6 @@
               </a:rPr>
               <a:t>   +   </a:t>
             </a:r>
-            <a:pPr algn="ctr" indent="0" marL="0">
-              <a:buNone/>
-            </a:pPr>
             <a:r>
               <a:rPr lang="en-US" sz="2800" b="1" dirty="0">
                 <a:solidFill>
@@ -39800,7 +39117,7 @@
           <a:bodyPr wrap="square" lIns="0" tIns="0" rIns="0" bIns="0" rtlCol="0" anchor="ctr"/>
           <a:lstStyle/>
           <a:p>
-            <a:pPr indent="0" marL="0">
+            <a:pPr marL="0" indent="0">
               <a:buNone/>
             </a:pPr>
             <a:r>
@@ -39839,7 +39156,7 @@
           <a:bodyPr wrap="square" lIns="0" tIns="0" rIns="0" bIns="0" rtlCol="0" anchor="t"/>
           <a:lstStyle/>
           <a:p>
-            <a:pPr indent="0" marL="0">
+            <a:pPr marL="0" indent="0">
               <a:spcAft>
                 <a:spcPts val="400"/>
               </a:spcAft>
@@ -39908,7 +39225,7 @@
           <a:bodyPr wrap="square" lIns="0" tIns="0" rIns="0" bIns="0" rtlCol="0" anchor="ctr"/>
           <a:lstStyle/>
           <a:p>
-            <a:pPr indent="0" marL="0">
+            <a:pPr marL="0" indent="0">
               <a:spcAft>
                 <a:spcPts val="400"/>
               </a:spcAft>
@@ -39925,12 +39242,6 @@
               </a:rPr>
               <a:t>α = 1 000: elimina 2 de 12. </a:t>
             </a:r>
-            <a:pPr indent="0" marL="0">
-              <a:spcAft>
-                <a:spcPts val="400"/>
-              </a:spcAft>
-              <a:buNone/>
-            </a:pPr>
             <a:r>
               <a:rPr lang="en-US" sz="1250" dirty="0">
                 <a:solidFill>
@@ -39994,7 +39305,7 @@
           <a:bodyPr wrap="square" lIns="0" tIns="0" rIns="0" bIns="0" rtlCol="0" anchor="ctr"/>
           <a:lstStyle/>
           <a:p>
-            <a:pPr indent="0" marL="0">
+            <a:pPr marL="0" indent="0">
               <a:spcAft>
                 <a:spcPts val="400"/>
               </a:spcAft>
@@ -40011,12 +39322,6 @@
               </a:rPr>
               <a:t>α = 5 000: sobreviven 6. </a:t>
             </a:r>
-            <a:pPr indent="0" marL="0">
-              <a:spcAft>
-                <a:spcPts val="400"/>
-              </a:spcAft>
-              <a:buNone/>
-            </a:pPr>
             <a:r>
               <a:rPr lang="en-US" sz="1250" dirty="0">
                 <a:solidFill>
@@ -40333,4 +39638,319 @@
     </a:ext>
   </a:extLst>
 </a:theme>
+</file>
+
+<file path=ppt/theme/theme2.xml><?xml version="1.0" encoding="utf-8"?>
+<a:theme xmlns:a="http://schemas.openxmlformats.org/drawingml/2006/main" name="Office Theme">
+  <a:themeElements>
+    <a:clrScheme name="Office">
+      <a:dk1>
+        <a:sysClr val="windowText" lastClr="000000"/>
+      </a:dk1>
+      <a:lt1>
+        <a:sysClr val="window" lastClr="FFFFFF"/>
+      </a:lt1>
+      <a:dk2>
+        <a:srgbClr val="0E2841"/>
+      </a:dk2>
+      <a:lt2>
+        <a:srgbClr val="E8E8E8"/>
+      </a:lt2>
+      <a:accent1>
+        <a:srgbClr val="156082"/>
+      </a:accent1>
+      <a:accent2>
+        <a:srgbClr val="E97132"/>
+      </a:accent2>
+      <a:accent3>
+        <a:srgbClr val="196B24"/>
+      </a:accent3>
+      <a:accent4>
+        <a:srgbClr val="0F9ED5"/>
+      </a:accent4>
+      <a:accent5>
+        <a:srgbClr val="A02B93"/>
+      </a:accent5>
+      <a:accent6>
+        <a:srgbClr val="4EA72E"/>
+      </a:accent6>
+      <a:hlink>
+        <a:srgbClr val="467886"/>
+      </a:hlink>
+      <a:folHlink>
+        <a:srgbClr val="96607D"/>
+      </a:folHlink>
+    </a:clrScheme>
+    <a:fontScheme name="Office">
+      <a:majorFont>
+        <a:latin typeface="Aptos Display" panose="02110004020202020204"/>
+        <a:ea typeface=""/>
+        <a:cs typeface=""/>
+        <a:font script="Jpan" typeface="游ゴシック Light"/>
+        <a:font script="Hang" typeface="맑은 고딕"/>
+        <a:font script="Hans" typeface="等线 Light"/>
+        <a:font script="Hant" typeface="新細明體"/>
+        <a:font script="Arab" typeface="Times New Roman"/>
+        <a:font script="Hebr" typeface="Times New Roman"/>
+        <a:font script="Thai" typeface="Angsana New"/>
+        <a:font script="Ethi" typeface="Nyala"/>
+        <a:font script="Beng" typeface="Vrinda"/>
+        <a:font script="Gujr" typeface="Shruti"/>
+        <a:font script="Khmr" typeface="MoolBoran"/>
+        <a:font script="Knda" typeface="Tunga"/>
+        <a:font script="Guru" typeface="Raavi"/>
+        <a:font script="Cans" typeface="Euphemia"/>
+        <a:font script="Cher" typeface="Plantagenet Cherokee"/>
+        <a:font script="Yiii" typeface="Microsoft Yi Baiti"/>
+        <a:font script="Tibt" typeface="Microsoft Himalaya"/>
+        <a:font script="Thaa" typeface="MV Boli"/>
+        <a:font script="Deva" typeface="Mangal"/>
+        <a:font script="Telu" typeface="Gautami"/>
+        <a:font script="Taml" typeface="Latha"/>
+        <a:font script="Syrc" typeface="Estrangelo Edessa"/>
+        <a:font script="Orya" typeface="Kalinga"/>
+        <a:font script="Mlym" typeface="Kartika"/>
+        <a:font script="Laoo" typeface="DokChampa"/>
+        <a:font script="Sinh" typeface="Iskoola Pota"/>
+        <a:font script="Mong" typeface="Mongolian Baiti"/>
+        <a:font script="Viet" typeface="Times New Roman"/>
+        <a:font script="Uigh" typeface="Microsoft Uighur"/>
+        <a:font script="Geor" typeface="Sylfaen"/>
+        <a:font script="Armn" typeface="Arial"/>
+        <a:font script="Bugi" typeface="Leelawadee UI"/>
+        <a:font script="Bopo" typeface="Microsoft JhengHei"/>
+        <a:font script="Java" typeface="Javanese Text"/>
+        <a:font script="Lisu" typeface="Segoe UI"/>
+        <a:font script="Mymr" typeface="Myanmar Text"/>
+        <a:font script="Nkoo" typeface="Ebrima"/>
+        <a:font script="Olck" typeface="Nirmala UI"/>
+        <a:font script="Osma" typeface="Ebrima"/>
+        <a:font script="Phag" typeface="Phagspa"/>
+        <a:font script="Syrn" typeface="Estrangelo Edessa"/>
+        <a:font script="Syrj" typeface="Estrangelo Edessa"/>
+        <a:font script="Syre" typeface="Estrangelo Edessa"/>
+        <a:font script="Sora" typeface="Nirmala UI"/>
+        <a:font script="Tale" typeface="Microsoft Tai Le"/>
+        <a:font script="Talu" typeface="Microsoft New Tai Lue"/>
+        <a:font script="Tfng" typeface="Ebrima"/>
+      </a:majorFont>
+      <a:minorFont>
+        <a:latin typeface="Aptos" panose="02110004020202020204"/>
+        <a:ea typeface=""/>
+        <a:cs typeface=""/>
+        <a:font script="Jpan" typeface="游ゴシック"/>
+        <a:font script="Hang" typeface="맑은 고딕"/>
+        <a:font script="Hans" typeface="等线"/>
+        <a:font script="Hant" typeface="新細明體"/>
+        <a:font script="Arab" typeface="Arial"/>
+        <a:font script="Hebr" typeface="Arial"/>
+        <a:font script="Thai" typeface="Cordia New"/>
+        <a:font script="Ethi" typeface="Nyala"/>
+        <a:font script="Beng" typeface="Vrinda"/>
+        <a:font script="Gujr" typeface="Shruti"/>
+        <a:font script="Khmr" typeface="DaunPenh"/>
+        <a:font script="Knda" typeface="Tunga"/>
+        <a:font script="Guru" typeface="Raavi"/>
+        <a:font script="Cans" typeface="Euphemia"/>
+        <a:font script="Cher" typeface="Plantagenet Cherokee"/>
+        <a:font script="Yiii" typeface="Microsoft Yi Baiti"/>
+        <a:font script="Tibt" typeface="Microsoft Himalaya"/>
+        <a:font script="Thaa" typeface="MV Boli"/>
+        <a:font script="Deva" typeface="Mangal"/>
+        <a:font script="Telu" typeface="Gautami"/>
+        <a:font script="Taml" typeface="Latha"/>
+        <a:font script="Syrc" typeface="Estrangelo Edessa"/>
+        <a:font script="Orya" typeface="Kalinga"/>
+        <a:font script="Mlym" typeface="Kartika"/>
+        <a:font script="Laoo" typeface="DokChampa"/>
+        <a:font script="Sinh" typeface="Iskoola Pota"/>
+        <a:font script="Mong" typeface="Mongolian Baiti"/>
+        <a:font script="Viet" typeface="Arial"/>
+        <a:font script="Uigh" typeface="Microsoft Uighur"/>
+        <a:font script="Geor" typeface="Sylfaen"/>
+        <a:font script="Armn" typeface="Arial"/>
+        <a:font script="Bugi" typeface="Leelawadee UI"/>
+        <a:font script="Bopo" typeface="Microsoft JhengHei"/>
+        <a:font script="Java" typeface="Javanese Text"/>
+        <a:font script="Lisu" typeface="Segoe UI"/>
+        <a:font script="Mymr" typeface="Myanmar Text"/>
+        <a:font script="Nkoo" typeface="Ebrima"/>
+        <a:font script="Olck" typeface="Nirmala UI"/>
+        <a:font script="Osma" typeface="Ebrima"/>
+        <a:font script="Phag" typeface="Phagspa"/>
+        <a:font script="Syrn" typeface="Estrangelo Edessa"/>
+        <a:font script="Syrj" typeface="Estrangelo Edessa"/>
+        <a:font script="Syre" typeface="Estrangelo Edessa"/>
+        <a:font script="Sora" typeface="Nirmala UI"/>
+        <a:font script="Tale" typeface="Microsoft Tai Le"/>
+        <a:font script="Talu" typeface="Microsoft New Tai Lue"/>
+        <a:font script="Tfng" typeface="Ebrima"/>
+      </a:minorFont>
+    </a:fontScheme>
+    <a:fmtScheme name="Office">
+      <a:fillStyleLst>
+        <a:solidFill>
+          <a:schemeClr val="phClr"/>
+        </a:solidFill>
+        <a:gradFill rotWithShape="1">
+          <a:gsLst>
+            <a:gs pos="0">
+              <a:schemeClr val="phClr">
+                <a:lumMod val="110000"/>
+                <a:satMod val="105000"/>
+                <a:tint val="67000"/>
+              </a:schemeClr>
+            </a:gs>
+            <a:gs pos="50000">
+              <a:schemeClr val="phClr">
+                <a:lumMod val="105000"/>
+                <a:satMod val="103000"/>
+                <a:tint val="73000"/>
+              </a:schemeClr>
+            </a:gs>
+            <a:gs pos="100000">
+              <a:schemeClr val="phClr">
+                <a:lumMod val="105000"/>
+                <a:satMod val="109000"/>
+                <a:tint val="81000"/>
+              </a:schemeClr>
+            </a:gs>
+          </a:gsLst>
+          <a:lin ang="5400000" scaled="0"/>
+        </a:gradFill>
+        <a:gradFill rotWithShape="1">
+          <a:gsLst>
+            <a:gs pos="0">
+              <a:schemeClr val="phClr">
+                <a:satMod val="103000"/>
+                <a:lumMod val="102000"/>
+                <a:tint val="94000"/>
+              </a:schemeClr>
+            </a:gs>
+            <a:gs pos="50000">
+              <a:schemeClr val="phClr">
+                <a:satMod val="110000"/>
+                <a:lumMod val="100000"/>
+                <a:shade val="100000"/>
+              </a:schemeClr>
+            </a:gs>
+            <a:gs pos="100000">
+              <a:schemeClr val="phClr">
+                <a:lumMod val="99000"/>
+                <a:satMod val="120000"/>
+                <a:shade val="78000"/>
+              </a:schemeClr>
+            </a:gs>
+          </a:gsLst>
+          <a:lin ang="5400000" scaled="0"/>
+        </a:gradFill>
+      </a:fillStyleLst>
+      <a:lnStyleLst>
+        <a:ln w="12700" cap="flat" cmpd="sng" algn="ctr">
+          <a:solidFill>
+            <a:schemeClr val="phClr"/>
+          </a:solidFill>
+          <a:prstDash val="solid"/>
+          <a:miter lim="800000"/>
+        </a:ln>
+        <a:ln w="19050" cap="flat" cmpd="sng" algn="ctr">
+          <a:solidFill>
+            <a:schemeClr val="phClr"/>
+          </a:solidFill>
+          <a:prstDash val="solid"/>
+          <a:miter lim="800000"/>
+        </a:ln>
+        <a:ln w="25400" cap="flat" cmpd="sng" algn="ctr">
+          <a:solidFill>
+            <a:schemeClr val="phClr"/>
+          </a:solidFill>
+          <a:prstDash val="solid"/>
+          <a:miter lim="800000"/>
+        </a:ln>
+      </a:lnStyleLst>
+      <a:effectStyleLst>
+        <a:effectStyle>
+          <a:effectLst/>
+        </a:effectStyle>
+        <a:effectStyle>
+          <a:effectLst/>
+        </a:effectStyle>
+        <a:effectStyle>
+          <a:effectLst>
+            <a:outerShdw blurRad="57150" dist="19050" dir="5400000" algn="ctr" rotWithShape="0">
+              <a:srgbClr val="000000">
+                <a:alpha val="63000"/>
+              </a:srgbClr>
+            </a:outerShdw>
+          </a:effectLst>
+        </a:effectStyle>
+      </a:effectStyleLst>
+      <a:bgFillStyleLst>
+        <a:solidFill>
+          <a:schemeClr val="phClr"/>
+        </a:solidFill>
+        <a:solidFill>
+          <a:schemeClr val="phClr">
+            <a:tint val="95000"/>
+            <a:satMod val="170000"/>
+          </a:schemeClr>
+        </a:solidFill>
+        <a:gradFill rotWithShape="1">
+          <a:gsLst>
+            <a:gs pos="0">
+              <a:schemeClr val="phClr">
+                <a:tint val="93000"/>
+                <a:satMod val="150000"/>
+                <a:shade val="98000"/>
+                <a:lumMod val="102000"/>
+              </a:schemeClr>
+            </a:gs>
+            <a:gs pos="50000">
+              <a:schemeClr val="phClr">
+                <a:tint val="98000"/>
+                <a:satMod val="130000"/>
+                <a:shade val="90000"/>
+                <a:lumMod val="103000"/>
+              </a:schemeClr>
+            </a:gs>
+            <a:gs pos="100000">
+              <a:schemeClr val="phClr">
+                <a:shade val="63000"/>
+                <a:satMod val="120000"/>
+              </a:schemeClr>
+            </a:gs>
+          </a:gsLst>
+          <a:lin ang="5400000" scaled="0"/>
+        </a:gradFill>
+      </a:bgFillStyleLst>
+    </a:fmtScheme>
+  </a:themeElements>
+  <a:objectDefaults>
+    <a:lnDef>
+      <a:spPr/>
+      <a:bodyPr/>
+      <a:lstStyle/>
+      <a:style>
+        <a:lnRef idx="2">
+          <a:schemeClr val="accent1"/>
+        </a:lnRef>
+        <a:fillRef idx="0">
+          <a:schemeClr val="accent1"/>
+        </a:fillRef>
+        <a:effectRef idx="1">
+          <a:schemeClr val="accent1"/>
+        </a:effectRef>
+        <a:fontRef idx="minor">
+          <a:schemeClr val="tx1"/>
+        </a:fontRef>
+      </a:style>
+    </a:lnDef>
+  </a:objectDefaults>
+  <a:extraClrSchemeLst/>
+  <a:extLst>
+    <a:ext uri="{05A4C25C-085E-4340-85A3-A5531E510DB2}">
+      <thm15:themeFamily xmlns:thm15="http://schemas.microsoft.com/office/thememl/2012/main" name="Office Theme" id="{2E142A2C-CD16-42D6-873A-C26D2A0506FA}" vid="{1BDDFF52-6CD6-40A5-AB3C-68EB2F1E4D0A}"/>
+    </a:ext>
+  </a:extLst>
+</a:theme>
 </file>